--- a/BBDD/vendes/Vendes.pptx
+++ b/BBDD/vendes/Vendes.pptx
@@ -8,6 +8,10 @@
     <p:sldId id="260" r:id="rId2"/>
     <p:sldId id="269" r:id="rId3"/>
     <p:sldId id="264" r:id="rId4"/>
+    <p:sldId id="284" r:id="rId5"/>
+    <p:sldId id="286" r:id="rId6"/>
+    <p:sldId id="283" r:id="rId7"/>
+    <p:sldId id="285" r:id="rId8"/>
   </p:sldIdLst>
   <p:sldSz cx="12192000" cy="6858000"/>
   <p:notesSz cx="6858000" cy="9144000"/>
@@ -106,6 +110,11 @@
       </a:defRPr>
     </a:lvl9pPr>
   </p:defaultTextStyle>
+  <p:extLst>
+    <p:ext uri="{EFAFB233-063F-42B5-8137-9DF3F51BA10A}">
+      <p15:sldGuideLst xmlns:p15="http://schemas.microsoft.com/office/powerpoint/2012/main"/>
+    </p:ext>
+  </p:extLst>
 </p:presentation>
 </file>
 
@@ -3335,10 +3344,16 @@
           <p:cNvGraphicFramePr>
             <a:graphicFrameLocks noGrp="1"/>
           </p:cNvGraphicFramePr>
-          <p:nvPr/>
+          <p:nvPr>
+            <p:extLst>
+              <p:ext uri="{D42A27DB-BD31-4B8C-83A1-F6EECF244321}">
+                <p14:modId xmlns:p14="http://schemas.microsoft.com/office/powerpoint/2010/main" val="3164446438"/>
+              </p:ext>
+            </p:extLst>
+          </p:nvPr>
         </p:nvGraphicFramePr>
         <p:xfrm>
-          <a:off x="469660" y="2056825"/>
+          <a:off x="1461697" y="1159678"/>
           <a:ext cx="8891136" cy="3672840"/>
         </p:xfrm>
         <a:graphic>
@@ -4447,7 +4462,18 @@
                           <a:ea typeface="+mn-ea"/>
                           <a:cs typeface="+mn-cs"/>
                         </a:rPr>
-                        <a:t> varis</a:t>
+                        <a:t> </a:t>
+                      </a:r>
+                      <a:r>
+                        <a:rPr lang="es-ES" sz="1800" b="1" kern="1200" dirty="0" err="1">
+                          <a:solidFill>
+                            <a:schemeClr val="lt1"/>
+                          </a:solidFill>
+                          <a:latin typeface="+mn-lt"/>
+                          <a:ea typeface="+mn-ea"/>
+                          <a:cs typeface="+mn-cs"/>
+                        </a:rPr>
+                        <a:t>clients</a:t>
                       </a:r>
                       <a:endParaRPr lang="es-ES" dirty="0"/>
                     </a:p>
@@ -6878,10 +6904,10 @@
           <a:lstStyle/>
           <a:p>
             <a:r>
-              <a:rPr lang="es-ES" sz="1100" dirty="0" err="1"/>
+              <a:rPr lang="es-ES" sz="1100" u="sng" dirty="0" err="1"/>
               <a:t>ID_prov</a:t>
             </a:r>
-            <a:endParaRPr lang="es-ES" sz="1100" dirty="0"/>
+            <a:endParaRPr lang="es-ES" sz="1100" u="sng" dirty="0"/>
           </a:p>
         </p:txBody>
       </p:sp>
@@ -7349,12 +7375,9 @@
             <a:pPr algn="ctr"/>
             <a:r>
               <a:rPr lang="es-ES" dirty="0" err="1"/>
-              <a:t>Telèfons</a:t>
-            </a:r>
-            <a:r>
-              <a:rPr lang="es-ES" dirty="0"/>
-              <a:t> varis</a:t>
-            </a:r>
+              <a:t>Telèfons_clients</a:t>
+            </a:r>
+            <a:endParaRPr lang="es-ES" dirty="0"/>
           </a:p>
         </p:txBody>
       </p:sp>
@@ -7700,10 +7723,10 @@
           <a:lstStyle/>
           <a:p>
             <a:r>
-              <a:rPr lang="es-ES" sz="1100" dirty="0" err="1"/>
+              <a:rPr lang="es-ES" sz="1100" u="sng" dirty="0" err="1"/>
               <a:t>ID_factura</a:t>
             </a:r>
-            <a:endParaRPr lang="es-ES" sz="1100" dirty="0"/>
+            <a:endParaRPr lang="es-ES" sz="1100" u="sng" dirty="0"/>
           </a:p>
         </p:txBody>
       </p:sp>
@@ -8393,7 +8416,7 @@
                   <a:srgbClr val="FF0000"/>
                 </a:solidFill>
               </a:rPr>
-              <a:t>TELÈFONS_VARIS</a:t>
+              <a:t>TELÈFONS_CLIENTS</a:t>
             </a:r>
             <a:r>
               <a:rPr lang="es-ES" dirty="0"/>
@@ -8932,6 +8955,6103 @@
     <p:extLst>
       <p:ext uri="{BB962C8B-B14F-4D97-AF65-F5344CB8AC3E}">
         <p14:creationId xmlns:p14="http://schemas.microsoft.com/office/powerpoint/2010/main" val="1015674629"/>
+      </p:ext>
+    </p:extLst>
+  </p:cSld>
+  <p:clrMapOvr>
+    <a:masterClrMapping/>
+  </p:clrMapOvr>
+</p:sld>
+</file>
+
+<file path=ppt/slides/slide4.xml><?xml version="1.0" encoding="utf-8"?>
+<p:sld xmlns:a="http://schemas.openxmlformats.org/drawingml/2006/main" xmlns:r="http://schemas.openxmlformats.org/officeDocument/2006/relationships" xmlns:p="http://schemas.openxmlformats.org/presentationml/2006/main">
+  <p:cSld>
+    <p:spTree>
+      <p:nvGrpSpPr>
+        <p:cNvPr id="1" name=""/>
+        <p:cNvGrpSpPr/>
+        <p:nvPr/>
+      </p:nvGrpSpPr>
+      <p:grpSpPr>
+        <a:xfrm>
+          <a:off x="0" y="0"/>
+          <a:ext cx="0" cy="0"/>
+          <a:chOff x="0" y="0"/>
+          <a:chExt cx="0" cy="0"/>
+        </a:xfrm>
+      </p:grpSpPr>
+      <p:pic>
+        <p:nvPicPr>
+          <p:cNvPr id="22" name="Imagen 21">
+            <a:extLst>
+              <a:ext uri="{FF2B5EF4-FFF2-40B4-BE49-F238E27FC236}">
+                <a16:creationId xmlns:a16="http://schemas.microsoft.com/office/drawing/2014/main" id="{374D0248-92B1-1464-8601-889C7D7E384C}"/>
+              </a:ext>
+            </a:extLst>
+          </p:cNvPr>
+          <p:cNvPicPr>
+            <a:picLocks noChangeAspect="1"/>
+          </p:cNvPicPr>
+          <p:nvPr/>
+        </p:nvPicPr>
+        <p:blipFill>
+          <a:blip r:embed="rId2">
+            <a:extLst>
+              <a:ext uri="{28A0092B-C50C-407E-A947-70E740481C1C}">
+                <a14:useLocalDpi xmlns:a14="http://schemas.microsoft.com/office/drawing/2010/main" val="0"/>
+              </a:ext>
+            </a:extLst>
+          </a:blip>
+          <a:stretch>
+            <a:fillRect/>
+          </a:stretch>
+        </p:blipFill>
+        <p:spPr>
+          <a:xfrm>
+            <a:off x="0" y="1532270"/>
+            <a:ext cx="12192000" cy="3793459"/>
+          </a:xfrm>
+          <a:prstGeom prst="rect">
+            <a:avLst/>
+          </a:prstGeom>
+        </p:spPr>
+      </p:pic>
+      <p:sp>
+        <p:nvSpPr>
+          <p:cNvPr id="23" name="CuadroTexto 22">
+            <a:extLst>
+              <a:ext uri="{FF2B5EF4-FFF2-40B4-BE49-F238E27FC236}">
+                <a16:creationId xmlns:a16="http://schemas.microsoft.com/office/drawing/2014/main" id="{50692FA0-3C7F-AC0C-B919-0DDA66B40057}"/>
+              </a:ext>
+            </a:extLst>
+          </p:cNvPr>
+          <p:cNvSpPr txBox="1"/>
+          <p:nvPr/>
+        </p:nvSpPr>
+        <p:spPr>
+          <a:xfrm>
+            <a:off x="224285" y="155275"/>
+            <a:ext cx="2173858" cy="369332"/>
+          </a:xfrm>
+          <a:prstGeom prst="rect">
+            <a:avLst/>
+          </a:prstGeom>
+          <a:noFill/>
+        </p:spPr>
+        <p:txBody>
+          <a:bodyPr wrap="square" rtlCol="0">
+            <a:spAutoFit/>
+          </a:bodyPr>
+          <a:lstStyle/>
+          <a:p>
+            <a:r>
+              <a:rPr lang="es-ES" dirty="0"/>
+              <a:t>SOLUCIO a </a:t>
+            </a:r>
+            <a:r>
+              <a:rPr lang="es-ES" dirty="0" err="1"/>
+              <a:t>classe</a:t>
+            </a:r>
+            <a:endParaRPr lang="es-ES" dirty="0"/>
+          </a:p>
+        </p:txBody>
+      </p:sp>
+    </p:spTree>
+    <p:extLst>
+      <p:ext uri="{BB962C8B-B14F-4D97-AF65-F5344CB8AC3E}">
+        <p14:creationId xmlns:p14="http://schemas.microsoft.com/office/powerpoint/2010/main" val="4196667546"/>
+      </p:ext>
+    </p:extLst>
+  </p:cSld>
+  <p:clrMapOvr>
+    <a:masterClrMapping/>
+  </p:clrMapOvr>
+</p:sld>
+</file>
+
+<file path=ppt/slides/slide5.xml><?xml version="1.0" encoding="utf-8"?>
+<p:sld xmlns:a="http://schemas.openxmlformats.org/drawingml/2006/main" xmlns:r="http://schemas.openxmlformats.org/officeDocument/2006/relationships" xmlns:p="http://schemas.openxmlformats.org/presentationml/2006/main">
+  <p:cSld>
+    <p:spTree>
+      <p:nvGrpSpPr>
+        <p:cNvPr id="1" name=""/>
+        <p:cNvGrpSpPr/>
+        <p:nvPr/>
+      </p:nvGrpSpPr>
+      <p:grpSpPr>
+        <a:xfrm>
+          <a:off x="0" y="0"/>
+          <a:ext cx="0" cy="0"/>
+          <a:chOff x="0" y="0"/>
+          <a:chExt cx="0" cy="0"/>
+        </a:xfrm>
+      </p:grpSpPr>
+      <p:graphicFrame>
+        <p:nvGraphicFramePr>
+          <p:cNvPr id="2" name="Tabla 1">
+            <a:extLst>
+              <a:ext uri="{FF2B5EF4-FFF2-40B4-BE49-F238E27FC236}">
+                <a16:creationId xmlns:a16="http://schemas.microsoft.com/office/drawing/2014/main" id="{A05E123E-93D8-0B68-F71E-8D2769829D06}"/>
+              </a:ext>
+            </a:extLst>
+          </p:cNvPr>
+          <p:cNvGraphicFramePr>
+            <a:graphicFrameLocks noGrp="1"/>
+          </p:cNvGraphicFramePr>
+          <p:nvPr>
+            <p:extLst>
+              <p:ext uri="{D42A27DB-BD31-4B8C-83A1-F6EECF244321}">
+                <p14:modId xmlns:p14="http://schemas.microsoft.com/office/powerpoint/2010/main" val="811771439"/>
+              </p:ext>
+            </p:extLst>
+          </p:nvPr>
+        </p:nvGraphicFramePr>
+        <p:xfrm>
+          <a:off x="1893019" y="1038908"/>
+          <a:ext cx="8891136" cy="3672840"/>
+        </p:xfrm>
+        <a:graphic>
+          <a:graphicData uri="http://schemas.openxmlformats.org/drawingml/2006/table">
+            <a:tbl>
+              <a:tblPr firstRow="1" bandRow="1">
+                <a:tableStyleId>{5C22544A-7EE6-4342-B048-85BDC9FD1C3A}</a:tableStyleId>
+              </a:tblPr>
+              <a:tblGrid>
+                <a:gridCol w="1239520">
+                  <a:extLst>
+                    <a:ext uri="{9D8B030D-6E8A-4147-A177-3AD203B41FA5}">
+                      <a16:colId xmlns:a16="http://schemas.microsoft.com/office/drawing/2014/main" val="4289832320"/>
+                    </a:ext>
+                  </a:extLst>
+                </a:gridCol>
+                <a:gridCol w="1223801">
+                  <a:extLst>
+                    <a:ext uri="{9D8B030D-6E8A-4147-A177-3AD203B41FA5}">
+                      <a16:colId xmlns:a16="http://schemas.microsoft.com/office/drawing/2014/main" val="1412820800"/>
+                    </a:ext>
+                  </a:extLst>
+                </a:gridCol>
+                <a:gridCol w="1270399">
+                  <a:extLst>
+                    <a:ext uri="{9D8B030D-6E8A-4147-A177-3AD203B41FA5}">
+                      <a16:colId xmlns:a16="http://schemas.microsoft.com/office/drawing/2014/main" val="2969004268"/>
+                    </a:ext>
+                  </a:extLst>
+                </a:gridCol>
+                <a:gridCol w="1177100">
+                  <a:extLst>
+                    <a:ext uri="{9D8B030D-6E8A-4147-A177-3AD203B41FA5}">
+                      <a16:colId xmlns:a16="http://schemas.microsoft.com/office/drawing/2014/main" val="1843240588"/>
+                    </a:ext>
+                  </a:extLst>
+                </a:gridCol>
+                <a:gridCol w="1375550">
+                  <a:extLst>
+                    <a:ext uri="{9D8B030D-6E8A-4147-A177-3AD203B41FA5}">
+                      <a16:colId xmlns:a16="http://schemas.microsoft.com/office/drawing/2014/main" val="1553718878"/>
+                    </a:ext>
+                  </a:extLst>
+                </a:gridCol>
+                <a:gridCol w="1302383">
+                  <a:extLst>
+                    <a:ext uri="{9D8B030D-6E8A-4147-A177-3AD203B41FA5}">
+                      <a16:colId xmlns:a16="http://schemas.microsoft.com/office/drawing/2014/main" val="1464561780"/>
+                    </a:ext>
+                  </a:extLst>
+                </a:gridCol>
+                <a:gridCol w="1302383">
+                  <a:extLst>
+                    <a:ext uri="{9D8B030D-6E8A-4147-A177-3AD203B41FA5}">
+                      <a16:colId xmlns:a16="http://schemas.microsoft.com/office/drawing/2014/main" val="2624657283"/>
+                    </a:ext>
+                  </a:extLst>
+                </a:gridCol>
+              </a:tblGrid>
+              <a:tr h="370840">
+                <a:tc>
+                  <a:txBody>
+                    <a:bodyPr/>
+                    <a:lstStyle/>
+                    <a:p>
+                      <a:endParaRPr lang="es-ES" dirty="0"/>
+                    </a:p>
+                  </a:txBody>
+                  <a:tcPr/>
+                </a:tc>
+                <a:tc>
+                  <a:txBody>
+                    <a:bodyPr/>
+                    <a:lstStyle/>
+                    <a:p>
+                      <a:pPr marL="0" marR="0" lvl="0" indent="0" algn="l" defTabSz="914400" rtl="0" eaLnBrk="1" fontAlgn="auto" latinLnBrk="0" hangingPunct="1">
+                        <a:lnSpc>
+                          <a:spcPct val="100000"/>
+                        </a:lnSpc>
+                        <a:spcBef>
+                          <a:spcPts val="0"/>
+                        </a:spcBef>
+                        <a:spcAft>
+                          <a:spcPts val="0"/>
+                        </a:spcAft>
+                        <a:buClrTx/>
+                        <a:buSzTx/>
+                        <a:buFontTx/>
+                        <a:buNone/>
+                        <a:tabLst/>
+                        <a:defRPr/>
+                      </a:pPr>
+                      <a:r>
+                        <a:rPr lang="es-ES" dirty="0" err="1"/>
+                        <a:t>Proveïdor</a:t>
+                      </a:r>
+                      <a:endParaRPr lang="es-ES" dirty="0"/>
+                    </a:p>
+                  </a:txBody>
+                  <a:tcPr/>
+                </a:tc>
+                <a:tc>
+                  <a:txBody>
+                    <a:bodyPr/>
+                    <a:lstStyle/>
+                    <a:p>
+                      <a:r>
+                        <a:rPr lang="es-ES" sz="1800" b="1" kern="1200" dirty="0">
+                          <a:solidFill>
+                            <a:schemeClr val="lt1"/>
+                          </a:solidFill>
+                          <a:latin typeface="+mn-lt"/>
+                          <a:ea typeface="+mn-ea"/>
+                          <a:cs typeface="+mn-cs"/>
+                        </a:rPr>
+                        <a:t>Client</a:t>
+                      </a:r>
+                      <a:endParaRPr lang="es-ES" dirty="0"/>
+                    </a:p>
+                  </a:txBody>
+                  <a:tcPr/>
+                </a:tc>
+                <a:tc>
+                  <a:txBody>
+                    <a:bodyPr/>
+                    <a:lstStyle/>
+                    <a:p>
+                      <a:r>
+                        <a:rPr lang="es-ES" sz="1800" b="1" kern="1200" dirty="0" err="1">
+                          <a:solidFill>
+                            <a:schemeClr val="lt1"/>
+                          </a:solidFill>
+                          <a:latin typeface="+mn-lt"/>
+                          <a:ea typeface="+mn-ea"/>
+                          <a:cs typeface="+mn-cs"/>
+                        </a:rPr>
+                        <a:t>Producte</a:t>
+                      </a:r>
+                      <a:endParaRPr lang="es-ES" dirty="0"/>
+                    </a:p>
+                  </a:txBody>
+                  <a:tcPr/>
+                </a:tc>
+                <a:tc>
+                  <a:txBody>
+                    <a:bodyPr/>
+                    <a:lstStyle/>
+                    <a:p>
+                      <a:pPr marL="0" marR="0" lvl="0" indent="0" algn="l" defTabSz="914400" rtl="0" eaLnBrk="1" fontAlgn="auto" latinLnBrk="0" hangingPunct="1">
+                        <a:lnSpc>
+                          <a:spcPct val="100000"/>
+                        </a:lnSpc>
+                        <a:spcBef>
+                          <a:spcPts val="0"/>
+                        </a:spcBef>
+                        <a:spcAft>
+                          <a:spcPts val="0"/>
+                        </a:spcAft>
+                        <a:buClrTx/>
+                        <a:buSzTx/>
+                        <a:buFontTx/>
+                        <a:buNone/>
+                        <a:tabLst/>
+                        <a:defRPr/>
+                      </a:pPr>
+                      <a:r>
+                        <a:rPr lang="es-ES" sz="1800" b="1" kern="1200" dirty="0" err="1">
+                          <a:solidFill>
+                            <a:schemeClr val="lt1"/>
+                          </a:solidFill>
+                          <a:latin typeface="+mn-lt"/>
+                          <a:ea typeface="+mn-ea"/>
+                          <a:cs typeface="+mn-cs"/>
+                        </a:rPr>
+                        <a:t>Categoria</a:t>
+                      </a:r>
+                      <a:endParaRPr lang="es-ES" dirty="0"/>
+                    </a:p>
+                    <a:p>
+                      <a:endParaRPr lang="es-ES" dirty="0"/>
+                    </a:p>
+                  </a:txBody>
+                  <a:tcPr/>
+                </a:tc>
+                <a:tc>
+                  <a:txBody>
+                    <a:bodyPr/>
+                    <a:lstStyle/>
+                    <a:p>
+                      <a:r>
+                        <a:rPr lang="es-ES" sz="1800" b="1" kern="1200" dirty="0">
+                          <a:solidFill>
+                            <a:schemeClr val="lt1"/>
+                          </a:solidFill>
+                          <a:latin typeface="+mn-lt"/>
+                          <a:ea typeface="+mn-ea"/>
+                          <a:cs typeface="+mn-cs"/>
+                        </a:rPr>
+                        <a:t>Factura</a:t>
+                      </a:r>
+                      <a:endParaRPr lang="es-ES" dirty="0"/>
+                    </a:p>
+                  </a:txBody>
+                  <a:tcPr/>
+                </a:tc>
+                <a:tc>
+                  <a:txBody>
+                    <a:bodyPr/>
+                    <a:lstStyle/>
+                    <a:p>
+                      <a:r>
+                        <a:rPr lang="es-ES" dirty="0" err="1"/>
+                        <a:t>Telèfons</a:t>
+                      </a:r>
+                      <a:r>
+                        <a:rPr lang="es-ES" dirty="0"/>
+                        <a:t> </a:t>
+                      </a:r>
+                      <a:r>
+                        <a:rPr lang="es-ES" dirty="0" err="1"/>
+                        <a:t>clients</a:t>
+                      </a:r>
+                      <a:endParaRPr lang="es-ES" dirty="0"/>
+                    </a:p>
+                  </a:txBody>
+                  <a:tcPr/>
+                </a:tc>
+                <a:extLst>
+                  <a:ext uri="{0D108BD9-81ED-4DB2-BD59-A6C34878D82A}">
+                    <a16:rowId xmlns:a16="http://schemas.microsoft.com/office/drawing/2014/main" val="2844043444"/>
+                  </a:ext>
+                </a:extLst>
+              </a:tr>
+              <a:tr h="370840">
+                <a:tc>
+                  <a:txBody>
+                    <a:bodyPr/>
+                    <a:lstStyle/>
+                    <a:p>
+                      <a:r>
+                        <a:rPr kumimoji="0" lang="es-ES" sz="1800" b="1" i="0" u="none" strike="noStrike" kern="1200" cap="none" spc="0" normalizeH="0" baseline="0" noProof="0" dirty="0" err="1">
+                          <a:ln>
+                            <a:noFill/>
+                          </a:ln>
+                          <a:solidFill>
+                            <a:prstClr val="white"/>
+                          </a:solidFill>
+                          <a:effectLst/>
+                          <a:uLnTx/>
+                          <a:uFillTx/>
+                          <a:latin typeface="+mn-lt"/>
+                          <a:ea typeface="+mn-ea"/>
+                          <a:cs typeface="+mn-cs"/>
+                        </a:rPr>
+                        <a:t>Proveïdor</a:t>
+                      </a:r>
+                      <a:endParaRPr lang="es-ES" sz="1800" b="1" kern="1200" dirty="0">
+                        <a:solidFill>
+                          <a:schemeClr val="lt1"/>
+                        </a:solidFill>
+                        <a:latin typeface="+mn-lt"/>
+                        <a:ea typeface="+mn-ea"/>
+                        <a:cs typeface="+mn-cs"/>
+                      </a:endParaRPr>
+                    </a:p>
+                  </a:txBody>
+                  <a:tcPr>
+                    <a:solidFill>
+                      <a:schemeClr val="accent1"/>
+                    </a:solidFill>
+                  </a:tcPr>
+                </a:tc>
+                <a:tc>
+                  <a:txBody>
+                    <a:bodyPr/>
+                    <a:lstStyle/>
+                    <a:p>
+                      <a:pPr algn="ctr"/>
+                      <a:endParaRPr lang="es-ES" b="1" dirty="0"/>
+                    </a:p>
+                  </a:txBody>
+                  <a:tcPr>
+                    <a:solidFill>
+                      <a:schemeClr val="tx1"/>
+                    </a:solidFill>
+                  </a:tcPr>
+                </a:tc>
+                <a:tc>
+                  <a:txBody>
+                    <a:bodyPr/>
+                    <a:lstStyle/>
+                    <a:p>
+                      <a:pPr marL="0" marR="0" lvl="0" indent="0" algn="ctr" defTabSz="914400" rtl="0" eaLnBrk="1" fontAlgn="auto" latinLnBrk="0" hangingPunct="1">
+                        <a:lnSpc>
+                          <a:spcPct val="100000"/>
+                        </a:lnSpc>
+                        <a:spcBef>
+                          <a:spcPts val="0"/>
+                        </a:spcBef>
+                        <a:spcAft>
+                          <a:spcPts val="0"/>
+                        </a:spcAft>
+                        <a:buClrTx/>
+                        <a:buSzTx/>
+                        <a:buFontTx/>
+                        <a:buNone/>
+                        <a:tabLst/>
+                        <a:defRPr/>
+                      </a:pPr>
+                      <a:r>
+                        <a:rPr lang="es-ES" b="1" dirty="0"/>
+                        <a:t>NA</a:t>
+                      </a:r>
+                      <a:endParaRPr lang="es-ES" b="0" dirty="0"/>
+                    </a:p>
+                  </a:txBody>
+                  <a:tcPr/>
+                </a:tc>
+                <a:tc>
+                  <a:txBody>
+                    <a:bodyPr/>
+                    <a:lstStyle/>
+                    <a:p>
+                      <a:pPr algn="ctr"/>
+                      <a:r>
+                        <a:rPr lang="es-ES" b="0" dirty="0"/>
+                        <a:t>té</a:t>
+                      </a:r>
+                    </a:p>
+                  </a:txBody>
+                  <a:tcPr/>
+                </a:tc>
+                <a:tc>
+                  <a:txBody>
+                    <a:bodyPr/>
+                    <a:lstStyle/>
+                    <a:p>
+                      <a:pPr algn="ctr"/>
+                      <a:r>
+                        <a:rPr lang="es-ES" b="1" dirty="0"/>
+                        <a:t>NA</a:t>
+                      </a:r>
+                    </a:p>
+                  </a:txBody>
+                  <a:tcPr/>
+                </a:tc>
+                <a:tc>
+                  <a:txBody>
+                    <a:bodyPr/>
+                    <a:lstStyle/>
+                    <a:p>
+                      <a:pPr algn="ctr"/>
+                      <a:r>
+                        <a:rPr lang="es-ES" b="1" dirty="0"/>
+                        <a:t>NA</a:t>
+                      </a:r>
+                      <a:endParaRPr lang="es-ES" b="0" dirty="0"/>
+                    </a:p>
+                  </a:txBody>
+                  <a:tcPr/>
+                </a:tc>
+                <a:tc>
+                  <a:txBody>
+                    <a:bodyPr/>
+                    <a:lstStyle/>
+                    <a:p>
+                      <a:pPr algn="ctr"/>
+                      <a:r>
+                        <a:rPr lang="es-ES" b="1" dirty="0"/>
+                        <a:t>NA</a:t>
+                      </a:r>
+                      <a:endParaRPr lang="es-ES" b="0" dirty="0"/>
+                    </a:p>
+                  </a:txBody>
+                  <a:tcPr/>
+                </a:tc>
+                <a:extLst>
+                  <a:ext uri="{0D108BD9-81ED-4DB2-BD59-A6C34878D82A}">
+                    <a16:rowId xmlns:a16="http://schemas.microsoft.com/office/drawing/2014/main" val="215843078"/>
+                  </a:ext>
+                </a:extLst>
+              </a:tr>
+              <a:tr h="370840">
+                <a:tc>
+                  <a:txBody>
+                    <a:bodyPr/>
+                    <a:lstStyle/>
+                    <a:p>
+                      <a:r>
+                        <a:rPr lang="es-ES" sz="1800" b="1" kern="1200" dirty="0">
+                          <a:solidFill>
+                            <a:schemeClr val="lt1"/>
+                          </a:solidFill>
+                          <a:latin typeface="+mn-lt"/>
+                          <a:ea typeface="+mn-ea"/>
+                          <a:cs typeface="+mn-cs"/>
+                        </a:rPr>
+                        <a:t>Client</a:t>
+                      </a:r>
+                      <a:endParaRPr lang="es-ES" dirty="0"/>
+                    </a:p>
+                  </a:txBody>
+                  <a:tcPr>
+                    <a:solidFill>
+                      <a:schemeClr val="accent1"/>
+                    </a:solidFill>
+                  </a:tcPr>
+                </a:tc>
+                <a:tc>
+                  <a:txBody>
+                    <a:bodyPr/>
+                    <a:lstStyle/>
+                    <a:p>
+                      <a:pPr algn="ctr"/>
+                      <a:r>
+                        <a:rPr lang="es-ES" b="1" dirty="0"/>
+                        <a:t>NA</a:t>
+                      </a:r>
+                      <a:endParaRPr lang="es-ES" b="0" dirty="0"/>
+                    </a:p>
+                  </a:txBody>
+                  <a:tcPr/>
+                </a:tc>
+                <a:tc>
+                  <a:txBody>
+                    <a:bodyPr/>
+                    <a:lstStyle/>
+                    <a:p>
+                      <a:pPr algn="ctr"/>
+                      <a:endParaRPr lang="es-ES" b="1" dirty="0"/>
+                    </a:p>
+                  </a:txBody>
+                  <a:tcPr>
+                    <a:solidFill>
+                      <a:schemeClr val="tx1"/>
+                    </a:solidFill>
+                  </a:tcPr>
+                </a:tc>
+                <a:tc>
+                  <a:txBody>
+                    <a:bodyPr/>
+                    <a:lstStyle/>
+                    <a:p>
+                      <a:pPr algn="ctr"/>
+                      <a:r>
+                        <a:rPr lang="es-ES" b="1" dirty="0"/>
+                        <a:t>NA</a:t>
+                      </a:r>
+                      <a:endParaRPr lang="es-ES" b="0" dirty="0"/>
+                    </a:p>
+                  </a:txBody>
+                  <a:tcPr/>
+                </a:tc>
+                <a:tc>
+                  <a:txBody>
+                    <a:bodyPr/>
+                    <a:lstStyle/>
+                    <a:p>
+                      <a:pPr algn="ctr"/>
+                      <a:r>
+                        <a:rPr lang="es-ES" b="1" dirty="0"/>
+                        <a:t>NA</a:t>
+                      </a:r>
+                    </a:p>
+                  </a:txBody>
+                  <a:tcPr/>
+                </a:tc>
+                <a:tc>
+                  <a:txBody>
+                    <a:bodyPr/>
+                    <a:lstStyle/>
+                    <a:p>
+                      <a:pPr algn="ctr"/>
+                      <a:r>
+                        <a:rPr lang="es-ES" b="0" dirty="0" err="1"/>
+                        <a:t>rep</a:t>
+                      </a:r>
+                      <a:endParaRPr lang="es-ES" b="0" dirty="0"/>
+                    </a:p>
+                  </a:txBody>
+                  <a:tcPr/>
+                </a:tc>
+                <a:tc>
+                  <a:txBody>
+                    <a:bodyPr/>
+                    <a:lstStyle/>
+                    <a:p>
+                      <a:pPr algn="ctr"/>
+                      <a:r>
+                        <a:rPr lang="es-ES" b="0" dirty="0"/>
+                        <a:t>té</a:t>
+                      </a:r>
+                    </a:p>
+                  </a:txBody>
+                  <a:tcPr/>
+                </a:tc>
+                <a:extLst>
+                  <a:ext uri="{0D108BD9-81ED-4DB2-BD59-A6C34878D82A}">
+                    <a16:rowId xmlns:a16="http://schemas.microsoft.com/office/drawing/2014/main" val="492487994"/>
+                  </a:ext>
+                </a:extLst>
+              </a:tr>
+              <a:tr h="483175">
+                <a:tc>
+                  <a:txBody>
+                    <a:bodyPr/>
+                    <a:lstStyle/>
+                    <a:p>
+                      <a:r>
+                        <a:rPr lang="es-ES" sz="1800" b="1" kern="1200" dirty="0" err="1">
+                          <a:solidFill>
+                            <a:schemeClr val="lt1"/>
+                          </a:solidFill>
+                          <a:latin typeface="+mn-lt"/>
+                          <a:ea typeface="+mn-ea"/>
+                          <a:cs typeface="+mn-cs"/>
+                        </a:rPr>
+                        <a:t>Producte</a:t>
+                      </a:r>
+                      <a:endParaRPr lang="es-ES" dirty="0"/>
+                    </a:p>
+                  </a:txBody>
+                  <a:tcPr>
+                    <a:solidFill>
+                      <a:schemeClr val="accent1"/>
+                    </a:solidFill>
+                  </a:tcPr>
+                </a:tc>
+                <a:tc>
+                  <a:txBody>
+                    <a:bodyPr/>
+                    <a:lstStyle/>
+                    <a:p>
+                      <a:pPr marL="0" marR="0" lvl="0" indent="0" algn="ctr" defTabSz="914400" rtl="0" eaLnBrk="1" fontAlgn="auto" latinLnBrk="0" hangingPunct="1">
+                        <a:lnSpc>
+                          <a:spcPct val="100000"/>
+                        </a:lnSpc>
+                        <a:spcBef>
+                          <a:spcPts val="0"/>
+                        </a:spcBef>
+                        <a:spcAft>
+                          <a:spcPts val="0"/>
+                        </a:spcAft>
+                        <a:buClrTx/>
+                        <a:buSzTx/>
+                        <a:buFontTx/>
+                        <a:buNone/>
+                        <a:tabLst/>
+                        <a:defRPr/>
+                      </a:pPr>
+                      <a:r>
+                        <a:rPr lang="es-ES" b="0" dirty="0" err="1"/>
+                        <a:t>és</a:t>
+                      </a:r>
+                      <a:r>
+                        <a:rPr lang="es-ES" b="0" dirty="0"/>
+                        <a:t> </a:t>
+                      </a:r>
+                      <a:r>
+                        <a:rPr lang="es-ES" b="0" dirty="0" err="1"/>
+                        <a:t>tingut</a:t>
+                      </a:r>
+                      <a:endParaRPr lang="es-ES" b="0" dirty="0"/>
+                    </a:p>
+                  </a:txBody>
+                  <a:tcPr/>
+                </a:tc>
+                <a:tc>
+                  <a:txBody>
+                    <a:bodyPr/>
+                    <a:lstStyle/>
+                    <a:p>
+                      <a:pPr marL="0" marR="0" lvl="0" indent="0" algn="ctr" defTabSz="914400" rtl="0" eaLnBrk="1" fontAlgn="auto" latinLnBrk="0" hangingPunct="1">
+                        <a:lnSpc>
+                          <a:spcPct val="100000"/>
+                        </a:lnSpc>
+                        <a:spcBef>
+                          <a:spcPts val="0"/>
+                        </a:spcBef>
+                        <a:spcAft>
+                          <a:spcPts val="0"/>
+                        </a:spcAft>
+                        <a:buClrTx/>
+                        <a:buSzTx/>
+                        <a:buFontTx/>
+                        <a:buNone/>
+                        <a:tabLst/>
+                        <a:defRPr/>
+                      </a:pPr>
+                      <a:r>
+                        <a:rPr lang="es-ES" b="1" dirty="0"/>
+                        <a:t>NA</a:t>
+                      </a:r>
+                      <a:endParaRPr lang="es-ES" b="0" dirty="0"/>
+                    </a:p>
+                  </a:txBody>
+                  <a:tcPr/>
+                </a:tc>
+                <a:tc>
+                  <a:txBody>
+                    <a:bodyPr/>
+                    <a:lstStyle/>
+                    <a:p>
+                      <a:pPr algn="ctr"/>
+                      <a:endParaRPr lang="es-ES" b="1" dirty="0"/>
+                    </a:p>
+                  </a:txBody>
+                  <a:tcPr>
+                    <a:solidFill>
+                      <a:schemeClr val="tx1"/>
+                    </a:solidFill>
+                  </a:tcPr>
+                </a:tc>
+                <a:tc>
+                  <a:txBody>
+                    <a:bodyPr/>
+                    <a:lstStyle/>
+                    <a:p>
+                      <a:pPr marL="0" marR="0" lvl="0" indent="0" algn="ctr" defTabSz="914400" rtl="0" eaLnBrk="1" fontAlgn="auto" latinLnBrk="0" hangingPunct="1">
+                        <a:lnSpc>
+                          <a:spcPct val="100000"/>
+                        </a:lnSpc>
+                        <a:spcBef>
+                          <a:spcPts val="0"/>
+                        </a:spcBef>
+                        <a:spcAft>
+                          <a:spcPts val="0"/>
+                        </a:spcAft>
+                        <a:buClrTx/>
+                        <a:buSzTx/>
+                        <a:buFontTx/>
+                        <a:buNone/>
+                        <a:tabLst/>
+                        <a:defRPr/>
+                      </a:pPr>
+                      <a:r>
+                        <a:rPr lang="es-ES" b="0" dirty="0" err="1"/>
+                        <a:t>és</a:t>
+                      </a:r>
+                      <a:r>
+                        <a:rPr lang="es-ES" b="0" dirty="0"/>
+                        <a:t> </a:t>
+                      </a:r>
+                      <a:r>
+                        <a:rPr lang="es-ES" b="0" dirty="0" err="1"/>
+                        <a:t>contingut</a:t>
+                      </a:r>
+                      <a:endParaRPr lang="es-ES" b="0" dirty="0"/>
+                    </a:p>
+                  </a:txBody>
+                  <a:tcPr/>
+                </a:tc>
+                <a:tc>
+                  <a:txBody>
+                    <a:bodyPr/>
+                    <a:lstStyle/>
+                    <a:p>
+                      <a:pPr marL="0" marR="0" lvl="0" indent="0" algn="ctr" defTabSz="914400" rtl="0" eaLnBrk="1" fontAlgn="auto" latinLnBrk="0" hangingPunct="1">
+                        <a:lnSpc>
+                          <a:spcPct val="100000"/>
+                        </a:lnSpc>
+                        <a:spcBef>
+                          <a:spcPts val="0"/>
+                        </a:spcBef>
+                        <a:spcAft>
+                          <a:spcPts val="0"/>
+                        </a:spcAft>
+                        <a:buClrTx/>
+                        <a:buSzTx/>
+                        <a:buFontTx/>
+                        <a:buNone/>
+                        <a:tabLst/>
+                        <a:defRPr/>
+                      </a:pPr>
+                      <a:r>
+                        <a:rPr lang="es-ES" b="0" dirty="0" err="1"/>
+                        <a:t>és</a:t>
+                      </a:r>
+                      <a:r>
+                        <a:rPr lang="es-ES" b="0" dirty="0"/>
+                        <a:t> </a:t>
+                      </a:r>
+                      <a:r>
+                        <a:rPr lang="es-ES" b="0" dirty="0" err="1"/>
+                        <a:t>contingut</a:t>
+                      </a:r>
+                      <a:endParaRPr lang="es-ES" b="0" dirty="0"/>
+                    </a:p>
+                  </a:txBody>
+                  <a:tcPr/>
+                </a:tc>
+                <a:tc>
+                  <a:txBody>
+                    <a:bodyPr/>
+                    <a:lstStyle/>
+                    <a:p>
+                      <a:pPr marL="0" marR="0" lvl="0" indent="0" algn="ctr" defTabSz="914400" rtl="0" eaLnBrk="1" fontAlgn="auto" latinLnBrk="0" hangingPunct="1">
+                        <a:lnSpc>
+                          <a:spcPct val="100000"/>
+                        </a:lnSpc>
+                        <a:spcBef>
+                          <a:spcPts val="0"/>
+                        </a:spcBef>
+                        <a:spcAft>
+                          <a:spcPts val="0"/>
+                        </a:spcAft>
+                        <a:buClrTx/>
+                        <a:buSzTx/>
+                        <a:buFontTx/>
+                        <a:buNone/>
+                        <a:tabLst/>
+                        <a:defRPr/>
+                      </a:pPr>
+                      <a:r>
+                        <a:rPr lang="es-ES" b="1" dirty="0"/>
+                        <a:t>NA</a:t>
+                      </a:r>
+                      <a:endParaRPr lang="es-ES" b="0" dirty="0"/>
+                    </a:p>
+                  </a:txBody>
+                  <a:tcPr/>
+                </a:tc>
+                <a:extLst>
+                  <a:ext uri="{0D108BD9-81ED-4DB2-BD59-A6C34878D82A}">
+                    <a16:rowId xmlns:a16="http://schemas.microsoft.com/office/drawing/2014/main" val="2919866487"/>
+                  </a:ext>
+                </a:extLst>
+              </a:tr>
+              <a:tr h="370840">
+                <a:tc>
+                  <a:txBody>
+                    <a:bodyPr/>
+                    <a:lstStyle/>
+                    <a:p>
+                      <a:r>
+                        <a:rPr lang="es-ES" sz="1800" b="1" kern="1200" dirty="0" err="1">
+                          <a:solidFill>
+                            <a:schemeClr val="lt1"/>
+                          </a:solidFill>
+                          <a:latin typeface="+mn-lt"/>
+                          <a:ea typeface="+mn-ea"/>
+                          <a:cs typeface="+mn-cs"/>
+                        </a:rPr>
+                        <a:t>Categoria</a:t>
+                      </a:r>
+                      <a:endParaRPr lang="es-ES" dirty="0"/>
+                    </a:p>
+                  </a:txBody>
+                  <a:tcPr>
+                    <a:solidFill>
+                      <a:schemeClr val="accent1"/>
+                    </a:solidFill>
+                  </a:tcPr>
+                </a:tc>
+                <a:tc>
+                  <a:txBody>
+                    <a:bodyPr/>
+                    <a:lstStyle/>
+                    <a:p>
+                      <a:pPr marL="0" marR="0" lvl="0" indent="0" algn="ctr" defTabSz="914400" rtl="0" eaLnBrk="1" fontAlgn="auto" latinLnBrk="0" hangingPunct="1">
+                        <a:lnSpc>
+                          <a:spcPct val="100000"/>
+                        </a:lnSpc>
+                        <a:spcBef>
+                          <a:spcPts val="0"/>
+                        </a:spcBef>
+                        <a:spcAft>
+                          <a:spcPts val="0"/>
+                        </a:spcAft>
+                        <a:buClrTx/>
+                        <a:buSzTx/>
+                        <a:buFontTx/>
+                        <a:buNone/>
+                        <a:tabLst/>
+                        <a:defRPr/>
+                      </a:pPr>
+                      <a:r>
+                        <a:rPr lang="es-ES" b="1" dirty="0"/>
+                        <a:t>NA</a:t>
+                      </a:r>
+                    </a:p>
+                  </a:txBody>
+                  <a:tcPr/>
+                </a:tc>
+                <a:tc>
+                  <a:txBody>
+                    <a:bodyPr/>
+                    <a:lstStyle/>
+                    <a:p>
+                      <a:pPr marL="0" marR="0" lvl="0" indent="0" algn="ctr" defTabSz="914400" rtl="0" eaLnBrk="1" fontAlgn="auto" latinLnBrk="0" hangingPunct="1">
+                        <a:lnSpc>
+                          <a:spcPct val="100000"/>
+                        </a:lnSpc>
+                        <a:spcBef>
+                          <a:spcPts val="0"/>
+                        </a:spcBef>
+                        <a:spcAft>
+                          <a:spcPts val="0"/>
+                        </a:spcAft>
+                        <a:buClrTx/>
+                        <a:buSzTx/>
+                        <a:buFontTx/>
+                        <a:buNone/>
+                        <a:tabLst/>
+                        <a:defRPr/>
+                      </a:pPr>
+                      <a:r>
+                        <a:rPr lang="es-ES" b="1" dirty="0"/>
+                        <a:t>NA</a:t>
+                      </a:r>
+                    </a:p>
+                  </a:txBody>
+                  <a:tcPr/>
+                </a:tc>
+                <a:tc>
+                  <a:txBody>
+                    <a:bodyPr/>
+                    <a:lstStyle/>
+                    <a:p>
+                      <a:pPr algn="ctr"/>
+                      <a:r>
+                        <a:rPr lang="es-ES" b="0" dirty="0"/>
+                        <a:t>conté</a:t>
+                      </a:r>
+                    </a:p>
+                  </a:txBody>
+                  <a:tcPr/>
+                </a:tc>
+                <a:tc>
+                  <a:txBody>
+                    <a:bodyPr/>
+                    <a:lstStyle/>
+                    <a:p>
+                      <a:pPr algn="ctr"/>
+                      <a:endParaRPr lang="es-ES" b="1" dirty="0"/>
+                    </a:p>
+                  </a:txBody>
+                  <a:tcPr>
+                    <a:solidFill>
+                      <a:schemeClr val="tx1"/>
+                    </a:solidFill>
+                  </a:tcPr>
+                </a:tc>
+                <a:tc>
+                  <a:txBody>
+                    <a:bodyPr/>
+                    <a:lstStyle/>
+                    <a:p>
+                      <a:pPr marL="0" marR="0" lvl="0" indent="0" algn="ctr" defTabSz="914400" rtl="0" eaLnBrk="1" fontAlgn="auto" latinLnBrk="0" hangingPunct="1">
+                        <a:lnSpc>
+                          <a:spcPct val="100000"/>
+                        </a:lnSpc>
+                        <a:spcBef>
+                          <a:spcPts val="0"/>
+                        </a:spcBef>
+                        <a:spcAft>
+                          <a:spcPts val="0"/>
+                        </a:spcAft>
+                        <a:buClrTx/>
+                        <a:buSzTx/>
+                        <a:buFontTx/>
+                        <a:buNone/>
+                        <a:tabLst/>
+                        <a:defRPr/>
+                      </a:pPr>
+                      <a:r>
+                        <a:rPr lang="es-ES" b="1" dirty="0"/>
+                        <a:t>NA</a:t>
+                      </a:r>
+                      <a:endParaRPr lang="es-ES" b="0" dirty="0"/>
+                    </a:p>
+                  </a:txBody>
+                  <a:tcPr/>
+                </a:tc>
+                <a:tc>
+                  <a:txBody>
+                    <a:bodyPr/>
+                    <a:lstStyle/>
+                    <a:p>
+                      <a:pPr marL="0" marR="0" lvl="0" indent="0" algn="ctr" defTabSz="914400" rtl="0" eaLnBrk="1" fontAlgn="auto" latinLnBrk="0" hangingPunct="1">
+                        <a:lnSpc>
+                          <a:spcPct val="100000"/>
+                        </a:lnSpc>
+                        <a:spcBef>
+                          <a:spcPts val="0"/>
+                        </a:spcBef>
+                        <a:spcAft>
+                          <a:spcPts val="0"/>
+                        </a:spcAft>
+                        <a:buClrTx/>
+                        <a:buSzTx/>
+                        <a:buFontTx/>
+                        <a:buNone/>
+                        <a:tabLst/>
+                        <a:defRPr/>
+                      </a:pPr>
+                      <a:r>
+                        <a:rPr lang="es-ES" b="1" dirty="0"/>
+                        <a:t>NA</a:t>
+                      </a:r>
+                      <a:endParaRPr lang="es-ES" b="0" dirty="0"/>
+                    </a:p>
+                  </a:txBody>
+                  <a:tcPr/>
+                </a:tc>
+                <a:extLst>
+                  <a:ext uri="{0D108BD9-81ED-4DB2-BD59-A6C34878D82A}">
+                    <a16:rowId xmlns:a16="http://schemas.microsoft.com/office/drawing/2014/main" val="2489159518"/>
+                  </a:ext>
+                </a:extLst>
+              </a:tr>
+              <a:tr h="370840">
+                <a:tc>
+                  <a:txBody>
+                    <a:bodyPr/>
+                    <a:lstStyle/>
+                    <a:p>
+                      <a:r>
+                        <a:rPr lang="es-ES" sz="1800" b="1" kern="1200" dirty="0">
+                          <a:solidFill>
+                            <a:schemeClr val="lt1"/>
+                          </a:solidFill>
+                          <a:latin typeface="+mn-lt"/>
+                          <a:ea typeface="+mn-ea"/>
+                          <a:cs typeface="+mn-cs"/>
+                        </a:rPr>
+                        <a:t>Factura</a:t>
+                      </a:r>
+                      <a:endParaRPr lang="es-ES" dirty="0"/>
+                    </a:p>
+                  </a:txBody>
+                  <a:tcPr>
+                    <a:solidFill>
+                      <a:schemeClr val="accent1"/>
+                    </a:solidFill>
+                  </a:tcPr>
+                </a:tc>
+                <a:tc>
+                  <a:txBody>
+                    <a:bodyPr/>
+                    <a:lstStyle/>
+                    <a:p>
+                      <a:pPr algn="ctr"/>
+                      <a:r>
+                        <a:rPr lang="es-ES" b="1" dirty="0"/>
+                        <a:t>NA</a:t>
+                      </a:r>
+                      <a:endParaRPr lang="es-ES" b="0" dirty="0"/>
+                    </a:p>
+                  </a:txBody>
+                  <a:tcPr/>
+                </a:tc>
+                <a:tc>
+                  <a:txBody>
+                    <a:bodyPr/>
+                    <a:lstStyle/>
+                    <a:p>
+                      <a:pPr marL="0" marR="0" lvl="0" indent="0" algn="ctr" defTabSz="914400" rtl="0" eaLnBrk="1" fontAlgn="auto" latinLnBrk="0" hangingPunct="1">
+                        <a:lnSpc>
+                          <a:spcPct val="100000"/>
+                        </a:lnSpc>
+                        <a:spcBef>
+                          <a:spcPts val="0"/>
+                        </a:spcBef>
+                        <a:spcAft>
+                          <a:spcPts val="0"/>
+                        </a:spcAft>
+                        <a:buClrTx/>
+                        <a:buSzTx/>
+                        <a:buFontTx/>
+                        <a:buNone/>
+                        <a:tabLst/>
+                        <a:defRPr/>
+                      </a:pPr>
+                      <a:r>
+                        <a:rPr lang="es-ES" b="0" dirty="0" err="1"/>
+                        <a:t>és</a:t>
+                      </a:r>
+                      <a:r>
+                        <a:rPr lang="es-ES" b="0" dirty="0"/>
+                        <a:t> </a:t>
+                      </a:r>
+                      <a:r>
+                        <a:rPr lang="es-ES" b="0" dirty="0" err="1"/>
+                        <a:t>rebuda</a:t>
+                      </a:r>
+                      <a:endParaRPr lang="es-ES" b="0" dirty="0"/>
+                    </a:p>
+                  </a:txBody>
+                  <a:tcPr/>
+                </a:tc>
+                <a:tc>
+                  <a:txBody>
+                    <a:bodyPr/>
+                    <a:lstStyle/>
+                    <a:p>
+                      <a:pPr algn="ctr"/>
+                      <a:r>
+                        <a:rPr lang="es-ES" b="0" dirty="0"/>
+                        <a:t>conté</a:t>
+                      </a:r>
+                      <a:endParaRPr lang="es-ES" b="1" dirty="0"/>
+                    </a:p>
+                  </a:txBody>
+                  <a:tcPr/>
+                </a:tc>
+                <a:tc>
+                  <a:txBody>
+                    <a:bodyPr/>
+                    <a:lstStyle/>
+                    <a:p>
+                      <a:pPr algn="ctr"/>
+                      <a:r>
+                        <a:rPr lang="es-ES" b="1" dirty="0"/>
+                        <a:t>NA</a:t>
+                      </a:r>
+                      <a:endParaRPr lang="es-ES" b="0" dirty="0"/>
+                    </a:p>
+                  </a:txBody>
+                  <a:tcPr/>
+                </a:tc>
+                <a:tc>
+                  <a:txBody>
+                    <a:bodyPr/>
+                    <a:lstStyle/>
+                    <a:p>
+                      <a:pPr algn="ctr"/>
+                      <a:endParaRPr lang="es-ES" b="0" dirty="0"/>
+                    </a:p>
+                  </a:txBody>
+                  <a:tcPr>
+                    <a:solidFill>
+                      <a:schemeClr val="tx1"/>
+                    </a:solidFill>
+                  </a:tcPr>
+                </a:tc>
+                <a:tc>
+                  <a:txBody>
+                    <a:bodyPr/>
+                    <a:lstStyle/>
+                    <a:p>
+                      <a:pPr marL="0" marR="0" lvl="0" indent="0" algn="ctr" defTabSz="914400" rtl="0" eaLnBrk="1" fontAlgn="auto" latinLnBrk="0" hangingPunct="1">
+                        <a:lnSpc>
+                          <a:spcPct val="100000"/>
+                        </a:lnSpc>
+                        <a:spcBef>
+                          <a:spcPts val="0"/>
+                        </a:spcBef>
+                        <a:spcAft>
+                          <a:spcPts val="0"/>
+                        </a:spcAft>
+                        <a:buClrTx/>
+                        <a:buSzTx/>
+                        <a:buFontTx/>
+                        <a:buNone/>
+                        <a:tabLst/>
+                        <a:defRPr/>
+                      </a:pPr>
+                      <a:r>
+                        <a:rPr lang="es-ES" b="1" dirty="0"/>
+                        <a:t>NA</a:t>
+                      </a:r>
+                      <a:endParaRPr lang="es-ES" b="0" dirty="0"/>
+                    </a:p>
+                    <a:p>
+                      <a:pPr algn="ctr"/>
+                      <a:endParaRPr lang="es-ES" b="0" dirty="0"/>
+                    </a:p>
+                  </a:txBody>
+                  <a:tcPr>
+                    <a:noFill/>
+                  </a:tcPr>
+                </a:tc>
+                <a:extLst>
+                  <a:ext uri="{0D108BD9-81ED-4DB2-BD59-A6C34878D82A}">
+                    <a16:rowId xmlns:a16="http://schemas.microsoft.com/office/drawing/2014/main" val="2026126958"/>
+                  </a:ext>
+                </a:extLst>
+              </a:tr>
+              <a:tr h="370840">
+                <a:tc>
+                  <a:txBody>
+                    <a:bodyPr/>
+                    <a:lstStyle/>
+                    <a:p>
+                      <a:r>
+                        <a:rPr lang="es-ES" sz="1800" b="1" kern="1200" dirty="0" err="1">
+                          <a:solidFill>
+                            <a:schemeClr val="lt1"/>
+                          </a:solidFill>
+                          <a:latin typeface="+mn-lt"/>
+                          <a:ea typeface="+mn-ea"/>
+                          <a:cs typeface="+mn-cs"/>
+                        </a:rPr>
+                        <a:t>Telèfons</a:t>
+                      </a:r>
+                      <a:r>
+                        <a:rPr lang="es-ES" sz="1800" b="1" kern="1200" dirty="0">
+                          <a:solidFill>
+                            <a:schemeClr val="lt1"/>
+                          </a:solidFill>
+                          <a:latin typeface="+mn-lt"/>
+                          <a:ea typeface="+mn-ea"/>
+                          <a:cs typeface="+mn-cs"/>
+                        </a:rPr>
+                        <a:t> </a:t>
+                      </a:r>
+                      <a:r>
+                        <a:rPr lang="es-ES" sz="1800" b="1" kern="1200" dirty="0" err="1">
+                          <a:solidFill>
+                            <a:schemeClr val="lt1"/>
+                          </a:solidFill>
+                          <a:latin typeface="+mn-lt"/>
+                          <a:ea typeface="+mn-ea"/>
+                          <a:cs typeface="+mn-cs"/>
+                        </a:rPr>
+                        <a:t>clients</a:t>
+                      </a:r>
+                      <a:endParaRPr lang="es-ES" dirty="0"/>
+                    </a:p>
+                  </a:txBody>
+                  <a:tcPr>
+                    <a:solidFill>
+                      <a:schemeClr val="accent1"/>
+                    </a:solidFill>
+                  </a:tcPr>
+                </a:tc>
+                <a:tc>
+                  <a:txBody>
+                    <a:bodyPr/>
+                    <a:lstStyle/>
+                    <a:p>
+                      <a:pPr algn="ctr"/>
+                      <a:r>
+                        <a:rPr lang="es-ES" b="1" dirty="0"/>
+                        <a:t>NA</a:t>
+                      </a:r>
+                      <a:endParaRPr lang="es-ES" b="0" dirty="0"/>
+                    </a:p>
+                  </a:txBody>
+                  <a:tcPr/>
+                </a:tc>
+                <a:tc>
+                  <a:txBody>
+                    <a:bodyPr/>
+                    <a:lstStyle/>
+                    <a:p>
+                      <a:pPr marL="0" marR="0" lvl="0" indent="0" algn="ctr" defTabSz="914400" rtl="0" eaLnBrk="1" fontAlgn="auto" latinLnBrk="0" hangingPunct="1">
+                        <a:lnSpc>
+                          <a:spcPct val="100000"/>
+                        </a:lnSpc>
+                        <a:spcBef>
+                          <a:spcPts val="0"/>
+                        </a:spcBef>
+                        <a:spcAft>
+                          <a:spcPts val="0"/>
+                        </a:spcAft>
+                        <a:buClrTx/>
+                        <a:buSzTx/>
+                        <a:buFontTx/>
+                        <a:buNone/>
+                        <a:tabLst/>
+                        <a:defRPr/>
+                      </a:pPr>
+                      <a:r>
+                        <a:rPr lang="es-ES" b="0" dirty="0" err="1"/>
+                        <a:t>és</a:t>
+                      </a:r>
+                      <a:r>
+                        <a:rPr lang="es-ES" b="0" dirty="0"/>
+                        <a:t> </a:t>
+                      </a:r>
+                      <a:r>
+                        <a:rPr lang="es-ES" b="0" dirty="0" err="1"/>
+                        <a:t>tingut</a:t>
+                      </a:r>
+                      <a:endParaRPr lang="es-ES" b="0" dirty="0"/>
+                    </a:p>
+                    <a:p>
+                      <a:pPr marL="0" marR="0" lvl="0" indent="0" algn="ctr" defTabSz="914400" rtl="0" eaLnBrk="1" fontAlgn="auto" latinLnBrk="0" hangingPunct="1">
+                        <a:lnSpc>
+                          <a:spcPct val="100000"/>
+                        </a:lnSpc>
+                        <a:spcBef>
+                          <a:spcPts val="0"/>
+                        </a:spcBef>
+                        <a:spcAft>
+                          <a:spcPts val="0"/>
+                        </a:spcAft>
+                        <a:buClrTx/>
+                        <a:buSzTx/>
+                        <a:buFontTx/>
+                        <a:buNone/>
+                        <a:tabLst/>
+                        <a:defRPr/>
+                      </a:pPr>
+                      <a:endParaRPr lang="es-ES" b="0" dirty="0"/>
+                    </a:p>
+                  </a:txBody>
+                  <a:tcPr/>
+                </a:tc>
+                <a:tc>
+                  <a:txBody>
+                    <a:bodyPr/>
+                    <a:lstStyle/>
+                    <a:p>
+                      <a:pPr algn="ctr"/>
+                      <a:r>
+                        <a:rPr lang="es-ES" b="1" dirty="0"/>
+                        <a:t>NA</a:t>
+                      </a:r>
+                    </a:p>
+                  </a:txBody>
+                  <a:tcPr/>
+                </a:tc>
+                <a:tc>
+                  <a:txBody>
+                    <a:bodyPr/>
+                    <a:lstStyle/>
+                    <a:p>
+                      <a:pPr marL="0" marR="0" lvl="0" indent="0" algn="ctr" defTabSz="914400" rtl="0" eaLnBrk="1" fontAlgn="auto" latinLnBrk="0" hangingPunct="1">
+                        <a:lnSpc>
+                          <a:spcPct val="100000"/>
+                        </a:lnSpc>
+                        <a:spcBef>
+                          <a:spcPts val="0"/>
+                        </a:spcBef>
+                        <a:spcAft>
+                          <a:spcPts val="0"/>
+                        </a:spcAft>
+                        <a:buClrTx/>
+                        <a:buSzTx/>
+                        <a:buFontTx/>
+                        <a:buNone/>
+                        <a:tabLst/>
+                        <a:defRPr/>
+                      </a:pPr>
+                      <a:r>
+                        <a:rPr lang="es-ES" b="1" dirty="0"/>
+                        <a:t>NA</a:t>
+                      </a:r>
+                      <a:endParaRPr lang="es-ES" b="0" dirty="0"/>
+                    </a:p>
+                  </a:txBody>
+                  <a:tcPr/>
+                </a:tc>
+                <a:tc>
+                  <a:txBody>
+                    <a:bodyPr/>
+                    <a:lstStyle/>
+                    <a:p>
+                      <a:pPr algn="ctr"/>
+                      <a:r>
+                        <a:rPr lang="es-ES" b="1" dirty="0"/>
+                        <a:t>NA</a:t>
+                      </a:r>
+                    </a:p>
+                  </a:txBody>
+                  <a:tcPr>
+                    <a:noFill/>
+                  </a:tcPr>
+                </a:tc>
+                <a:tc>
+                  <a:txBody>
+                    <a:bodyPr/>
+                    <a:lstStyle/>
+                    <a:p>
+                      <a:pPr algn="ctr"/>
+                      <a:endParaRPr lang="es-ES" b="0" dirty="0"/>
+                    </a:p>
+                  </a:txBody>
+                  <a:tcPr>
+                    <a:solidFill>
+                      <a:schemeClr val="tx1"/>
+                    </a:solidFill>
+                  </a:tcPr>
+                </a:tc>
+                <a:extLst>
+                  <a:ext uri="{0D108BD9-81ED-4DB2-BD59-A6C34878D82A}">
+                    <a16:rowId xmlns:a16="http://schemas.microsoft.com/office/drawing/2014/main" val="1126765033"/>
+                  </a:ext>
+                </a:extLst>
+              </a:tr>
+            </a:tbl>
+          </a:graphicData>
+        </a:graphic>
+      </p:graphicFrame>
+      <p:sp>
+        <p:nvSpPr>
+          <p:cNvPr id="3" name="CuadroTexto 2">
+            <a:extLst>
+              <a:ext uri="{FF2B5EF4-FFF2-40B4-BE49-F238E27FC236}">
+                <a16:creationId xmlns:a16="http://schemas.microsoft.com/office/drawing/2014/main" id="{487F0BFA-2041-31E9-BEBB-6254DA4AF160}"/>
+              </a:ext>
+            </a:extLst>
+          </p:cNvPr>
+          <p:cNvSpPr txBox="1"/>
+          <p:nvPr/>
+        </p:nvSpPr>
+        <p:spPr>
+          <a:xfrm>
+            <a:off x="224285" y="155275"/>
+            <a:ext cx="1923691" cy="369332"/>
+          </a:xfrm>
+          <a:prstGeom prst="rect">
+            <a:avLst/>
+          </a:prstGeom>
+          <a:noFill/>
+        </p:spPr>
+        <p:txBody>
+          <a:bodyPr wrap="square" rtlCol="0">
+            <a:spAutoFit/>
+          </a:bodyPr>
+          <a:lstStyle/>
+          <a:p>
+            <a:r>
+              <a:rPr lang="es-ES" dirty="0"/>
+              <a:t>CORREGIT</a:t>
+            </a:r>
+          </a:p>
+        </p:txBody>
+      </p:sp>
+    </p:spTree>
+    <p:extLst>
+      <p:ext uri="{BB962C8B-B14F-4D97-AF65-F5344CB8AC3E}">
+        <p14:creationId xmlns:p14="http://schemas.microsoft.com/office/powerpoint/2010/main" val="639676117"/>
+      </p:ext>
+    </p:extLst>
+  </p:cSld>
+  <p:clrMapOvr>
+    <a:masterClrMapping/>
+  </p:clrMapOvr>
+</p:sld>
+</file>
+
+<file path=ppt/slides/slide6.xml><?xml version="1.0" encoding="utf-8"?>
+<p:sld xmlns:a="http://schemas.openxmlformats.org/drawingml/2006/main" xmlns:r="http://schemas.openxmlformats.org/officeDocument/2006/relationships" xmlns:p="http://schemas.openxmlformats.org/presentationml/2006/main">
+  <p:cSld>
+    <p:spTree>
+      <p:nvGrpSpPr>
+        <p:cNvPr id="1" name=""/>
+        <p:cNvGrpSpPr/>
+        <p:nvPr/>
+      </p:nvGrpSpPr>
+      <p:grpSpPr>
+        <a:xfrm>
+          <a:off x="0" y="0"/>
+          <a:ext cx="0" cy="0"/>
+          <a:chOff x="0" y="0"/>
+          <a:chExt cx="0" cy="0"/>
+        </a:xfrm>
+      </p:grpSpPr>
+      <p:sp>
+        <p:nvSpPr>
+          <p:cNvPr id="4" name="Rectángulo 3">
+            <a:extLst>
+              <a:ext uri="{FF2B5EF4-FFF2-40B4-BE49-F238E27FC236}">
+                <a16:creationId xmlns:a16="http://schemas.microsoft.com/office/drawing/2014/main" id="{6F4A3C9A-1D09-623F-214B-4387AD8A1949}"/>
+              </a:ext>
+            </a:extLst>
+          </p:cNvPr>
+          <p:cNvSpPr/>
+          <p:nvPr/>
+        </p:nvSpPr>
+        <p:spPr>
+          <a:xfrm>
+            <a:off x="5138464" y="967952"/>
+            <a:ext cx="957533" cy="389626"/>
+          </a:xfrm>
+          <a:prstGeom prst="rect">
+            <a:avLst/>
+          </a:prstGeom>
+        </p:spPr>
+        <p:style>
+          <a:lnRef idx="2">
+            <a:schemeClr val="accent1">
+              <a:shade val="15000"/>
+            </a:schemeClr>
+          </a:lnRef>
+          <a:fillRef idx="1">
+            <a:schemeClr val="accent1"/>
+          </a:fillRef>
+          <a:effectRef idx="0">
+            <a:schemeClr val="accent1"/>
+          </a:effectRef>
+          <a:fontRef idx="minor">
+            <a:schemeClr val="lt1"/>
+          </a:fontRef>
+        </p:style>
+        <p:txBody>
+          <a:bodyPr rtlCol="0" anchor="ctr"/>
+          <a:lstStyle/>
+          <a:p>
+            <a:pPr algn="ctr"/>
+            <a:r>
+              <a:rPr lang="es-ES" dirty="0"/>
+              <a:t>CLIENT</a:t>
+            </a:r>
+          </a:p>
+        </p:txBody>
+      </p:sp>
+      <p:sp>
+        <p:nvSpPr>
+          <p:cNvPr id="5" name="Rectángulo 4">
+            <a:extLst>
+              <a:ext uri="{FF2B5EF4-FFF2-40B4-BE49-F238E27FC236}">
+                <a16:creationId xmlns:a16="http://schemas.microsoft.com/office/drawing/2014/main" id="{04A2BCCB-23A2-B251-41A4-284C07CA11E6}"/>
+              </a:ext>
+            </a:extLst>
+          </p:cNvPr>
+          <p:cNvSpPr/>
+          <p:nvPr/>
+        </p:nvSpPr>
+        <p:spPr>
+          <a:xfrm>
+            <a:off x="4923370" y="2677379"/>
+            <a:ext cx="1410575" cy="370935"/>
+          </a:xfrm>
+          <a:prstGeom prst="rect">
+            <a:avLst/>
+          </a:prstGeom>
+        </p:spPr>
+        <p:style>
+          <a:lnRef idx="2">
+            <a:schemeClr val="accent1">
+              <a:shade val="15000"/>
+            </a:schemeClr>
+          </a:lnRef>
+          <a:fillRef idx="1">
+            <a:schemeClr val="accent1"/>
+          </a:fillRef>
+          <a:effectRef idx="0">
+            <a:schemeClr val="accent1"/>
+          </a:effectRef>
+          <a:fontRef idx="minor">
+            <a:schemeClr val="lt1"/>
+          </a:fontRef>
+        </p:style>
+        <p:txBody>
+          <a:bodyPr rtlCol="0" anchor="ctr"/>
+          <a:lstStyle/>
+          <a:p>
+            <a:pPr algn="ctr"/>
+            <a:r>
+              <a:rPr lang="es-ES" dirty="0"/>
+              <a:t>FACTURA</a:t>
+            </a:r>
+          </a:p>
+        </p:txBody>
+      </p:sp>
+      <p:sp>
+        <p:nvSpPr>
+          <p:cNvPr id="9" name="Rectángulo 8">
+            <a:extLst>
+              <a:ext uri="{FF2B5EF4-FFF2-40B4-BE49-F238E27FC236}">
+                <a16:creationId xmlns:a16="http://schemas.microsoft.com/office/drawing/2014/main" id="{1622A086-A3BB-0389-4AA8-21867C439A76}"/>
+              </a:ext>
+            </a:extLst>
+          </p:cNvPr>
+          <p:cNvSpPr/>
+          <p:nvPr/>
+        </p:nvSpPr>
+        <p:spPr>
+          <a:xfrm>
+            <a:off x="4784783" y="4372876"/>
+            <a:ext cx="1664898" cy="810883"/>
+          </a:xfrm>
+          <a:prstGeom prst="rect">
+            <a:avLst/>
+          </a:prstGeom>
+        </p:spPr>
+        <p:style>
+          <a:lnRef idx="2">
+            <a:schemeClr val="accent1">
+              <a:shade val="15000"/>
+            </a:schemeClr>
+          </a:lnRef>
+          <a:fillRef idx="1">
+            <a:schemeClr val="accent1"/>
+          </a:fillRef>
+          <a:effectRef idx="0">
+            <a:schemeClr val="accent1"/>
+          </a:effectRef>
+          <a:fontRef idx="minor">
+            <a:schemeClr val="lt1"/>
+          </a:fontRef>
+        </p:style>
+        <p:txBody>
+          <a:bodyPr rtlCol="0" anchor="ctr"/>
+          <a:lstStyle/>
+          <a:p>
+            <a:pPr algn="ctr"/>
+            <a:r>
+              <a:rPr lang="es-ES" dirty="0"/>
+              <a:t>PROVEÏDOR</a:t>
+            </a:r>
+          </a:p>
+        </p:txBody>
+      </p:sp>
+      <p:sp>
+        <p:nvSpPr>
+          <p:cNvPr id="12" name="Rombo 11">
+            <a:extLst>
+              <a:ext uri="{FF2B5EF4-FFF2-40B4-BE49-F238E27FC236}">
+                <a16:creationId xmlns:a16="http://schemas.microsoft.com/office/drawing/2014/main" id="{678FAA2D-9332-A163-ADB2-FEB144E9D847}"/>
+              </a:ext>
+            </a:extLst>
+          </p:cNvPr>
+          <p:cNvSpPr/>
+          <p:nvPr/>
+        </p:nvSpPr>
+        <p:spPr>
+          <a:xfrm>
+            <a:off x="4960187" y="1693652"/>
+            <a:ext cx="1319843" cy="605286"/>
+          </a:xfrm>
+          <a:prstGeom prst="diamond">
+            <a:avLst/>
+          </a:prstGeom>
+        </p:spPr>
+        <p:style>
+          <a:lnRef idx="2">
+            <a:schemeClr val="accent5">
+              <a:shade val="15000"/>
+            </a:schemeClr>
+          </a:lnRef>
+          <a:fillRef idx="1">
+            <a:schemeClr val="accent5"/>
+          </a:fillRef>
+          <a:effectRef idx="0">
+            <a:schemeClr val="accent5"/>
+          </a:effectRef>
+          <a:fontRef idx="minor">
+            <a:schemeClr val="lt1"/>
+          </a:fontRef>
+        </p:style>
+        <p:txBody>
+          <a:bodyPr rtlCol="0" anchor="ctr"/>
+          <a:lstStyle/>
+          <a:p>
+            <a:pPr algn="ctr"/>
+            <a:r>
+              <a:rPr lang="es-ES" dirty="0" err="1"/>
+              <a:t>rep</a:t>
+            </a:r>
+            <a:endParaRPr lang="es-ES" dirty="0"/>
+          </a:p>
+        </p:txBody>
+      </p:sp>
+      <p:cxnSp>
+        <p:nvCxnSpPr>
+          <p:cNvPr id="14" name="Conector recto 13">
+            <a:extLst>
+              <a:ext uri="{FF2B5EF4-FFF2-40B4-BE49-F238E27FC236}">
+                <a16:creationId xmlns:a16="http://schemas.microsoft.com/office/drawing/2014/main" id="{E2D133C8-7C6A-FDA0-0C94-6EADD1F6B575}"/>
+              </a:ext>
+            </a:extLst>
+          </p:cNvPr>
+          <p:cNvCxnSpPr>
+            <a:cxnSpLocks/>
+            <a:stCxn id="4" idx="2"/>
+            <a:endCxn id="12" idx="0"/>
+          </p:cNvCxnSpPr>
+          <p:nvPr/>
+        </p:nvCxnSpPr>
+        <p:spPr>
+          <a:xfrm>
+            <a:off x="5617231" y="1357578"/>
+            <a:ext cx="2878" cy="336074"/>
+          </a:xfrm>
+          <a:prstGeom prst="line">
+            <a:avLst/>
+          </a:prstGeom>
+        </p:spPr>
+        <p:style>
+          <a:lnRef idx="2">
+            <a:schemeClr val="accent1"/>
+          </a:lnRef>
+          <a:fillRef idx="0">
+            <a:schemeClr val="accent1"/>
+          </a:fillRef>
+          <a:effectRef idx="1">
+            <a:schemeClr val="accent1"/>
+          </a:effectRef>
+          <a:fontRef idx="minor">
+            <a:schemeClr val="tx1"/>
+          </a:fontRef>
+        </p:style>
+      </p:cxnSp>
+      <p:cxnSp>
+        <p:nvCxnSpPr>
+          <p:cNvPr id="16" name="Conector recto 15">
+            <a:extLst>
+              <a:ext uri="{FF2B5EF4-FFF2-40B4-BE49-F238E27FC236}">
+                <a16:creationId xmlns:a16="http://schemas.microsoft.com/office/drawing/2014/main" id="{874C865D-AF32-B105-ED2C-12399E47D716}"/>
+              </a:ext>
+            </a:extLst>
+          </p:cNvPr>
+          <p:cNvCxnSpPr>
+            <a:cxnSpLocks/>
+            <a:stCxn id="12" idx="2"/>
+            <a:endCxn id="5" idx="0"/>
+          </p:cNvCxnSpPr>
+          <p:nvPr/>
+        </p:nvCxnSpPr>
+        <p:spPr>
+          <a:xfrm>
+            <a:off x="5620109" y="2298938"/>
+            <a:ext cx="8549" cy="378441"/>
+          </a:xfrm>
+          <a:prstGeom prst="line">
+            <a:avLst/>
+          </a:prstGeom>
+        </p:spPr>
+        <p:style>
+          <a:lnRef idx="2">
+            <a:schemeClr val="accent1"/>
+          </a:lnRef>
+          <a:fillRef idx="0">
+            <a:schemeClr val="accent1"/>
+          </a:fillRef>
+          <a:effectRef idx="1">
+            <a:schemeClr val="accent1"/>
+          </a:effectRef>
+          <a:fontRef idx="minor">
+            <a:schemeClr val="tx1"/>
+          </a:fontRef>
+        </p:style>
+      </p:cxnSp>
+      <p:sp>
+        <p:nvSpPr>
+          <p:cNvPr id="54" name="Rombo 53">
+            <a:extLst>
+              <a:ext uri="{FF2B5EF4-FFF2-40B4-BE49-F238E27FC236}">
+                <a16:creationId xmlns:a16="http://schemas.microsoft.com/office/drawing/2014/main" id="{EB46B8A8-D8DA-57C6-8FCF-F1A2B41DC6EE}"/>
+              </a:ext>
+            </a:extLst>
+          </p:cNvPr>
+          <p:cNvSpPr/>
+          <p:nvPr/>
+        </p:nvSpPr>
+        <p:spPr>
+          <a:xfrm>
+            <a:off x="7231814" y="2651905"/>
+            <a:ext cx="1319843" cy="605286"/>
+          </a:xfrm>
+          <a:prstGeom prst="diamond">
+            <a:avLst/>
+          </a:prstGeom>
+        </p:spPr>
+        <p:style>
+          <a:lnRef idx="2">
+            <a:schemeClr val="accent5">
+              <a:shade val="15000"/>
+            </a:schemeClr>
+          </a:lnRef>
+          <a:fillRef idx="1">
+            <a:schemeClr val="accent5"/>
+          </a:fillRef>
+          <a:effectRef idx="0">
+            <a:schemeClr val="accent5"/>
+          </a:effectRef>
+          <a:fontRef idx="minor">
+            <a:schemeClr val="lt1"/>
+          </a:fontRef>
+        </p:style>
+        <p:txBody>
+          <a:bodyPr rtlCol="0" anchor="ctr"/>
+          <a:lstStyle/>
+          <a:p>
+            <a:pPr algn="ctr"/>
+            <a:r>
+              <a:rPr lang="es-ES" sz="1200" dirty="0"/>
+              <a:t>conté</a:t>
+            </a:r>
+          </a:p>
+        </p:txBody>
+      </p:sp>
+      <p:sp>
+        <p:nvSpPr>
+          <p:cNvPr id="64" name="CuadroTexto 63">
+            <a:extLst>
+              <a:ext uri="{FF2B5EF4-FFF2-40B4-BE49-F238E27FC236}">
+                <a16:creationId xmlns:a16="http://schemas.microsoft.com/office/drawing/2014/main" id="{B04A4645-09B7-0655-98B0-FEDDA6DCA404}"/>
+              </a:ext>
+            </a:extLst>
+          </p:cNvPr>
+          <p:cNvSpPr txBox="1"/>
+          <p:nvPr/>
+        </p:nvSpPr>
+        <p:spPr>
+          <a:xfrm>
+            <a:off x="7607069" y="2340171"/>
+            <a:ext cx="783568" cy="307777"/>
+          </a:xfrm>
+          <a:prstGeom prst="rect">
+            <a:avLst/>
+          </a:prstGeom>
+          <a:noFill/>
+        </p:spPr>
+        <p:txBody>
+          <a:bodyPr wrap="square" rtlCol="0">
+            <a:spAutoFit/>
+          </a:bodyPr>
+          <a:lstStyle/>
+          <a:p>
+            <a:r>
+              <a:rPr lang="es-ES" sz="1400" b="1" dirty="0"/>
+              <a:t>(</a:t>
+            </a:r>
+            <a:r>
+              <a:rPr lang="es-ES" sz="1400" b="1" dirty="0" err="1"/>
+              <a:t>n,n</a:t>
+            </a:r>
+            <a:r>
+              <a:rPr lang="es-ES" sz="1400" b="1" dirty="0"/>
+              <a:t>)</a:t>
+            </a:r>
+          </a:p>
+        </p:txBody>
+      </p:sp>
+      <p:sp>
+        <p:nvSpPr>
+          <p:cNvPr id="66" name="CuadroTexto 65">
+            <a:extLst>
+              <a:ext uri="{FF2B5EF4-FFF2-40B4-BE49-F238E27FC236}">
+                <a16:creationId xmlns:a16="http://schemas.microsoft.com/office/drawing/2014/main" id="{C446C87C-95CE-2643-7BFF-53C5A370D12F}"/>
+              </a:ext>
+            </a:extLst>
+          </p:cNvPr>
+          <p:cNvSpPr txBox="1"/>
+          <p:nvPr/>
+        </p:nvSpPr>
+        <p:spPr>
+          <a:xfrm>
+            <a:off x="6494261" y="2626765"/>
+            <a:ext cx="783568" cy="307777"/>
+          </a:xfrm>
+          <a:prstGeom prst="rect">
+            <a:avLst/>
+          </a:prstGeom>
+          <a:noFill/>
+        </p:spPr>
+        <p:txBody>
+          <a:bodyPr wrap="square" rtlCol="0">
+            <a:spAutoFit/>
+          </a:bodyPr>
+          <a:lstStyle/>
+          <a:p>
+            <a:r>
+              <a:rPr lang="es-ES" sz="1400" dirty="0"/>
+              <a:t>(1,n)</a:t>
+            </a:r>
+          </a:p>
+        </p:txBody>
+      </p:sp>
+      <p:sp>
+        <p:nvSpPr>
+          <p:cNvPr id="67" name="CuadroTexto 66">
+            <a:extLst>
+              <a:ext uri="{FF2B5EF4-FFF2-40B4-BE49-F238E27FC236}">
+                <a16:creationId xmlns:a16="http://schemas.microsoft.com/office/drawing/2014/main" id="{0B95AD6B-1576-893D-A75B-B2655A423177}"/>
+              </a:ext>
+            </a:extLst>
+          </p:cNvPr>
+          <p:cNvSpPr txBox="1"/>
+          <p:nvPr/>
+        </p:nvSpPr>
+        <p:spPr>
+          <a:xfrm>
+            <a:off x="5550377" y="1363331"/>
+            <a:ext cx="783568" cy="307777"/>
+          </a:xfrm>
+          <a:prstGeom prst="rect">
+            <a:avLst/>
+          </a:prstGeom>
+          <a:noFill/>
+        </p:spPr>
+        <p:txBody>
+          <a:bodyPr wrap="square" rtlCol="0">
+            <a:spAutoFit/>
+          </a:bodyPr>
+          <a:lstStyle/>
+          <a:p>
+            <a:r>
+              <a:rPr lang="es-ES" sz="1400" dirty="0"/>
+              <a:t>(1,1)</a:t>
+            </a:r>
+          </a:p>
+        </p:txBody>
+      </p:sp>
+      <p:sp>
+        <p:nvSpPr>
+          <p:cNvPr id="68" name="CuadroTexto 67">
+            <a:extLst>
+              <a:ext uri="{FF2B5EF4-FFF2-40B4-BE49-F238E27FC236}">
+                <a16:creationId xmlns:a16="http://schemas.microsoft.com/office/drawing/2014/main" id="{C39BEADC-A81A-CA2D-B4FF-522964DD93E0}"/>
+              </a:ext>
+            </a:extLst>
+          </p:cNvPr>
+          <p:cNvSpPr txBox="1"/>
+          <p:nvPr/>
+        </p:nvSpPr>
+        <p:spPr>
+          <a:xfrm>
+            <a:off x="5556846" y="2317225"/>
+            <a:ext cx="783568" cy="307777"/>
+          </a:xfrm>
+          <a:prstGeom prst="rect">
+            <a:avLst/>
+          </a:prstGeom>
+          <a:noFill/>
+        </p:spPr>
+        <p:txBody>
+          <a:bodyPr wrap="square" rtlCol="0">
+            <a:spAutoFit/>
+          </a:bodyPr>
+          <a:lstStyle/>
+          <a:p>
+            <a:r>
+              <a:rPr lang="es-ES" sz="1400" dirty="0"/>
+              <a:t>(1,n)</a:t>
+            </a:r>
+          </a:p>
+        </p:txBody>
+      </p:sp>
+      <p:sp>
+        <p:nvSpPr>
+          <p:cNvPr id="69" name="CuadroTexto 68">
+            <a:extLst>
+              <a:ext uri="{FF2B5EF4-FFF2-40B4-BE49-F238E27FC236}">
+                <a16:creationId xmlns:a16="http://schemas.microsoft.com/office/drawing/2014/main" id="{47F50C7E-E696-BAAD-739B-4D8AA750A11D}"/>
+              </a:ext>
+            </a:extLst>
+          </p:cNvPr>
+          <p:cNvSpPr txBox="1"/>
+          <p:nvPr/>
+        </p:nvSpPr>
+        <p:spPr>
+          <a:xfrm>
+            <a:off x="6240491" y="1823981"/>
+            <a:ext cx="783568" cy="307777"/>
+          </a:xfrm>
+          <a:prstGeom prst="rect">
+            <a:avLst/>
+          </a:prstGeom>
+          <a:noFill/>
+        </p:spPr>
+        <p:txBody>
+          <a:bodyPr wrap="square" rtlCol="0">
+            <a:spAutoFit/>
+          </a:bodyPr>
+          <a:lstStyle/>
+          <a:p>
+            <a:r>
+              <a:rPr lang="es-ES" sz="1400" b="1" dirty="0"/>
+              <a:t>(1,n)</a:t>
+            </a:r>
+          </a:p>
+        </p:txBody>
+      </p:sp>
+      <p:cxnSp>
+        <p:nvCxnSpPr>
+          <p:cNvPr id="82" name="Conector recto de flecha 81">
+            <a:extLst>
+              <a:ext uri="{FF2B5EF4-FFF2-40B4-BE49-F238E27FC236}">
+                <a16:creationId xmlns:a16="http://schemas.microsoft.com/office/drawing/2014/main" id="{19294B18-87A5-11C4-41BB-0F23FFE42932}"/>
+              </a:ext>
+            </a:extLst>
+          </p:cNvPr>
+          <p:cNvCxnSpPr>
+            <a:cxnSpLocks/>
+          </p:cNvCxnSpPr>
+          <p:nvPr/>
+        </p:nvCxnSpPr>
+        <p:spPr>
+          <a:xfrm flipV="1">
+            <a:off x="5352731" y="718696"/>
+            <a:ext cx="0" cy="249256"/>
+          </a:xfrm>
+          <a:prstGeom prst="straightConnector1">
+            <a:avLst/>
+          </a:prstGeom>
+          <a:ln>
+            <a:tailEnd type="diamond"/>
+          </a:ln>
+        </p:spPr>
+        <p:style>
+          <a:lnRef idx="2">
+            <a:schemeClr val="accent1"/>
+          </a:lnRef>
+          <a:fillRef idx="0">
+            <a:schemeClr val="accent1"/>
+          </a:fillRef>
+          <a:effectRef idx="1">
+            <a:schemeClr val="accent1"/>
+          </a:effectRef>
+          <a:fontRef idx="minor">
+            <a:schemeClr val="tx1"/>
+          </a:fontRef>
+        </p:style>
+      </p:cxnSp>
+      <p:cxnSp>
+        <p:nvCxnSpPr>
+          <p:cNvPr id="90" name="Conector recto de flecha 89">
+            <a:extLst>
+              <a:ext uri="{FF2B5EF4-FFF2-40B4-BE49-F238E27FC236}">
+                <a16:creationId xmlns:a16="http://schemas.microsoft.com/office/drawing/2014/main" id="{476DC552-27AA-4D48-FBCE-28CFB600250C}"/>
+              </a:ext>
+            </a:extLst>
+          </p:cNvPr>
+          <p:cNvCxnSpPr>
+            <a:cxnSpLocks/>
+          </p:cNvCxnSpPr>
+          <p:nvPr/>
+        </p:nvCxnSpPr>
+        <p:spPr>
+          <a:xfrm flipV="1">
+            <a:off x="5138464" y="718696"/>
+            <a:ext cx="0" cy="249256"/>
+          </a:xfrm>
+          <a:prstGeom prst="straightConnector1">
+            <a:avLst/>
+          </a:prstGeom>
+          <a:ln>
+            <a:tailEnd type="diamond"/>
+          </a:ln>
+        </p:spPr>
+        <p:style>
+          <a:lnRef idx="2">
+            <a:schemeClr val="accent1"/>
+          </a:lnRef>
+          <a:fillRef idx="0">
+            <a:schemeClr val="accent1"/>
+          </a:fillRef>
+          <a:effectRef idx="1">
+            <a:schemeClr val="accent1"/>
+          </a:effectRef>
+          <a:fontRef idx="minor">
+            <a:schemeClr val="tx1"/>
+          </a:fontRef>
+        </p:style>
+      </p:cxnSp>
+      <p:cxnSp>
+        <p:nvCxnSpPr>
+          <p:cNvPr id="91" name="Conector recto de flecha 90">
+            <a:extLst>
+              <a:ext uri="{FF2B5EF4-FFF2-40B4-BE49-F238E27FC236}">
+                <a16:creationId xmlns:a16="http://schemas.microsoft.com/office/drawing/2014/main" id="{022DC1DA-0795-40C3-BA2C-1B8D1C92D605}"/>
+              </a:ext>
+            </a:extLst>
+          </p:cNvPr>
+          <p:cNvCxnSpPr>
+            <a:cxnSpLocks/>
+          </p:cNvCxnSpPr>
+          <p:nvPr/>
+        </p:nvCxnSpPr>
+        <p:spPr>
+          <a:xfrm flipV="1">
+            <a:off x="5732972" y="718696"/>
+            <a:ext cx="0" cy="249256"/>
+          </a:xfrm>
+          <a:prstGeom prst="straightConnector1">
+            <a:avLst/>
+          </a:prstGeom>
+          <a:ln>
+            <a:tailEnd type="diamond"/>
+          </a:ln>
+        </p:spPr>
+        <p:style>
+          <a:lnRef idx="2">
+            <a:schemeClr val="accent1"/>
+          </a:lnRef>
+          <a:fillRef idx="0">
+            <a:schemeClr val="accent1"/>
+          </a:fillRef>
+          <a:effectRef idx="1">
+            <a:schemeClr val="accent1"/>
+          </a:effectRef>
+          <a:fontRef idx="minor">
+            <a:schemeClr val="tx1"/>
+          </a:fontRef>
+        </p:style>
+      </p:cxnSp>
+      <p:sp>
+        <p:nvSpPr>
+          <p:cNvPr id="99" name="CuadroTexto 98">
+            <a:extLst>
+              <a:ext uri="{FF2B5EF4-FFF2-40B4-BE49-F238E27FC236}">
+                <a16:creationId xmlns:a16="http://schemas.microsoft.com/office/drawing/2014/main" id="{13628AC2-E2EE-47FC-7EBF-558EBB3B396B}"/>
+              </a:ext>
+            </a:extLst>
+          </p:cNvPr>
+          <p:cNvSpPr txBox="1"/>
+          <p:nvPr/>
+        </p:nvSpPr>
+        <p:spPr>
+          <a:xfrm rot="19193406">
+            <a:off x="4902547" y="289553"/>
+            <a:ext cx="783568" cy="261610"/>
+          </a:xfrm>
+          <a:prstGeom prst="rect">
+            <a:avLst/>
+          </a:prstGeom>
+          <a:noFill/>
+        </p:spPr>
+        <p:txBody>
+          <a:bodyPr wrap="square" rtlCol="0">
+            <a:spAutoFit/>
+          </a:bodyPr>
+          <a:lstStyle/>
+          <a:p>
+            <a:r>
+              <a:rPr lang="es-ES" sz="1100" dirty="0"/>
+              <a:t>CIF_NIF</a:t>
+            </a:r>
+          </a:p>
+        </p:txBody>
+      </p:sp>
+      <p:sp>
+        <p:nvSpPr>
+          <p:cNvPr id="100" name="CuadroTexto 99">
+            <a:extLst>
+              <a:ext uri="{FF2B5EF4-FFF2-40B4-BE49-F238E27FC236}">
+                <a16:creationId xmlns:a16="http://schemas.microsoft.com/office/drawing/2014/main" id="{A6F5B8FE-3933-8B07-B149-34B6D84FCC1E}"/>
+              </a:ext>
+            </a:extLst>
+          </p:cNvPr>
+          <p:cNvSpPr txBox="1"/>
+          <p:nvPr/>
+        </p:nvSpPr>
+        <p:spPr>
+          <a:xfrm rot="19193406">
+            <a:off x="5170073" y="305344"/>
+            <a:ext cx="783568" cy="261610"/>
+          </a:xfrm>
+          <a:prstGeom prst="rect">
+            <a:avLst/>
+          </a:prstGeom>
+          <a:noFill/>
+        </p:spPr>
+        <p:txBody>
+          <a:bodyPr wrap="square" rtlCol="0">
+            <a:spAutoFit/>
+          </a:bodyPr>
+          <a:lstStyle/>
+          <a:p>
+            <a:r>
+              <a:rPr lang="es-ES" sz="1100" dirty="0" err="1"/>
+              <a:t>nom</a:t>
+            </a:r>
+            <a:endParaRPr lang="es-ES" sz="1100" dirty="0"/>
+          </a:p>
+        </p:txBody>
+      </p:sp>
+      <p:sp>
+        <p:nvSpPr>
+          <p:cNvPr id="101" name="CuadroTexto 100">
+            <a:extLst>
+              <a:ext uri="{FF2B5EF4-FFF2-40B4-BE49-F238E27FC236}">
+                <a16:creationId xmlns:a16="http://schemas.microsoft.com/office/drawing/2014/main" id="{D341D413-1B72-832F-69FA-DF7BC56C89C5}"/>
+              </a:ext>
+            </a:extLst>
+          </p:cNvPr>
+          <p:cNvSpPr txBox="1"/>
+          <p:nvPr/>
+        </p:nvSpPr>
+        <p:spPr>
+          <a:xfrm rot="19193406">
+            <a:off x="5505693" y="142305"/>
+            <a:ext cx="1105567" cy="261610"/>
+          </a:xfrm>
+          <a:prstGeom prst="rect">
+            <a:avLst/>
+          </a:prstGeom>
+          <a:noFill/>
+        </p:spPr>
+        <p:txBody>
+          <a:bodyPr wrap="square" rtlCol="0">
+            <a:spAutoFit/>
+          </a:bodyPr>
+          <a:lstStyle/>
+          <a:p>
+            <a:r>
+              <a:rPr lang="es-ES" sz="1100" dirty="0" err="1"/>
+              <a:t>carrer</a:t>
+            </a:r>
+            <a:endParaRPr lang="es-ES" sz="1100" dirty="0"/>
+          </a:p>
+        </p:txBody>
+      </p:sp>
+      <p:sp>
+        <p:nvSpPr>
+          <p:cNvPr id="102" name="CuadroTexto 101">
+            <a:extLst>
+              <a:ext uri="{FF2B5EF4-FFF2-40B4-BE49-F238E27FC236}">
+                <a16:creationId xmlns:a16="http://schemas.microsoft.com/office/drawing/2014/main" id="{EDB05C8D-C9BF-204B-CC26-EF0A6B50F5F9}"/>
+              </a:ext>
+            </a:extLst>
+          </p:cNvPr>
+          <p:cNvSpPr txBox="1"/>
+          <p:nvPr/>
+        </p:nvSpPr>
+        <p:spPr>
+          <a:xfrm>
+            <a:off x="6216408" y="1039431"/>
+            <a:ext cx="783568" cy="261610"/>
+          </a:xfrm>
+          <a:prstGeom prst="rect">
+            <a:avLst/>
+          </a:prstGeom>
+          <a:noFill/>
+        </p:spPr>
+        <p:txBody>
+          <a:bodyPr wrap="square" rtlCol="0">
+            <a:spAutoFit/>
+          </a:bodyPr>
+          <a:lstStyle/>
+          <a:p>
+            <a:r>
+              <a:rPr lang="es-ES" sz="1100" u="sng" dirty="0" err="1"/>
+              <a:t>ID_client</a:t>
+            </a:r>
+            <a:endParaRPr lang="es-ES" sz="1100" u="sng" dirty="0"/>
+          </a:p>
+        </p:txBody>
+      </p:sp>
+      <p:cxnSp>
+        <p:nvCxnSpPr>
+          <p:cNvPr id="130" name="Conector recto de flecha 129">
+            <a:extLst>
+              <a:ext uri="{FF2B5EF4-FFF2-40B4-BE49-F238E27FC236}">
+                <a16:creationId xmlns:a16="http://schemas.microsoft.com/office/drawing/2014/main" id="{9171CC53-3CED-CF68-792E-D7C7CFB826A1}"/>
+              </a:ext>
+            </a:extLst>
+          </p:cNvPr>
+          <p:cNvCxnSpPr>
+            <a:cxnSpLocks/>
+          </p:cNvCxnSpPr>
+          <p:nvPr/>
+        </p:nvCxnSpPr>
+        <p:spPr>
+          <a:xfrm rot="10800000" flipV="1">
+            <a:off x="5249170" y="5188095"/>
+            <a:ext cx="0" cy="249256"/>
+          </a:xfrm>
+          <a:prstGeom prst="straightConnector1">
+            <a:avLst/>
+          </a:prstGeom>
+          <a:ln>
+            <a:tailEnd type="diamond"/>
+          </a:ln>
+        </p:spPr>
+        <p:style>
+          <a:lnRef idx="2">
+            <a:schemeClr val="accent1"/>
+          </a:lnRef>
+          <a:fillRef idx="0">
+            <a:schemeClr val="accent1"/>
+          </a:fillRef>
+          <a:effectRef idx="1">
+            <a:schemeClr val="accent1"/>
+          </a:effectRef>
+          <a:fontRef idx="minor">
+            <a:schemeClr val="tx1"/>
+          </a:fontRef>
+        </p:style>
+      </p:cxnSp>
+      <p:cxnSp>
+        <p:nvCxnSpPr>
+          <p:cNvPr id="131" name="Conector recto de flecha 130">
+            <a:extLst>
+              <a:ext uri="{FF2B5EF4-FFF2-40B4-BE49-F238E27FC236}">
+                <a16:creationId xmlns:a16="http://schemas.microsoft.com/office/drawing/2014/main" id="{2CC4108D-58D7-4D16-2F6B-D357D90A4125}"/>
+              </a:ext>
+            </a:extLst>
+          </p:cNvPr>
+          <p:cNvCxnSpPr>
+            <a:cxnSpLocks/>
+          </p:cNvCxnSpPr>
+          <p:nvPr/>
+        </p:nvCxnSpPr>
+        <p:spPr>
+          <a:xfrm rot="10800000" flipV="1">
+            <a:off x="6149711" y="5194548"/>
+            <a:ext cx="0" cy="249256"/>
+          </a:xfrm>
+          <a:prstGeom prst="straightConnector1">
+            <a:avLst/>
+          </a:prstGeom>
+          <a:ln>
+            <a:tailEnd type="diamond"/>
+          </a:ln>
+        </p:spPr>
+        <p:style>
+          <a:lnRef idx="2">
+            <a:schemeClr val="accent1"/>
+          </a:lnRef>
+          <a:fillRef idx="0">
+            <a:schemeClr val="accent1"/>
+          </a:fillRef>
+          <a:effectRef idx="1">
+            <a:schemeClr val="accent1"/>
+          </a:effectRef>
+          <a:fontRef idx="minor">
+            <a:schemeClr val="tx1"/>
+          </a:fontRef>
+        </p:style>
+      </p:cxnSp>
+      <p:sp>
+        <p:nvSpPr>
+          <p:cNvPr id="132" name="CuadroTexto 131">
+            <a:extLst>
+              <a:ext uri="{FF2B5EF4-FFF2-40B4-BE49-F238E27FC236}">
+                <a16:creationId xmlns:a16="http://schemas.microsoft.com/office/drawing/2014/main" id="{F823EE32-110C-A9A6-78CF-D2F6D185137D}"/>
+              </a:ext>
+            </a:extLst>
+          </p:cNvPr>
+          <p:cNvSpPr txBox="1"/>
+          <p:nvPr/>
+        </p:nvSpPr>
+        <p:spPr>
+          <a:xfrm rot="19193406">
+            <a:off x="4797039" y="5476832"/>
+            <a:ext cx="783568" cy="261610"/>
+          </a:xfrm>
+          <a:prstGeom prst="rect">
+            <a:avLst/>
+          </a:prstGeom>
+          <a:noFill/>
+        </p:spPr>
+        <p:txBody>
+          <a:bodyPr wrap="square" rtlCol="0">
+            <a:spAutoFit/>
+          </a:bodyPr>
+          <a:lstStyle/>
+          <a:p>
+            <a:r>
+              <a:rPr lang="es-ES" sz="1100" dirty="0"/>
+              <a:t>CIF_NIF</a:t>
+            </a:r>
+          </a:p>
+        </p:txBody>
+      </p:sp>
+      <p:sp>
+        <p:nvSpPr>
+          <p:cNvPr id="133" name="CuadroTexto 132">
+            <a:extLst>
+              <a:ext uri="{FF2B5EF4-FFF2-40B4-BE49-F238E27FC236}">
+                <a16:creationId xmlns:a16="http://schemas.microsoft.com/office/drawing/2014/main" id="{3196C921-E2AC-D387-915B-2B6EEB51BF2F}"/>
+              </a:ext>
+            </a:extLst>
+          </p:cNvPr>
+          <p:cNvSpPr txBox="1"/>
+          <p:nvPr/>
+        </p:nvSpPr>
+        <p:spPr>
+          <a:xfrm rot="19193406">
+            <a:off x="5687147" y="5316374"/>
+            <a:ext cx="1105567" cy="261610"/>
+          </a:xfrm>
+          <a:prstGeom prst="rect">
+            <a:avLst/>
+          </a:prstGeom>
+          <a:noFill/>
+        </p:spPr>
+        <p:txBody>
+          <a:bodyPr wrap="square" rtlCol="0">
+            <a:spAutoFit/>
+          </a:bodyPr>
+          <a:lstStyle/>
+          <a:p>
+            <a:r>
+              <a:rPr lang="es-ES" sz="1100" dirty="0" err="1"/>
+              <a:t>nom</a:t>
+            </a:r>
+            <a:endParaRPr lang="es-ES" sz="1100" dirty="0"/>
+          </a:p>
+        </p:txBody>
+      </p:sp>
+      <p:sp>
+        <p:nvSpPr>
+          <p:cNvPr id="15" name="Rectángulo 14">
+            <a:extLst>
+              <a:ext uri="{FF2B5EF4-FFF2-40B4-BE49-F238E27FC236}">
+                <a16:creationId xmlns:a16="http://schemas.microsoft.com/office/drawing/2014/main" id="{72CFD351-A2B8-EE30-2400-6566FEBD7755}"/>
+              </a:ext>
+            </a:extLst>
+          </p:cNvPr>
+          <p:cNvSpPr/>
+          <p:nvPr/>
+        </p:nvSpPr>
+        <p:spPr>
+          <a:xfrm>
+            <a:off x="9141171" y="2708804"/>
+            <a:ext cx="1512494" cy="556405"/>
+          </a:xfrm>
+          <a:prstGeom prst="rect">
+            <a:avLst/>
+          </a:prstGeom>
+        </p:spPr>
+        <p:style>
+          <a:lnRef idx="2">
+            <a:schemeClr val="accent1">
+              <a:shade val="15000"/>
+            </a:schemeClr>
+          </a:lnRef>
+          <a:fillRef idx="1">
+            <a:schemeClr val="accent1"/>
+          </a:fillRef>
+          <a:effectRef idx="0">
+            <a:schemeClr val="accent1"/>
+          </a:effectRef>
+          <a:fontRef idx="minor">
+            <a:schemeClr val="lt1"/>
+          </a:fontRef>
+        </p:style>
+        <p:txBody>
+          <a:bodyPr rtlCol="0" anchor="ctr"/>
+          <a:lstStyle/>
+          <a:p>
+            <a:pPr algn="ctr"/>
+            <a:r>
+              <a:rPr lang="es-ES" dirty="0"/>
+              <a:t>PRODUCTE</a:t>
+            </a:r>
+          </a:p>
+        </p:txBody>
+      </p:sp>
+      <p:cxnSp>
+        <p:nvCxnSpPr>
+          <p:cNvPr id="17" name="Conector recto 16">
+            <a:extLst>
+              <a:ext uri="{FF2B5EF4-FFF2-40B4-BE49-F238E27FC236}">
+                <a16:creationId xmlns:a16="http://schemas.microsoft.com/office/drawing/2014/main" id="{865CFB14-6049-8DBC-4DF9-BD019442EC62}"/>
+              </a:ext>
+            </a:extLst>
+          </p:cNvPr>
+          <p:cNvCxnSpPr>
+            <a:cxnSpLocks/>
+            <a:stCxn id="54" idx="3"/>
+            <a:endCxn id="15" idx="1"/>
+          </p:cNvCxnSpPr>
+          <p:nvPr/>
+        </p:nvCxnSpPr>
+        <p:spPr>
+          <a:xfrm>
+            <a:off x="8551657" y="2954548"/>
+            <a:ext cx="589514" cy="32459"/>
+          </a:xfrm>
+          <a:prstGeom prst="line">
+            <a:avLst/>
+          </a:prstGeom>
+        </p:spPr>
+        <p:style>
+          <a:lnRef idx="2">
+            <a:schemeClr val="accent1"/>
+          </a:lnRef>
+          <a:fillRef idx="0">
+            <a:schemeClr val="accent1"/>
+          </a:fillRef>
+          <a:effectRef idx="1">
+            <a:schemeClr val="accent1"/>
+          </a:effectRef>
+          <a:fontRef idx="minor">
+            <a:schemeClr val="tx1"/>
+          </a:fontRef>
+        </p:style>
+      </p:cxnSp>
+      <p:sp>
+        <p:nvSpPr>
+          <p:cNvPr id="84" name="Rectángulo 83">
+            <a:extLst>
+              <a:ext uri="{FF2B5EF4-FFF2-40B4-BE49-F238E27FC236}">
+                <a16:creationId xmlns:a16="http://schemas.microsoft.com/office/drawing/2014/main" id="{E34B8469-00C4-0B00-AADE-E303AB86029F}"/>
+              </a:ext>
+            </a:extLst>
+          </p:cNvPr>
+          <p:cNvSpPr/>
+          <p:nvPr/>
+        </p:nvSpPr>
+        <p:spPr>
+          <a:xfrm>
+            <a:off x="9141171" y="523534"/>
+            <a:ext cx="1512494" cy="556405"/>
+          </a:xfrm>
+          <a:prstGeom prst="rect">
+            <a:avLst/>
+          </a:prstGeom>
+        </p:spPr>
+        <p:style>
+          <a:lnRef idx="2">
+            <a:schemeClr val="accent1">
+              <a:shade val="15000"/>
+            </a:schemeClr>
+          </a:lnRef>
+          <a:fillRef idx="1">
+            <a:schemeClr val="accent1"/>
+          </a:fillRef>
+          <a:effectRef idx="0">
+            <a:schemeClr val="accent1"/>
+          </a:effectRef>
+          <a:fontRef idx="minor">
+            <a:schemeClr val="lt1"/>
+          </a:fontRef>
+        </p:style>
+        <p:txBody>
+          <a:bodyPr rtlCol="0" anchor="ctr"/>
+          <a:lstStyle/>
+          <a:p>
+            <a:pPr algn="ctr"/>
+            <a:r>
+              <a:rPr lang="es-ES" dirty="0"/>
+              <a:t>CATEGORIA</a:t>
+            </a:r>
+          </a:p>
+        </p:txBody>
+      </p:sp>
+      <p:sp>
+        <p:nvSpPr>
+          <p:cNvPr id="85" name="Rombo 84">
+            <a:extLst>
+              <a:ext uri="{FF2B5EF4-FFF2-40B4-BE49-F238E27FC236}">
+                <a16:creationId xmlns:a16="http://schemas.microsoft.com/office/drawing/2014/main" id="{498C5903-F81C-4638-BC9E-BC35F562299C}"/>
+              </a:ext>
+            </a:extLst>
+          </p:cNvPr>
+          <p:cNvSpPr/>
+          <p:nvPr/>
+        </p:nvSpPr>
+        <p:spPr>
+          <a:xfrm>
+            <a:off x="9246899" y="1429151"/>
+            <a:ext cx="1319843" cy="605286"/>
+          </a:xfrm>
+          <a:prstGeom prst="diamond">
+            <a:avLst/>
+          </a:prstGeom>
+        </p:spPr>
+        <p:style>
+          <a:lnRef idx="2">
+            <a:schemeClr val="accent5">
+              <a:shade val="15000"/>
+            </a:schemeClr>
+          </a:lnRef>
+          <a:fillRef idx="1">
+            <a:schemeClr val="accent5"/>
+          </a:fillRef>
+          <a:effectRef idx="0">
+            <a:schemeClr val="accent5"/>
+          </a:effectRef>
+          <a:fontRef idx="minor">
+            <a:schemeClr val="lt1"/>
+          </a:fontRef>
+        </p:style>
+        <p:txBody>
+          <a:bodyPr rtlCol="0" anchor="ctr"/>
+          <a:lstStyle/>
+          <a:p>
+            <a:pPr algn="ctr"/>
+            <a:r>
+              <a:rPr lang="es-ES" sz="1400" dirty="0"/>
+              <a:t>conté</a:t>
+            </a:r>
+          </a:p>
+        </p:txBody>
+      </p:sp>
+      <p:sp>
+        <p:nvSpPr>
+          <p:cNvPr id="86" name="CuadroTexto 85">
+            <a:extLst>
+              <a:ext uri="{FF2B5EF4-FFF2-40B4-BE49-F238E27FC236}">
+                <a16:creationId xmlns:a16="http://schemas.microsoft.com/office/drawing/2014/main" id="{D96D35B8-0898-AD54-0A3D-FF208A2969EF}"/>
+              </a:ext>
+            </a:extLst>
+          </p:cNvPr>
+          <p:cNvSpPr txBox="1"/>
+          <p:nvPr/>
+        </p:nvSpPr>
+        <p:spPr>
+          <a:xfrm>
+            <a:off x="10563152" y="1572771"/>
+            <a:ext cx="783568" cy="307777"/>
+          </a:xfrm>
+          <a:prstGeom prst="rect">
+            <a:avLst/>
+          </a:prstGeom>
+          <a:noFill/>
+        </p:spPr>
+        <p:txBody>
+          <a:bodyPr wrap="square" rtlCol="0">
+            <a:spAutoFit/>
+          </a:bodyPr>
+          <a:lstStyle/>
+          <a:p>
+            <a:r>
+              <a:rPr lang="es-ES" sz="1400" b="1" dirty="0"/>
+              <a:t>(1,n)</a:t>
+            </a:r>
+          </a:p>
+        </p:txBody>
+      </p:sp>
+      <p:sp>
+        <p:nvSpPr>
+          <p:cNvPr id="88" name="Rombo 87">
+            <a:extLst>
+              <a:ext uri="{FF2B5EF4-FFF2-40B4-BE49-F238E27FC236}">
+                <a16:creationId xmlns:a16="http://schemas.microsoft.com/office/drawing/2014/main" id="{EF56E7C3-BFB9-0299-C856-6F58EADCF64F}"/>
+              </a:ext>
+            </a:extLst>
+          </p:cNvPr>
+          <p:cNvSpPr/>
+          <p:nvPr/>
+        </p:nvSpPr>
+        <p:spPr>
+          <a:xfrm>
+            <a:off x="7607069" y="4511708"/>
+            <a:ext cx="1319843" cy="605286"/>
+          </a:xfrm>
+          <a:prstGeom prst="diamond">
+            <a:avLst/>
+          </a:prstGeom>
+        </p:spPr>
+        <p:style>
+          <a:lnRef idx="2">
+            <a:schemeClr val="accent5">
+              <a:shade val="15000"/>
+            </a:schemeClr>
+          </a:lnRef>
+          <a:fillRef idx="1">
+            <a:schemeClr val="accent5"/>
+          </a:fillRef>
+          <a:effectRef idx="0">
+            <a:schemeClr val="accent5"/>
+          </a:effectRef>
+          <a:fontRef idx="minor">
+            <a:schemeClr val="lt1"/>
+          </a:fontRef>
+        </p:style>
+        <p:txBody>
+          <a:bodyPr rtlCol="0" anchor="ctr"/>
+          <a:lstStyle/>
+          <a:p>
+            <a:pPr algn="ctr"/>
+            <a:r>
+              <a:rPr lang="es-ES" sz="1200" dirty="0"/>
+              <a:t>té</a:t>
+            </a:r>
+          </a:p>
+        </p:txBody>
+      </p:sp>
+      <p:cxnSp>
+        <p:nvCxnSpPr>
+          <p:cNvPr id="89" name="Conector: angular 88">
+            <a:extLst>
+              <a:ext uri="{FF2B5EF4-FFF2-40B4-BE49-F238E27FC236}">
+                <a16:creationId xmlns:a16="http://schemas.microsoft.com/office/drawing/2014/main" id="{4B02DE7F-C2C8-2BA9-84F3-889642D3884D}"/>
+              </a:ext>
+            </a:extLst>
+          </p:cNvPr>
+          <p:cNvCxnSpPr>
+            <a:cxnSpLocks/>
+            <a:stCxn id="9" idx="3"/>
+            <a:endCxn id="88" idx="1"/>
+          </p:cNvCxnSpPr>
+          <p:nvPr/>
+        </p:nvCxnSpPr>
+        <p:spPr>
+          <a:xfrm>
+            <a:off x="6449681" y="4778318"/>
+            <a:ext cx="1157388" cy="36033"/>
+          </a:xfrm>
+          <a:prstGeom prst="bentConnector3">
+            <a:avLst/>
+          </a:prstGeom>
+        </p:spPr>
+        <p:style>
+          <a:lnRef idx="2">
+            <a:schemeClr val="accent1"/>
+          </a:lnRef>
+          <a:fillRef idx="0">
+            <a:schemeClr val="accent1"/>
+          </a:fillRef>
+          <a:effectRef idx="1">
+            <a:schemeClr val="accent1"/>
+          </a:effectRef>
+          <a:fontRef idx="minor">
+            <a:schemeClr val="tx1"/>
+          </a:fontRef>
+        </p:style>
+      </p:cxnSp>
+      <p:cxnSp>
+        <p:nvCxnSpPr>
+          <p:cNvPr id="136" name="Conector recto 135">
+            <a:extLst>
+              <a:ext uri="{FF2B5EF4-FFF2-40B4-BE49-F238E27FC236}">
+                <a16:creationId xmlns:a16="http://schemas.microsoft.com/office/drawing/2014/main" id="{D234757A-CD5A-1273-CDA8-E66210A248C4}"/>
+              </a:ext>
+            </a:extLst>
+          </p:cNvPr>
+          <p:cNvCxnSpPr>
+            <a:stCxn id="84" idx="2"/>
+            <a:endCxn id="85" idx="0"/>
+          </p:cNvCxnSpPr>
+          <p:nvPr/>
+        </p:nvCxnSpPr>
+        <p:spPr>
+          <a:xfrm>
+            <a:off x="9897418" y="1079939"/>
+            <a:ext cx="9403" cy="349212"/>
+          </a:xfrm>
+          <a:prstGeom prst="line">
+            <a:avLst/>
+          </a:prstGeom>
+        </p:spPr>
+        <p:style>
+          <a:lnRef idx="2">
+            <a:schemeClr val="accent1"/>
+          </a:lnRef>
+          <a:fillRef idx="0">
+            <a:schemeClr val="accent1"/>
+          </a:fillRef>
+          <a:effectRef idx="1">
+            <a:schemeClr val="accent1"/>
+          </a:effectRef>
+          <a:fontRef idx="minor">
+            <a:schemeClr val="tx1"/>
+          </a:fontRef>
+        </p:style>
+      </p:cxnSp>
+      <p:cxnSp>
+        <p:nvCxnSpPr>
+          <p:cNvPr id="138" name="Conector recto 137">
+            <a:extLst>
+              <a:ext uri="{FF2B5EF4-FFF2-40B4-BE49-F238E27FC236}">
+                <a16:creationId xmlns:a16="http://schemas.microsoft.com/office/drawing/2014/main" id="{E5DD797A-2B61-5C61-9C09-C69CE045101F}"/>
+              </a:ext>
+            </a:extLst>
+          </p:cNvPr>
+          <p:cNvCxnSpPr>
+            <a:stCxn id="85" idx="2"/>
+            <a:endCxn id="15" idx="0"/>
+          </p:cNvCxnSpPr>
+          <p:nvPr/>
+        </p:nvCxnSpPr>
+        <p:spPr>
+          <a:xfrm flipH="1">
+            <a:off x="9897418" y="2034437"/>
+            <a:ext cx="9403" cy="674367"/>
+          </a:xfrm>
+          <a:prstGeom prst="line">
+            <a:avLst/>
+          </a:prstGeom>
+        </p:spPr>
+        <p:style>
+          <a:lnRef idx="2">
+            <a:schemeClr val="accent1"/>
+          </a:lnRef>
+          <a:fillRef idx="0">
+            <a:schemeClr val="accent1"/>
+          </a:fillRef>
+          <a:effectRef idx="1">
+            <a:schemeClr val="accent1"/>
+          </a:effectRef>
+          <a:fontRef idx="minor">
+            <a:schemeClr val="tx1"/>
+          </a:fontRef>
+        </p:style>
+      </p:cxnSp>
+      <p:sp>
+        <p:nvSpPr>
+          <p:cNvPr id="139" name="CuadroTexto 138">
+            <a:extLst>
+              <a:ext uri="{FF2B5EF4-FFF2-40B4-BE49-F238E27FC236}">
+                <a16:creationId xmlns:a16="http://schemas.microsoft.com/office/drawing/2014/main" id="{3FF7B651-C804-EDB3-600C-F0B5B61AE311}"/>
+              </a:ext>
+            </a:extLst>
+          </p:cNvPr>
+          <p:cNvSpPr txBox="1"/>
+          <p:nvPr/>
+        </p:nvSpPr>
+        <p:spPr>
+          <a:xfrm>
+            <a:off x="9879500" y="2178057"/>
+            <a:ext cx="783568" cy="307777"/>
+          </a:xfrm>
+          <a:prstGeom prst="rect">
+            <a:avLst/>
+          </a:prstGeom>
+          <a:noFill/>
+        </p:spPr>
+        <p:txBody>
+          <a:bodyPr wrap="square" rtlCol="0">
+            <a:spAutoFit/>
+          </a:bodyPr>
+          <a:lstStyle/>
+          <a:p>
+            <a:r>
+              <a:rPr lang="es-ES" sz="1400" dirty="0"/>
+              <a:t>(1,1)</a:t>
+            </a:r>
+          </a:p>
+        </p:txBody>
+      </p:sp>
+      <p:sp>
+        <p:nvSpPr>
+          <p:cNvPr id="140" name="CuadroTexto 139">
+            <a:extLst>
+              <a:ext uri="{FF2B5EF4-FFF2-40B4-BE49-F238E27FC236}">
+                <a16:creationId xmlns:a16="http://schemas.microsoft.com/office/drawing/2014/main" id="{A1358418-8775-C20D-C7D1-5A664B8DCDBD}"/>
+              </a:ext>
+            </a:extLst>
+          </p:cNvPr>
+          <p:cNvSpPr txBox="1"/>
+          <p:nvPr/>
+        </p:nvSpPr>
+        <p:spPr>
+          <a:xfrm>
+            <a:off x="9975825" y="1090521"/>
+            <a:ext cx="783568" cy="307777"/>
+          </a:xfrm>
+          <a:prstGeom prst="rect">
+            <a:avLst/>
+          </a:prstGeom>
+          <a:noFill/>
+        </p:spPr>
+        <p:txBody>
+          <a:bodyPr wrap="square" rtlCol="0">
+            <a:spAutoFit/>
+          </a:bodyPr>
+          <a:lstStyle/>
+          <a:p>
+            <a:r>
+              <a:rPr lang="es-ES" sz="1400" dirty="0"/>
+              <a:t>(1,n)</a:t>
+            </a:r>
+          </a:p>
+        </p:txBody>
+      </p:sp>
+      <p:cxnSp>
+        <p:nvCxnSpPr>
+          <p:cNvPr id="141" name="Conector recto de flecha 140">
+            <a:extLst>
+              <a:ext uri="{FF2B5EF4-FFF2-40B4-BE49-F238E27FC236}">
+                <a16:creationId xmlns:a16="http://schemas.microsoft.com/office/drawing/2014/main" id="{9B4DEAA3-5AA9-696B-FF21-0F61E46E06D6}"/>
+              </a:ext>
+            </a:extLst>
+          </p:cNvPr>
+          <p:cNvCxnSpPr>
+            <a:cxnSpLocks/>
+          </p:cNvCxnSpPr>
+          <p:nvPr/>
+        </p:nvCxnSpPr>
+        <p:spPr>
+          <a:xfrm flipH="1">
+            <a:off x="8941389" y="730726"/>
+            <a:ext cx="333554" cy="0"/>
+          </a:xfrm>
+          <a:prstGeom prst="straightConnector1">
+            <a:avLst/>
+          </a:prstGeom>
+          <a:ln>
+            <a:tailEnd type="oval"/>
+          </a:ln>
+        </p:spPr>
+        <p:style>
+          <a:lnRef idx="2">
+            <a:schemeClr val="accent1"/>
+          </a:lnRef>
+          <a:fillRef idx="0">
+            <a:schemeClr val="accent1"/>
+          </a:fillRef>
+          <a:effectRef idx="1">
+            <a:schemeClr val="accent1"/>
+          </a:effectRef>
+          <a:fontRef idx="minor">
+            <a:schemeClr val="tx1"/>
+          </a:fontRef>
+        </p:style>
+      </p:cxnSp>
+      <p:sp>
+        <p:nvSpPr>
+          <p:cNvPr id="142" name="CuadroTexto 141">
+            <a:extLst>
+              <a:ext uri="{FF2B5EF4-FFF2-40B4-BE49-F238E27FC236}">
+                <a16:creationId xmlns:a16="http://schemas.microsoft.com/office/drawing/2014/main" id="{4AC1C1A5-3781-B61A-8F51-179B51AD34C2}"/>
+              </a:ext>
+            </a:extLst>
+          </p:cNvPr>
+          <p:cNvSpPr txBox="1"/>
+          <p:nvPr/>
+        </p:nvSpPr>
+        <p:spPr>
+          <a:xfrm>
+            <a:off x="8356714" y="587891"/>
+            <a:ext cx="576708" cy="261610"/>
+          </a:xfrm>
+          <a:prstGeom prst="rect">
+            <a:avLst/>
+          </a:prstGeom>
+          <a:noFill/>
+        </p:spPr>
+        <p:txBody>
+          <a:bodyPr wrap="square" rtlCol="0">
+            <a:spAutoFit/>
+          </a:bodyPr>
+          <a:lstStyle/>
+          <a:p>
+            <a:r>
+              <a:rPr lang="es-ES" sz="1100" u="sng" dirty="0" err="1"/>
+              <a:t>ID_cat</a:t>
+            </a:r>
+            <a:endParaRPr lang="es-ES" sz="1100" u="sng" dirty="0"/>
+          </a:p>
+        </p:txBody>
+      </p:sp>
+      <p:cxnSp>
+        <p:nvCxnSpPr>
+          <p:cNvPr id="143" name="Conector recto de flecha 142">
+            <a:extLst>
+              <a:ext uri="{FF2B5EF4-FFF2-40B4-BE49-F238E27FC236}">
+                <a16:creationId xmlns:a16="http://schemas.microsoft.com/office/drawing/2014/main" id="{0CD6EFFA-9678-BC83-A681-CBE13A5B0FC7}"/>
+              </a:ext>
+            </a:extLst>
+          </p:cNvPr>
+          <p:cNvCxnSpPr>
+            <a:cxnSpLocks/>
+          </p:cNvCxnSpPr>
+          <p:nvPr/>
+        </p:nvCxnSpPr>
+        <p:spPr>
+          <a:xfrm flipV="1">
+            <a:off x="9906821" y="398106"/>
+            <a:ext cx="0" cy="249256"/>
+          </a:xfrm>
+          <a:prstGeom prst="straightConnector1">
+            <a:avLst/>
+          </a:prstGeom>
+          <a:ln>
+            <a:tailEnd type="diamond"/>
+          </a:ln>
+        </p:spPr>
+        <p:style>
+          <a:lnRef idx="2">
+            <a:schemeClr val="accent1"/>
+          </a:lnRef>
+          <a:fillRef idx="0">
+            <a:schemeClr val="accent1"/>
+          </a:fillRef>
+          <a:effectRef idx="1">
+            <a:schemeClr val="accent1"/>
+          </a:effectRef>
+          <a:fontRef idx="minor">
+            <a:schemeClr val="tx1"/>
+          </a:fontRef>
+        </p:style>
+      </p:cxnSp>
+      <p:cxnSp>
+        <p:nvCxnSpPr>
+          <p:cNvPr id="144" name="Conector recto de flecha 143">
+            <a:extLst>
+              <a:ext uri="{FF2B5EF4-FFF2-40B4-BE49-F238E27FC236}">
+                <a16:creationId xmlns:a16="http://schemas.microsoft.com/office/drawing/2014/main" id="{BE539A50-CE93-0805-5A89-941D473B145D}"/>
+              </a:ext>
+            </a:extLst>
+          </p:cNvPr>
+          <p:cNvCxnSpPr>
+            <a:cxnSpLocks/>
+          </p:cNvCxnSpPr>
+          <p:nvPr/>
+        </p:nvCxnSpPr>
+        <p:spPr>
+          <a:xfrm flipV="1">
+            <a:off x="9485525" y="398106"/>
+            <a:ext cx="0" cy="249256"/>
+          </a:xfrm>
+          <a:prstGeom prst="straightConnector1">
+            <a:avLst/>
+          </a:prstGeom>
+          <a:ln>
+            <a:tailEnd type="diamond"/>
+          </a:ln>
+        </p:spPr>
+        <p:style>
+          <a:lnRef idx="2">
+            <a:schemeClr val="accent1"/>
+          </a:lnRef>
+          <a:fillRef idx="0">
+            <a:schemeClr val="accent1"/>
+          </a:fillRef>
+          <a:effectRef idx="1">
+            <a:schemeClr val="accent1"/>
+          </a:effectRef>
+          <a:fontRef idx="minor">
+            <a:schemeClr val="tx1"/>
+          </a:fontRef>
+        </p:style>
+      </p:cxnSp>
+      <p:sp>
+        <p:nvSpPr>
+          <p:cNvPr id="145" name="CuadroTexto 144">
+            <a:extLst>
+              <a:ext uri="{FF2B5EF4-FFF2-40B4-BE49-F238E27FC236}">
+                <a16:creationId xmlns:a16="http://schemas.microsoft.com/office/drawing/2014/main" id="{CE29371B-2CC3-A33D-248E-6F7710C6AD6A}"/>
+              </a:ext>
+            </a:extLst>
+          </p:cNvPr>
+          <p:cNvSpPr txBox="1"/>
+          <p:nvPr/>
+        </p:nvSpPr>
+        <p:spPr>
+          <a:xfrm rot="19193406">
+            <a:off x="9240918" y="-65669"/>
+            <a:ext cx="783568" cy="261610"/>
+          </a:xfrm>
+          <a:prstGeom prst="rect">
+            <a:avLst/>
+          </a:prstGeom>
+          <a:noFill/>
+        </p:spPr>
+        <p:txBody>
+          <a:bodyPr wrap="square" rtlCol="0">
+            <a:spAutoFit/>
+          </a:bodyPr>
+          <a:lstStyle/>
+          <a:p>
+            <a:r>
+              <a:rPr lang="es-ES" sz="1100" dirty="0" err="1"/>
+              <a:t>Nom</a:t>
+            </a:r>
+            <a:endParaRPr lang="es-ES" sz="1100" dirty="0"/>
+          </a:p>
+        </p:txBody>
+      </p:sp>
+      <p:sp>
+        <p:nvSpPr>
+          <p:cNvPr id="146" name="CuadroTexto 145">
+            <a:extLst>
+              <a:ext uri="{FF2B5EF4-FFF2-40B4-BE49-F238E27FC236}">
+                <a16:creationId xmlns:a16="http://schemas.microsoft.com/office/drawing/2014/main" id="{E62D0053-B93A-3226-A1D3-5BE49015CCDA}"/>
+              </a:ext>
+            </a:extLst>
+          </p:cNvPr>
+          <p:cNvSpPr txBox="1"/>
+          <p:nvPr/>
+        </p:nvSpPr>
+        <p:spPr>
+          <a:xfrm>
+            <a:off x="9723687" y="65745"/>
+            <a:ext cx="1095193" cy="261610"/>
+          </a:xfrm>
+          <a:prstGeom prst="rect">
+            <a:avLst/>
+          </a:prstGeom>
+          <a:noFill/>
+        </p:spPr>
+        <p:txBody>
+          <a:bodyPr wrap="square" rtlCol="0">
+            <a:spAutoFit/>
+          </a:bodyPr>
+          <a:lstStyle/>
+          <a:p>
+            <a:r>
+              <a:rPr lang="es-ES" sz="1100" dirty="0" err="1"/>
+              <a:t>descripció</a:t>
+            </a:r>
+            <a:endParaRPr lang="es-ES" sz="1100" dirty="0"/>
+          </a:p>
+        </p:txBody>
+      </p:sp>
+      <p:cxnSp>
+        <p:nvCxnSpPr>
+          <p:cNvPr id="147" name="Conector recto de flecha 146">
+            <a:extLst>
+              <a:ext uri="{FF2B5EF4-FFF2-40B4-BE49-F238E27FC236}">
+                <a16:creationId xmlns:a16="http://schemas.microsoft.com/office/drawing/2014/main" id="{37D04916-CEE3-ACF7-44F1-98B8041BF309}"/>
+              </a:ext>
+            </a:extLst>
+          </p:cNvPr>
+          <p:cNvCxnSpPr>
+            <a:cxnSpLocks/>
+          </p:cNvCxnSpPr>
+          <p:nvPr/>
+        </p:nvCxnSpPr>
+        <p:spPr>
+          <a:xfrm rot="10800000" flipH="1">
+            <a:off x="10396375" y="3013213"/>
+            <a:ext cx="333554" cy="0"/>
+          </a:xfrm>
+          <a:prstGeom prst="straightConnector1">
+            <a:avLst/>
+          </a:prstGeom>
+          <a:ln>
+            <a:tailEnd type="oval"/>
+          </a:ln>
+        </p:spPr>
+        <p:style>
+          <a:lnRef idx="2">
+            <a:schemeClr val="accent1"/>
+          </a:lnRef>
+          <a:fillRef idx="0">
+            <a:schemeClr val="accent1"/>
+          </a:fillRef>
+          <a:effectRef idx="1">
+            <a:schemeClr val="accent1"/>
+          </a:effectRef>
+          <a:fontRef idx="minor">
+            <a:schemeClr val="tx1"/>
+          </a:fontRef>
+        </p:style>
+      </p:cxnSp>
+      <p:sp>
+        <p:nvSpPr>
+          <p:cNvPr id="148" name="CuadroTexto 147">
+            <a:extLst>
+              <a:ext uri="{FF2B5EF4-FFF2-40B4-BE49-F238E27FC236}">
+                <a16:creationId xmlns:a16="http://schemas.microsoft.com/office/drawing/2014/main" id="{A7F8449E-D681-FCE9-14E4-8E7CA4176E33}"/>
+              </a:ext>
+            </a:extLst>
+          </p:cNvPr>
+          <p:cNvSpPr txBox="1"/>
+          <p:nvPr/>
+        </p:nvSpPr>
+        <p:spPr>
+          <a:xfrm>
+            <a:off x="10759393" y="2897506"/>
+            <a:ext cx="783568" cy="261610"/>
+          </a:xfrm>
+          <a:prstGeom prst="rect">
+            <a:avLst/>
+          </a:prstGeom>
+          <a:noFill/>
+        </p:spPr>
+        <p:txBody>
+          <a:bodyPr wrap="square" rtlCol="0">
+            <a:spAutoFit/>
+          </a:bodyPr>
+          <a:lstStyle/>
+          <a:p>
+            <a:r>
+              <a:rPr lang="es-ES" sz="1100" u="sng" dirty="0" err="1"/>
+              <a:t>ID_prod</a:t>
+            </a:r>
+            <a:endParaRPr lang="es-ES" sz="1100" u="sng" dirty="0"/>
+          </a:p>
+        </p:txBody>
+      </p:sp>
+      <p:cxnSp>
+        <p:nvCxnSpPr>
+          <p:cNvPr id="150" name="Conector recto de flecha 149">
+            <a:extLst>
+              <a:ext uri="{FF2B5EF4-FFF2-40B4-BE49-F238E27FC236}">
+                <a16:creationId xmlns:a16="http://schemas.microsoft.com/office/drawing/2014/main" id="{01488FAA-3CFD-BAAD-A223-7398CD4A5D9D}"/>
+              </a:ext>
+            </a:extLst>
+          </p:cNvPr>
+          <p:cNvCxnSpPr>
+            <a:cxnSpLocks/>
+          </p:cNvCxnSpPr>
+          <p:nvPr/>
+        </p:nvCxnSpPr>
+        <p:spPr>
+          <a:xfrm rot="10800000" flipV="1">
+            <a:off x="9461117" y="3194844"/>
+            <a:ext cx="0" cy="249256"/>
+          </a:xfrm>
+          <a:prstGeom prst="straightConnector1">
+            <a:avLst/>
+          </a:prstGeom>
+          <a:ln>
+            <a:tailEnd type="diamond"/>
+          </a:ln>
+        </p:spPr>
+        <p:style>
+          <a:lnRef idx="2">
+            <a:schemeClr val="accent1"/>
+          </a:lnRef>
+          <a:fillRef idx="0">
+            <a:schemeClr val="accent1"/>
+          </a:fillRef>
+          <a:effectRef idx="1">
+            <a:schemeClr val="accent1"/>
+          </a:effectRef>
+          <a:fontRef idx="minor">
+            <a:schemeClr val="tx1"/>
+          </a:fontRef>
+        </p:style>
+      </p:cxnSp>
+      <p:sp>
+        <p:nvSpPr>
+          <p:cNvPr id="152" name="CuadroTexto 151">
+            <a:extLst>
+              <a:ext uri="{FF2B5EF4-FFF2-40B4-BE49-F238E27FC236}">
+                <a16:creationId xmlns:a16="http://schemas.microsoft.com/office/drawing/2014/main" id="{F2D1423D-9A0E-87CC-4BA1-A5BB1DE87270}"/>
+              </a:ext>
+            </a:extLst>
+          </p:cNvPr>
+          <p:cNvSpPr txBox="1"/>
+          <p:nvPr/>
+        </p:nvSpPr>
+        <p:spPr>
+          <a:xfrm rot="19193406">
+            <a:off x="9108349" y="3462584"/>
+            <a:ext cx="473729" cy="261610"/>
+          </a:xfrm>
+          <a:prstGeom prst="rect">
+            <a:avLst/>
+          </a:prstGeom>
+          <a:noFill/>
+        </p:spPr>
+        <p:txBody>
+          <a:bodyPr wrap="square" rtlCol="0">
+            <a:spAutoFit/>
+          </a:bodyPr>
+          <a:lstStyle/>
+          <a:p>
+            <a:r>
+              <a:rPr lang="es-ES" sz="1100" dirty="0" err="1"/>
+              <a:t>nom</a:t>
+            </a:r>
+            <a:endParaRPr lang="es-ES" sz="1100" dirty="0"/>
+          </a:p>
+        </p:txBody>
+      </p:sp>
+      <p:cxnSp>
+        <p:nvCxnSpPr>
+          <p:cNvPr id="158" name="Conector recto de flecha 157">
+            <a:extLst>
+              <a:ext uri="{FF2B5EF4-FFF2-40B4-BE49-F238E27FC236}">
+                <a16:creationId xmlns:a16="http://schemas.microsoft.com/office/drawing/2014/main" id="{81876A68-E10E-7CE6-9682-FBCEEE3980FC}"/>
+              </a:ext>
+            </a:extLst>
+          </p:cNvPr>
+          <p:cNvCxnSpPr>
+            <a:cxnSpLocks/>
+          </p:cNvCxnSpPr>
+          <p:nvPr/>
+        </p:nvCxnSpPr>
+        <p:spPr>
+          <a:xfrm flipH="1" flipV="1">
+            <a:off x="7580558" y="2500538"/>
+            <a:ext cx="109124" cy="234552"/>
+          </a:xfrm>
+          <a:prstGeom prst="straightConnector1">
+            <a:avLst/>
+          </a:prstGeom>
+          <a:ln>
+            <a:tailEnd type="diamond"/>
+          </a:ln>
+        </p:spPr>
+        <p:style>
+          <a:lnRef idx="2">
+            <a:schemeClr val="accent1"/>
+          </a:lnRef>
+          <a:fillRef idx="0">
+            <a:schemeClr val="accent1"/>
+          </a:fillRef>
+          <a:effectRef idx="1">
+            <a:schemeClr val="accent1"/>
+          </a:effectRef>
+          <a:fontRef idx="minor">
+            <a:schemeClr val="tx1"/>
+          </a:fontRef>
+        </p:style>
+      </p:cxnSp>
+      <p:sp>
+        <p:nvSpPr>
+          <p:cNvPr id="161" name="CuadroTexto 160">
+            <a:extLst>
+              <a:ext uri="{FF2B5EF4-FFF2-40B4-BE49-F238E27FC236}">
+                <a16:creationId xmlns:a16="http://schemas.microsoft.com/office/drawing/2014/main" id="{FAD2B325-EF2F-D565-BB39-1D3A2508CCB8}"/>
+              </a:ext>
+            </a:extLst>
+          </p:cNvPr>
+          <p:cNvSpPr txBox="1"/>
+          <p:nvPr/>
+        </p:nvSpPr>
+        <p:spPr>
+          <a:xfrm rot="19193406">
+            <a:off x="7180850" y="2014418"/>
+            <a:ext cx="1105567" cy="261610"/>
+          </a:xfrm>
+          <a:prstGeom prst="rect">
+            <a:avLst/>
+          </a:prstGeom>
+          <a:noFill/>
+        </p:spPr>
+        <p:txBody>
+          <a:bodyPr wrap="square" rtlCol="0">
+            <a:spAutoFit/>
+          </a:bodyPr>
+          <a:lstStyle/>
+          <a:p>
+            <a:r>
+              <a:rPr lang="es-ES" sz="1100" dirty="0" err="1"/>
+              <a:t>Preu_en_venta</a:t>
+            </a:r>
+            <a:endParaRPr lang="es-ES" sz="1100" dirty="0"/>
+          </a:p>
+        </p:txBody>
+      </p:sp>
+      <p:cxnSp>
+        <p:nvCxnSpPr>
+          <p:cNvPr id="165" name="Conector recto de flecha 164">
+            <a:extLst>
+              <a:ext uri="{FF2B5EF4-FFF2-40B4-BE49-F238E27FC236}">
+                <a16:creationId xmlns:a16="http://schemas.microsoft.com/office/drawing/2014/main" id="{4DE4C341-5D31-E86A-63B4-BC640DA3A1D1}"/>
+              </a:ext>
+            </a:extLst>
+          </p:cNvPr>
+          <p:cNvCxnSpPr>
+            <a:cxnSpLocks/>
+          </p:cNvCxnSpPr>
+          <p:nvPr/>
+        </p:nvCxnSpPr>
+        <p:spPr>
+          <a:xfrm flipH="1">
+            <a:off x="4480672" y="4729025"/>
+            <a:ext cx="333554" cy="0"/>
+          </a:xfrm>
+          <a:prstGeom prst="straightConnector1">
+            <a:avLst/>
+          </a:prstGeom>
+          <a:ln>
+            <a:tailEnd type="oval"/>
+          </a:ln>
+        </p:spPr>
+        <p:style>
+          <a:lnRef idx="2">
+            <a:schemeClr val="accent1"/>
+          </a:lnRef>
+          <a:fillRef idx="0">
+            <a:schemeClr val="accent1"/>
+          </a:fillRef>
+          <a:effectRef idx="1">
+            <a:schemeClr val="accent1"/>
+          </a:effectRef>
+          <a:fontRef idx="minor">
+            <a:schemeClr val="tx1"/>
+          </a:fontRef>
+        </p:style>
+      </p:cxnSp>
+      <p:sp>
+        <p:nvSpPr>
+          <p:cNvPr id="166" name="CuadroTexto 165">
+            <a:extLst>
+              <a:ext uri="{FF2B5EF4-FFF2-40B4-BE49-F238E27FC236}">
+                <a16:creationId xmlns:a16="http://schemas.microsoft.com/office/drawing/2014/main" id="{48BFF104-AEC8-9C05-D1AF-F5574C74D99B}"/>
+              </a:ext>
+            </a:extLst>
+          </p:cNvPr>
+          <p:cNvSpPr txBox="1"/>
+          <p:nvPr/>
+        </p:nvSpPr>
+        <p:spPr>
+          <a:xfrm>
+            <a:off x="3823531" y="4590166"/>
+            <a:ext cx="783568" cy="261610"/>
+          </a:xfrm>
+          <a:prstGeom prst="rect">
+            <a:avLst/>
+          </a:prstGeom>
+          <a:noFill/>
+        </p:spPr>
+        <p:txBody>
+          <a:bodyPr wrap="square" rtlCol="0">
+            <a:spAutoFit/>
+          </a:bodyPr>
+          <a:lstStyle/>
+          <a:p>
+            <a:r>
+              <a:rPr lang="es-ES" sz="1100" u="sng" dirty="0" err="1"/>
+              <a:t>ID_prov</a:t>
+            </a:r>
+            <a:endParaRPr lang="es-ES" sz="1100" u="sng" dirty="0"/>
+          </a:p>
+        </p:txBody>
+      </p:sp>
+      <p:sp>
+        <p:nvSpPr>
+          <p:cNvPr id="171" name="CuadroTexto 170">
+            <a:extLst>
+              <a:ext uri="{FF2B5EF4-FFF2-40B4-BE49-F238E27FC236}">
+                <a16:creationId xmlns:a16="http://schemas.microsoft.com/office/drawing/2014/main" id="{92DBF19A-88D9-3399-B7C3-5391EFD4A7DC}"/>
+              </a:ext>
+            </a:extLst>
+          </p:cNvPr>
+          <p:cNvSpPr txBox="1"/>
+          <p:nvPr/>
+        </p:nvSpPr>
+        <p:spPr>
+          <a:xfrm>
+            <a:off x="9879499" y="4097124"/>
+            <a:ext cx="783568" cy="307777"/>
+          </a:xfrm>
+          <a:prstGeom prst="rect">
+            <a:avLst/>
+          </a:prstGeom>
+          <a:noFill/>
+        </p:spPr>
+        <p:txBody>
+          <a:bodyPr wrap="square" rtlCol="0">
+            <a:spAutoFit/>
+          </a:bodyPr>
+          <a:lstStyle/>
+          <a:p>
+            <a:r>
+              <a:rPr lang="es-ES" sz="1400" dirty="0"/>
+              <a:t>(1,n)</a:t>
+            </a:r>
+          </a:p>
+        </p:txBody>
+      </p:sp>
+      <p:sp>
+        <p:nvSpPr>
+          <p:cNvPr id="172" name="CuadroTexto 171">
+            <a:extLst>
+              <a:ext uri="{FF2B5EF4-FFF2-40B4-BE49-F238E27FC236}">
+                <a16:creationId xmlns:a16="http://schemas.microsoft.com/office/drawing/2014/main" id="{00CE8CCC-340F-4CCA-367F-758111938273}"/>
+              </a:ext>
+            </a:extLst>
+          </p:cNvPr>
+          <p:cNvSpPr txBox="1"/>
+          <p:nvPr/>
+        </p:nvSpPr>
+        <p:spPr>
+          <a:xfrm>
+            <a:off x="6744855" y="4809217"/>
+            <a:ext cx="783568" cy="307777"/>
+          </a:xfrm>
+          <a:prstGeom prst="rect">
+            <a:avLst/>
+          </a:prstGeom>
+          <a:noFill/>
+        </p:spPr>
+        <p:txBody>
+          <a:bodyPr wrap="square" rtlCol="0">
+            <a:spAutoFit/>
+          </a:bodyPr>
+          <a:lstStyle/>
+          <a:p>
+            <a:r>
+              <a:rPr lang="es-ES" sz="1400" dirty="0"/>
+              <a:t>(1,1)</a:t>
+            </a:r>
+          </a:p>
+        </p:txBody>
+      </p:sp>
+      <p:sp>
+        <p:nvSpPr>
+          <p:cNvPr id="173" name="CuadroTexto 172">
+            <a:extLst>
+              <a:ext uri="{FF2B5EF4-FFF2-40B4-BE49-F238E27FC236}">
+                <a16:creationId xmlns:a16="http://schemas.microsoft.com/office/drawing/2014/main" id="{783ACA98-F517-8B58-BA25-31E94A693D30}"/>
+              </a:ext>
+            </a:extLst>
+          </p:cNvPr>
+          <p:cNvSpPr txBox="1"/>
+          <p:nvPr/>
+        </p:nvSpPr>
+        <p:spPr>
+          <a:xfrm>
+            <a:off x="7998853" y="4182057"/>
+            <a:ext cx="783568" cy="307777"/>
+          </a:xfrm>
+          <a:prstGeom prst="rect">
+            <a:avLst/>
+          </a:prstGeom>
+          <a:noFill/>
+        </p:spPr>
+        <p:txBody>
+          <a:bodyPr wrap="square" rtlCol="0">
+            <a:spAutoFit/>
+          </a:bodyPr>
+          <a:lstStyle/>
+          <a:p>
+            <a:r>
+              <a:rPr lang="es-ES" sz="1400" b="1" dirty="0"/>
+              <a:t>(1,n)</a:t>
+            </a:r>
+          </a:p>
+        </p:txBody>
+      </p:sp>
+      <p:sp>
+        <p:nvSpPr>
+          <p:cNvPr id="174" name="CuadroTexto 173">
+            <a:extLst>
+              <a:ext uri="{FF2B5EF4-FFF2-40B4-BE49-F238E27FC236}">
+                <a16:creationId xmlns:a16="http://schemas.microsoft.com/office/drawing/2014/main" id="{5C88E799-DEA4-73DD-B127-74E7B5994B85}"/>
+              </a:ext>
+            </a:extLst>
+          </p:cNvPr>
+          <p:cNvSpPr txBox="1"/>
+          <p:nvPr/>
+        </p:nvSpPr>
+        <p:spPr>
+          <a:xfrm>
+            <a:off x="8517973" y="2591129"/>
+            <a:ext cx="783568" cy="307777"/>
+          </a:xfrm>
+          <a:prstGeom prst="rect">
+            <a:avLst/>
+          </a:prstGeom>
+          <a:noFill/>
+        </p:spPr>
+        <p:txBody>
+          <a:bodyPr wrap="square" rtlCol="0">
+            <a:spAutoFit/>
+          </a:bodyPr>
+          <a:lstStyle/>
+          <a:p>
+            <a:r>
+              <a:rPr lang="es-ES" sz="1400" dirty="0"/>
+              <a:t>(1,n)</a:t>
+            </a:r>
+          </a:p>
+        </p:txBody>
+      </p:sp>
+      <p:cxnSp>
+        <p:nvCxnSpPr>
+          <p:cNvPr id="6" name="Conector recto de flecha 5">
+            <a:extLst>
+              <a:ext uri="{FF2B5EF4-FFF2-40B4-BE49-F238E27FC236}">
+                <a16:creationId xmlns:a16="http://schemas.microsoft.com/office/drawing/2014/main" id="{D5FE6683-05A0-CA52-339B-DE6F97EEE181}"/>
+              </a:ext>
+            </a:extLst>
+          </p:cNvPr>
+          <p:cNvCxnSpPr>
+            <a:cxnSpLocks/>
+          </p:cNvCxnSpPr>
+          <p:nvPr/>
+        </p:nvCxnSpPr>
+        <p:spPr>
+          <a:xfrm rot="10800000" flipV="1">
+            <a:off x="6401695" y="5178570"/>
+            <a:ext cx="0" cy="249256"/>
+          </a:xfrm>
+          <a:prstGeom prst="straightConnector1">
+            <a:avLst/>
+          </a:prstGeom>
+          <a:ln>
+            <a:tailEnd type="diamond"/>
+          </a:ln>
+        </p:spPr>
+        <p:style>
+          <a:lnRef idx="2">
+            <a:schemeClr val="accent1"/>
+          </a:lnRef>
+          <a:fillRef idx="0">
+            <a:schemeClr val="accent1"/>
+          </a:fillRef>
+          <a:effectRef idx="1">
+            <a:schemeClr val="accent1"/>
+          </a:effectRef>
+          <a:fontRef idx="minor">
+            <a:schemeClr val="tx1"/>
+          </a:fontRef>
+        </p:style>
+      </p:cxnSp>
+      <p:sp>
+        <p:nvSpPr>
+          <p:cNvPr id="7" name="CuadroTexto 6">
+            <a:extLst>
+              <a:ext uri="{FF2B5EF4-FFF2-40B4-BE49-F238E27FC236}">
+                <a16:creationId xmlns:a16="http://schemas.microsoft.com/office/drawing/2014/main" id="{57F174C4-1491-C3C5-AAD8-9123CE99D587}"/>
+              </a:ext>
+            </a:extLst>
+          </p:cNvPr>
+          <p:cNvSpPr txBox="1"/>
+          <p:nvPr/>
+        </p:nvSpPr>
+        <p:spPr>
+          <a:xfrm rot="19193406">
+            <a:off x="6035289" y="5362532"/>
+            <a:ext cx="783568" cy="261610"/>
+          </a:xfrm>
+          <a:prstGeom prst="rect">
+            <a:avLst/>
+          </a:prstGeom>
+          <a:noFill/>
+        </p:spPr>
+        <p:txBody>
+          <a:bodyPr wrap="square" rtlCol="0">
+            <a:spAutoFit/>
+          </a:bodyPr>
+          <a:lstStyle/>
+          <a:p>
+            <a:r>
+              <a:rPr lang="es-ES" sz="1100" dirty="0"/>
+              <a:t>web</a:t>
+            </a:r>
+          </a:p>
+        </p:txBody>
+      </p:sp>
+      <p:cxnSp>
+        <p:nvCxnSpPr>
+          <p:cNvPr id="8" name="Conector recto de flecha 7">
+            <a:extLst>
+              <a:ext uri="{FF2B5EF4-FFF2-40B4-BE49-F238E27FC236}">
+                <a16:creationId xmlns:a16="http://schemas.microsoft.com/office/drawing/2014/main" id="{38FAA74B-8576-2AD3-1617-EFB1B9AA0F73}"/>
+              </a:ext>
+            </a:extLst>
+          </p:cNvPr>
+          <p:cNvCxnSpPr>
+            <a:cxnSpLocks/>
+          </p:cNvCxnSpPr>
+          <p:nvPr/>
+        </p:nvCxnSpPr>
+        <p:spPr>
+          <a:xfrm rot="10800000" flipV="1">
+            <a:off x="4801495" y="5169045"/>
+            <a:ext cx="0" cy="249256"/>
+          </a:xfrm>
+          <a:prstGeom prst="straightConnector1">
+            <a:avLst/>
+          </a:prstGeom>
+          <a:ln>
+            <a:tailEnd type="diamond"/>
+          </a:ln>
+        </p:spPr>
+        <p:style>
+          <a:lnRef idx="2">
+            <a:schemeClr val="accent1"/>
+          </a:lnRef>
+          <a:fillRef idx="0">
+            <a:schemeClr val="accent1"/>
+          </a:fillRef>
+          <a:effectRef idx="1">
+            <a:schemeClr val="accent1"/>
+          </a:effectRef>
+          <a:fontRef idx="minor">
+            <a:schemeClr val="tx1"/>
+          </a:fontRef>
+        </p:style>
+      </p:cxnSp>
+      <p:sp>
+        <p:nvSpPr>
+          <p:cNvPr id="10" name="CuadroTexto 9">
+            <a:extLst>
+              <a:ext uri="{FF2B5EF4-FFF2-40B4-BE49-F238E27FC236}">
+                <a16:creationId xmlns:a16="http://schemas.microsoft.com/office/drawing/2014/main" id="{4484D097-24F3-F9D2-93C6-B57C6D121650}"/>
+              </a:ext>
+            </a:extLst>
+          </p:cNvPr>
+          <p:cNvSpPr txBox="1"/>
+          <p:nvPr/>
+        </p:nvSpPr>
+        <p:spPr>
+          <a:xfrm rot="19193406">
+            <a:off x="4349364" y="5457782"/>
+            <a:ext cx="783568" cy="261610"/>
+          </a:xfrm>
+          <a:prstGeom prst="rect">
+            <a:avLst/>
+          </a:prstGeom>
+          <a:noFill/>
+        </p:spPr>
+        <p:txBody>
+          <a:bodyPr wrap="square" rtlCol="0">
+            <a:spAutoFit/>
+          </a:bodyPr>
+          <a:lstStyle/>
+          <a:p>
+            <a:r>
+              <a:rPr lang="es-ES" sz="1100" dirty="0" err="1"/>
+              <a:t>telèfon</a:t>
+            </a:r>
+            <a:endParaRPr lang="es-ES" sz="1100" dirty="0"/>
+          </a:p>
+        </p:txBody>
+      </p:sp>
+      <p:cxnSp>
+        <p:nvCxnSpPr>
+          <p:cNvPr id="11" name="Conector recto de flecha 10">
+            <a:extLst>
+              <a:ext uri="{FF2B5EF4-FFF2-40B4-BE49-F238E27FC236}">
+                <a16:creationId xmlns:a16="http://schemas.microsoft.com/office/drawing/2014/main" id="{18149F88-3667-E66A-8E3E-CD3F1ED6E729}"/>
+              </a:ext>
+            </a:extLst>
+          </p:cNvPr>
+          <p:cNvCxnSpPr>
+            <a:cxnSpLocks/>
+            <a:stCxn id="4" idx="3"/>
+          </p:cNvCxnSpPr>
+          <p:nvPr/>
+        </p:nvCxnSpPr>
+        <p:spPr>
+          <a:xfrm>
+            <a:off x="6095997" y="1162765"/>
+            <a:ext cx="143628" cy="10688"/>
+          </a:xfrm>
+          <a:prstGeom prst="straightConnector1">
+            <a:avLst/>
+          </a:prstGeom>
+          <a:ln>
+            <a:tailEnd type="oval"/>
+          </a:ln>
+        </p:spPr>
+        <p:style>
+          <a:lnRef idx="2">
+            <a:schemeClr val="accent1"/>
+          </a:lnRef>
+          <a:fillRef idx="0">
+            <a:schemeClr val="accent1"/>
+          </a:fillRef>
+          <a:effectRef idx="1">
+            <a:schemeClr val="accent1"/>
+          </a:effectRef>
+          <a:fontRef idx="minor">
+            <a:schemeClr val="tx1"/>
+          </a:fontRef>
+        </p:style>
+      </p:cxnSp>
+      <p:sp>
+        <p:nvSpPr>
+          <p:cNvPr id="13" name="Rectángulo 12">
+            <a:extLst>
+              <a:ext uri="{FF2B5EF4-FFF2-40B4-BE49-F238E27FC236}">
+                <a16:creationId xmlns:a16="http://schemas.microsoft.com/office/drawing/2014/main" id="{41DD8005-14B8-9FE0-F5C8-28BA3B7BD04B}"/>
+              </a:ext>
+            </a:extLst>
+          </p:cNvPr>
+          <p:cNvSpPr/>
+          <p:nvPr/>
+        </p:nvSpPr>
+        <p:spPr>
+          <a:xfrm>
+            <a:off x="1782725" y="860090"/>
+            <a:ext cx="1063201" cy="465305"/>
+          </a:xfrm>
+          <a:prstGeom prst="rect">
+            <a:avLst/>
+          </a:prstGeom>
+        </p:spPr>
+        <p:style>
+          <a:lnRef idx="2">
+            <a:schemeClr val="accent1">
+              <a:shade val="15000"/>
+            </a:schemeClr>
+          </a:lnRef>
+          <a:fillRef idx="1">
+            <a:schemeClr val="accent1"/>
+          </a:fillRef>
+          <a:effectRef idx="0">
+            <a:schemeClr val="accent1"/>
+          </a:effectRef>
+          <a:fontRef idx="minor">
+            <a:schemeClr val="lt1"/>
+          </a:fontRef>
+        </p:style>
+        <p:txBody>
+          <a:bodyPr rtlCol="0" anchor="ctr"/>
+          <a:lstStyle/>
+          <a:p>
+            <a:pPr algn="ctr"/>
+            <a:r>
+              <a:rPr lang="es-ES" dirty="0" err="1"/>
+              <a:t>Telèfons_clients</a:t>
+            </a:r>
+            <a:endParaRPr lang="es-ES" dirty="0"/>
+          </a:p>
+        </p:txBody>
+      </p:sp>
+      <p:sp>
+        <p:nvSpPr>
+          <p:cNvPr id="18" name="Rombo 17">
+            <a:extLst>
+              <a:ext uri="{FF2B5EF4-FFF2-40B4-BE49-F238E27FC236}">
+                <a16:creationId xmlns:a16="http://schemas.microsoft.com/office/drawing/2014/main" id="{708F1691-53F9-7B7A-AF59-6C4D0E2E4ECD}"/>
+              </a:ext>
+            </a:extLst>
+          </p:cNvPr>
+          <p:cNvSpPr/>
+          <p:nvPr/>
+        </p:nvSpPr>
+        <p:spPr>
+          <a:xfrm>
+            <a:off x="3303454" y="752292"/>
+            <a:ext cx="1319843" cy="605286"/>
+          </a:xfrm>
+          <a:prstGeom prst="diamond">
+            <a:avLst/>
+          </a:prstGeom>
+        </p:spPr>
+        <p:style>
+          <a:lnRef idx="2">
+            <a:schemeClr val="accent5">
+              <a:shade val="15000"/>
+            </a:schemeClr>
+          </a:lnRef>
+          <a:fillRef idx="1">
+            <a:schemeClr val="accent5"/>
+          </a:fillRef>
+          <a:effectRef idx="0">
+            <a:schemeClr val="accent5"/>
+          </a:effectRef>
+          <a:fontRef idx="minor">
+            <a:schemeClr val="lt1"/>
+          </a:fontRef>
+        </p:style>
+        <p:txBody>
+          <a:bodyPr rtlCol="0" anchor="ctr"/>
+          <a:lstStyle/>
+          <a:p>
+            <a:pPr algn="ctr"/>
+            <a:r>
+              <a:rPr lang="es-ES" sz="1400" dirty="0"/>
+              <a:t>conté</a:t>
+            </a:r>
+          </a:p>
+        </p:txBody>
+      </p:sp>
+      <p:cxnSp>
+        <p:nvCxnSpPr>
+          <p:cNvPr id="19" name="Conector: angular 18">
+            <a:extLst>
+              <a:ext uri="{FF2B5EF4-FFF2-40B4-BE49-F238E27FC236}">
+                <a16:creationId xmlns:a16="http://schemas.microsoft.com/office/drawing/2014/main" id="{C339A5F5-0FA1-071F-D0CC-891E3A2AEA50}"/>
+              </a:ext>
+            </a:extLst>
+          </p:cNvPr>
+          <p:cNvCxnSpPr>
+            <a:cxnSpLocks/>
+            <a:stCxn id="13" idx="3"/>
+            <a:endCxn id="18" idx="1"/>
+          </p:cNvCxnSpPr>
+          <p:nvPr/>
+        </p:nvCxnSpPr>
+        <p:spPr>
+          <a:xfrm flipV="1">
+            <a:off x="2845926" y="1054935"/>
+            <a:ext cx="457528" cy="37808"/>
+          </a:xfrm>
+          <a:prstGeom prst="bentConnector3">
+            <a:avLst/>
+          </a:prstGeom>
+        </p:spPr>
+        <p:style>
+          <a:lnRef idx="2">
+            <a:schemeClr val="accent1"/>
+          </a:lnRef>
+          <a:fillRef idx="0">
+            <a:schemeClr val="accent1"/>
+          </a:fillRef>
+          <a:effectRef idx="1">
+            <a:schemeClr val="accent1"/>
+          </a:effectRef>
+          <a:fontRef idx="minor">
+            <a:schemeClr val="tx1"/>
+          </a:fontRef>
+        </p:style>
+      </p:cxnSp>
+      <p:cxnSp>
+        <p:nvCxnSpPr>
+          <p:cNvPr id="25" name="Conector: angular 24">
+            <a:extLst>
+              <a:ext uri="{FF2B5EF4-FFF2-40B4-BE49-F238E27FC236}">
+                <a16:creationId xmlns:a16="http://schemas.microsoft.com/office/drawing/2014/main" id="{5ABA0E99-47B7-9019-B3BA-B0659D78DECE}"/>
+              </a:ext>
+            </a:extLst>
+          </p:cNvPr>
+          <p:cNvCxnSpPr>
+            <a:cxnSpLocks/>
+            <a:stCxn id="18" idx="3"/>
+            <a:endCxn id="4" idx="1"/>
+          </p:cNvCxnSpPr>
+          <p:nvPr/>
+        </p:nvCxnSpPr>
+        <p:spPr>
+          <a:xfrm>
+            <a:off x="4623297" y="1054935"/>
+            <a:ext cx="515167" cy="107830"/>
+          </a:xfrm>
+          <a:prstGeom prst="bentConnector3">
+            <a:avLst>
+              <a:gd name="adj1" fmla="val 55547"/>
+            </a:avLst>
+          </a:prstGeom>
+        </p:spPr>
+        <p:style>
+          <a:lnRef idx="2">
+            <a:schemeClr val="accent1"/>
+          </a:lnRef>
+          <a:fillRef idx="0">
+            <a:schemeClr val="accent1"/>
+          </a:fillRef>
+          <a:effectRef idx="1">
+            <a:schemeClr val="accent1"/>
+          </a:effectRef>
+          <a:fontRef idx="minor">
+            <a:schemeClr val="tx1"/>
+          </a:fontRef>
+        </p:style>
+      </p:cxnSp>
+      <p:sp>
+        <p:nvSpPr>
+          <p:cNvPr id="28" name="CuadroTexto 27">
+            <a:extLst>
+              <a:ext uri="{FF2B5EF4-FFF2-40B4-BE49-F238E27FC236}">
+                <a16:creationId xmlns:a16="http://schemas.microsoft.com/office/drawing/2014/main" id="{B6D2B149-3AF1-FAD7-3744-9354065672B2}"/>
+              </a:ext>
+            </a:extLst>
+          </p:cNvPr>
+          <p:cNvSpPr txBox="1"/>
+          <p:nvPr/>
+        </p:nvSpPr>
+        <p:spPr>
+          <a:xfrm>
+            <a:off x="4602004" y="763161"/>
+            <a:ext cx="783568" cy="307777"/>
+          </a:xfrm>
+          <a:prstGeom prst="rect">
+            <a:avLst/>
+          </a:prstGeom>
+          <a:noFill/>
+        </p:spPr>
+        <p:txBody>
+          <a:bodyPr wrap="square" rtlCol="0">
+            <a:spAutoFit/>
+          </a:bodyPr>
+          <a:lstStyle/>
+          <a:p>
+            <a:r>
+              <a:rPr lang="es-ES" sz="1400" dirty="0"/>
+              <a:t>(1,1)</a:t>
+            </a:r>
+          </a:p>
+        </p:txBody>
+      </p:sp>
+      <p:sp>
+        <p:nvSpPr>
+          <p:cNvPr id="29" name="CuadroTexto 28">
+            <a:extLst>
+              <a:ext uri="{FF2B5EF4-FFF2-40B4-BE49-F238E27FC236}">
+                <a16:creationId xmlns:a16="http://schemas.microsoft.com/office/drawing/2014/main" id="{3E303BAC-0A09-9E63-D2DA-8336F3C0A05E}"/>
+              </a:ext>
+            </a:extLst>
+          </p:cNvPr>
+          <p:cNvSpPr txBox="1"/>
+          <p:nvPr/>
+        </p:nvSpPr>
+        <p:spPr>
+          <a:xfrm>
+            <a:off x="2839651" y="772809"/>
+            <a:ext cx="783568" cy="307777"/>
+          </a:xfrm>
+          <a:prstGeom prst="rect">
+            <a:avLst/>
+          </a:prstGeom>
+          <a:noFill/>
+        </p:spPr>
+        <p:txBody>
+          <a:bodyPr wrap="square" rtlCol="0">
+            <a:spAutoFit/>
+          </a:bodyPr>
+          <a:lstStyle/>
+          <a:p>
+            <a:r>
+              <a:rPr lang="es-ES" sz="1400" dirty="0"/>
+              <a:t>(1,n)</a:t>
+            </a:r>
+          </a:p>
+        </p:txBody>
+      </p:sp>
+      <p:sp>
+        <p:nvSpPr>
+          <p:cNvPr id="30" name="CuadroTexto 29">
+            <a:extLst>
+              <a:ext uri="{FF2B5EF4-FFF2-40B4-BE49-F238E27FC236}">
+                <a16:creationId xmlns:a16="http://schemas.microsoft.com/office/drawing/2014/main" id="{27CD9A24-5104-73AB-3E06-7DBEB8849AAB}"/>
+              </a:ext>
+            </a:extLst>
+          </p:cNvPr>
+          <p:cNvSpPr txBox="1"/>
+          <p:nvPr/>
+        </p:nvSpPr>
+        <p:spPr>
+          <a:xfrm>
+            <a:off x="3687049" y="433297"/>
+            <a:ext cx="783568" cy="307777"/>
+          </a:xfrm>
+          <a:prstGeom prst="rect">
+            <a:avLst/>
+          </a:prstGeom>
+          <a:noFill/>
+        </p:spPr>
+        <p:txBody>
+          <a:bodyPr wrap="square" rtlCol="0">
+            <a:spAutoFit/>
+          </a:bodyPr>
+          <a:lstStyle/>
+          <a:p>
+            <a:r>
+              <a:rPr lang="es-ES" sz="1400" b="1" dirty="0"/>
+              <a:t>(1,n)</a:t>
+            </a:r>
+          </a:p>
+        </p:txBody>
+      </p:sp>
+      <p:cxnSp>
+        <p:nvCxnSpPr>
+          <p:cNvPr id="31" name="Conector recto de flecha 30">
+            <a:extLst>
+              <a:ext uri="{FF2B5EF4-FFF2-40B4-BE49-F238E27FC236}">
+                <a16:creationId xmlns:a16="http://schemas.microsoft.com/office/drawing/2014/main" id="{1F549970-11AC-EE22-5B1B-F48AF07B9EBE}"/>
+              </a:ext>
+            </a:extLst>
+          </p:cNvPr>
+          <p:cNvCxnSpPr>
+            <a:cxnSpLocks/>
+          </p:cNvCxnSpPr>
+          <p:nvPr/>
+        </p:nvCxnSpPr>
+        <p:spPr>
+          <a:xfrm flipV="1">
+            <a:off x="2388509" y="639212"/>
+            <a:ext cx="0" cy="249256"/>
+          </a:xfrm>
+          <a:prstGeom prst="straightConnector1">
+            <a:avLst/>
+          </a:prstGeom>
+          <a:ln>
+            <a:tailEnd type="diamond"/>
+          </a:ln>
+        </p:spPr>
+        <p:style>
+          <a:lnRef idx="2">
+            <a:schemeClr val="accent1"/>
+          </a:lnRef>
+          <a:fillRef idx="0">
+            <a:schemeClr val="accent1"/>
+          </a:fillRef>
+          <a:effectRef idx="1">
+            <a:schemeClr val="accent1"/>
+          </a:effectRef>
+          <a:fontRef idx="minor">
+            <a:schemeClr val="tx1"/>
+          </a:fontRef>
+        </p:style>
+      </p:cxnSp>
+      <p:sp>
+        <p:nvSpPr>
+          <p:cNvPr id="32" name="CuadroTexto 31">
+            <a:extLst>
+              <a:ext uri="{FF2B5EF4-FFF2-40B4-BE49-F238E27FC236}">
+                <a16:creationId xmlns:a16="http://schemas.microsoft.com/office/drawing/2014/main" id="{23D4764C-362D-D997-5BC4-2CF858CE3F58}"/>
+              </a:ext>
+            </a:extLst>
+          </p:cNvPr>
+          <p:cNvSpPr txBox="1"/>
+          <p:nvPr/>
+        </p:nvSpPr>
+        <p:spPr>
+          <a:xfrm>
+            <a:off x="2017835" y="327355"/>
+            <a:ext cx="1105567" cy="261610"/>
+          </a:xfrm>
+          <a:prstGeom prst="rect">
+            <a:avLst/>
+          </a:prstGeom>
+          <a:noFill/>
+        </p:spPr>
+        <p:txBody>
+          <a:bodyPr wrap="square" rtlCol="0">
+            <a:spAutoFit/>
+          </a:bodyPr>
+          <a:lstStyle/>
+          <a:p>
+            <a:r>
+              <a:rPr lang="es-ES" sz="1100" dirty="0" err="1"/>
+              <a:t>ID_client</a:t>
+            </a:r>
+            <a:endParaRPr lang="es-ES" sz="1100" dirty="0"/>
+          </a:p>
+        </p:txBody>
+      </p:sp>
+      <p:sp>
+        <p:nvSpPr>
+          <p:cNvPr id="40" name="CuadroTexto 39">
+            <a:extLst>
+              <a:ext uri="{FF2B5EF4-FFF2-40B4-BE49-F238E27FC236}">
+                <a16:creationId xmlns:a16="http://schemas.microsoft.com/office/drawing/2014/main" id="{668458F4-3185-F340-2801-F1994068BB3E}"/>
+              </a:ext>
+            </a:extLst>
+          </p:cNvPr>
+          <p:cNvSpPr txBox="1"/>
+          <p:nvPr/>
+        </p:nvSpPr>
+        <p:spPr>
+          <a:xfrm>
+            <a:off x="6239625" y="3092221"/>
+            <a:ext cx="870861" cy="261610"/>
+          </a:xfrm>
+          <a:prstGeom prst="rect">
+            <a:avLst/>
+          </a:prstGeom>
+          <a:noFill/>
+        </p:spPr>
+        <p:txBody>
+          <a:bodyPr wrap="square" rtlCol="0">
+            <a:spAutoFit/>
+          </a:bodyPr>
+          <a:lstStyle/>
+          <a:p>
+            <a:r>
+              <a:rPr lang="es-ES" sz="1100" u="sng" dirty="0" err="1"/>
+              <a:t>ID_factura</a:t>
+            </a:r>
+            <a:endParaRPr lang="es-ES" sz="1100" u="sng" dirty="0"/>
+          </a:p>
+        </p:txBody>
+      </p:sp>
+      <p:cxnSp>
+        <p:nvCxnSpPr>
+          <p:cNvPr id="41" name="Conector recto de flecha 40">
+            <a:extLst>
+              <a:ext uri="{FF2B5EF4-FFF2-40B4-BE49-F238E27FC236}">
+                <a16:creationId xmlns:a16="http://schemas.microsoft.com/office/drawing/2014/main" id="{CECDF490-B373-C43C-E8E9-9212C325153D}"/>
+              </a:ext>
+            </a:extLst>
+          </p:cNvPr>
+          <p:cNvCxnSpPr>
+            <a:cxnSpLocks/>
+            <a:endCxn id="40" idx="1"/>
+          </p:cNvCxnSpPr>
+          <p:nvPr/>
+        </p:nvCxnSpPr>
+        <p:spPr>
+          <a:xfrm>
+            <a:off x="6120802" y="3029885"/>
+            <a:ext cx="118823" cy="193141"/>
+          </a:xfrm>
+          <a:prstGeom prst="straightConnector1">
+            <a:avLst/>
+          </a:prstGeom>
+          <a:ln>
+            <a:tailEnd type="oval"/>
+          </a:ln>
+        </p:spPr>
+        <p:style>
+          <a:lnRef idx="2">
+            <a:schemeClr val="accent1"/>
+          </a:lnRef>
+          <a:fillRef idx="0">
+            <a:schemeClr val="accent1"/>
+          </a:fillRef>
+          <a:effectRef idx="1">
+            <a:schemeClr val="accent1"/>
+          </a:effectRef>
+          <a:fontRef idx="minor">
+            <a:schemeClr val="tx1"/>
+          </a:fontRef>
+        </p:style>
+      </p:cxnSp>
+      <p:cxnSp>
+        <p:nvCxnSpPr>
+          <p:cNvPr id="43" name="Conector recto de flecha 42">
+            <a:extLst>
+              <a:ext uri="{FF2B5EF4-FFF2-40B4-BE49-F238E27FC236}">
+                <a16:creationId xmlns:a16="http://schemas.microsoft.com/office/drawing/2014/main" id="{D2E23C01-365D-32EE-54F2-49653ACFC219}"/>
+              </a:ext>
+            </a:extLst>
+          </p:cNvPr>
+          <p:cNvCxnSpPr>
+            <a:cxnSpLocks/>
+          </p:cNvCxnSpPr>
+          <p:nvPr/>
+        </p:nvCxnSpPr>
+        <p:spPr>
+          <a:xfrm flipV="1">
+            <a:off x="5339116" y="2489947"/>
+            <a:ext cx="0" cy="249256"/>
+          </a:xfrm>
+          <a:prstGeom prst="straightConnector1">
+            <a:avLst/>
+          </a:prstGeom>
+          <a:ln>
+            <a:tailEnd type="diamond"/>
+          </a:ln>
+        </p:spPr>
+        <p:style>
+          <a:lnRef idx="2">
+            <a:schemeClr val="accent1"/>
+          </a:lnRef>
+          <a:fillRef idx="0">
+            <a:schemeClr val="accent1"/>
+          </a:fillRef>
+          <a:effectRef idx="1">
+            <a:schemeClr val="accent1"/>
+          </a:effectRef>
+          <a:fontRef idx="minor">
+            <a:schemeClr val="tx1"/>
+          </a:fontRef>
+        </p:style>
+      </p:cxnSp>
+      <p:sp>
+        <p:nvSpPr>
+          <p:cNvPr id="44" name="CuadroTexto 43">
+            <a:extLst>
+              <a:ext uri="{FF2B5EF4-FFF2-40B4-BE49-F238E27FC236}">
+                <a16:creationId xmlns:a16="http://schemas.microsoft.com/office/drawing/2014/main" id="{04E7250D-7926-9CFE-8C2E-6CC1A0CAE5AE}"/>
+              </a:ext>
+            </a:extLst>
+          </p:cNvPr>
+          <p:cNvSpPr txBox="1"/>
+          <p:nvPr/>
+        </p:nvSpPr>
+        <p:spPr>
+          <a:xfrm rot="19193406">
+            <a:off x="5028113" y="2105488"/>
+            <a:ext cx="783568" cy="261610"/>
+          </a:xfrm>
+          <a:prstGeom prst="rect">
+            <a:avLst/>
+          </a:prstGeom>
+          <a:noFill/>
+        </p:spPr>
+        <p:txBody>
+          <a:bodyPr wrap="square" rtlCol="0">
+            <a:spAutoFit/>
+          </a:bodyPr>
+          <a:lstStyle/>
+          <a:p>
+            <a:r>
+              <a:rPr lang="es-ES" sz="1100" dirty="0"/>
+              <a:t>data</a:t>
+            </a:r>
+          </a:p>
+        </p:txBody>
+      </p:sp>
+      <p:sp>
+        <p:nvSpPr>
+          <p:cNvPr id="48" name="CuadroTexto 47">
+            <a:extLst>
+              <a:ext uri="{FF2B5EF4-FFF2-40B4-BE49-F238E27FC236}">
+                <a16:creationId xmlns:a16="http://schemas.microsoft.com/office/drawing/2014/main" id="{7559DF4E-BC3E-4D31-87ED-0B7C78AB9957}"/>
+              </a:ext>
+            </a:extLst>
+          </p:cNvPr>
+          <p:cNvSpPr txBox="1"/>
+          <p:nvPr/>
+        </p:nvSpPr>
+        <p:spPr>
+          <a:xfrm rot="19193406">
+            <a:off x="3956489" y="2746714"/>
+            <a:ext cx="868076" cy="261610"/>
+          </a:xfrm>
+          <a:prstGeom prst="rect">
+            <a:avLst/>
+          </a:prstGeom>
+          <a:noFill/>
+        </p:spPr>
+        <p:txBody>
+          <a:bodyPr wrap="square" rtlCol="0">
+            <a:spAutoFit/>
+          </a:bodyPr>
+          <a:lstStyle/>
+          <a:p>
+            <a:r>
+              <a:rPr lang="es-ES" sz="1100" dirty="0" err="1"/>
+              <a:t>descompte</a:t>
+            </a:r>
+            <a:endParaRPr lang="es-ES" sz="1100" dirty="0"/>
+          </a:p>
+        </p:txBody>
+      </p:sp>
+      <p:cxnSp>
+        <p:nvCxnSpPr>
+          <p:cNvPr id="49" name="Conector recto de flecha 48">
+            <a:extLst>
+              <a:ext uri="{FF2B5EF4-FFF2-40B4-BE49-F238E27FC236}">
+                <a16:creationId xmlns:a16="http://schemas.microsoft.com/office/drawing/2014/main" id="{18B24B13-B257-45E0-E534-97A457BBD90A}"/>
+              </a:ext>
+            </a:extLst>
+          </p:cNvPr>
+          <p:cNvCxnSpPr>
+            <a:cxnSpLocks/>
+          </p:cNvCxnSpPr>
+          <p:nvPr/>
+        </p:nvCxnSpPr>
+        <p:spPr>
+          <a:xfrm flipH="1">
+            <a:off x="7600169" y="3172299"/>
+            <a:ext cx="162083" cy="172807"/>
+          </a:xfrm>
+          <a:prstGeom prst="straightConnector1">
+            <a:avLst/>
+          </a:prstGeom>
+          <a:ln>
+            <a:tailEnd type="diamond"/>
+          </a:ln>
+        </p:spPr>
+        <p:style>
+          <a:lnRef idx="2">
+            <a:schemeClr val="accent1"/>
+          </a:lnRef>
+          <a:fillRef idx="0">
+            <a:schemeClr val="accent1"/>
+          </a:fillRef>
+          <a:effectRef idx="1">
+            <a:schemeClr val="accent1"/>
+          </a:effectRef>
+          <a:fontRef idx="minor">
+            <a:schemeClr val="tx1"/>
+          </a:fontRef>
+        </p:style>
+      </p:cxnSp>
+      <p:sp>
+        <p:nvSpPr>
+          <p:cNvPr id="50" name="CuadroTexto 49">
+            <a:extLst>
+              <a:ext uri="{FF2B5EF4-FFF2-40B4-BE49-F238E27FC236}">
+                <a16:creationId xmlns:a16="http://schemas.microsoft.com/office/drawing/2014/main" id="{D89E1E1D-D12B-8416-3FED-8DA8353A885D}"/>
+              </a:ext>
+            </a:extLst>
+          </p:cNvPr>
+          <p:cNvSpPr txBox="1"/>
+          <p:nvPr/>
+        </p:nvSpPr>
+        <p:spPr>
+          <a:xfrm rot="19193406">
+            <a:off x="7169023" y="3118587"/>
+            <a:ext cx="1105567" cy="261610"/>
+          </a:xfrm>
+          <a:prstGeom prst="rect">
+            <a:avLst/>
+          </a:prstGeom>
+          <a:noFill/>
+        </p:spPr>
+        <p:txBody>
+          <a:bodyPr wrap="square" rtlCol="0">
+            <a:spAutoFit/>
+          </a:bodyPr>
+          <a:lstStyle/>
+          <a:p>
+            <a:r>
+              <a:rPr lang="es-ES" sz="1100" dirty="0"/>
+              <a:t>IVA</a:t>
+            </a:r>
+          </a:p>
+        </p:txBody>
+      </p:sp>
+      <p:cxnSp>
+        <p:nvCxnSpPr>
+          <p:cNvPr id="51" name="Conector recto de flecha 50">
+            <a:extLst>
+              <a:ext uri="{FF2B5EF4-FFF2-40B4-BE49-F238E27FC236}">
+                <a16:creationId xmlns:a16="http://schemas.microsoft.com/office/drawing/2014/main" id="{0DDDC969-18D7-23D0-CBBF-FAFF5381C8F5}"/>
+              </a:ext>
+            </a:extLst>
+          </p:cNvPr>
+          <p:cNvCxnSpPr>
+            <a:cxnSpLocks/>
+          </p:cNvCxnSpPr>
+          <p:nvPr/>
+        </p:nvCxnSpPr>
+        <p:spPr>
+          <a:xfrm rot="10800000" flipV="1">
+            <a:off x="5163751" y="2930339"/>
+            <a:ext cx="0" cy="249256"/>
+          </a:xfrm>
+          <a:prstGeom prst="straightConnector1">
+            <a:avLst/>
+          </a:prstGeom>
+          <a:ln>
+            <a:tailEnd type="diamond"/>
+          </a:ln>
+        </p:spPr>
+        <p:style>
+          <a:lnRef idx="2">
+            <a:schemeClr val="accent1"/>
+          </a:lnRef>
+          <a:fillRef idx="0">
+            <a:schemeClr val="accent1"/>
+          </a:fillRef>
+          <a:effectRef idx="1">
+            <a:schemeClr val="accent1"/>
+          </a:effectRef>
+          <a:fontRef idx="minor">
+            <a:schemeClr val="tx1"/>
+          </a:fontRef>
+        </p:style>
+      </p:cxnSp>
+      <p:sp>
+        <p:nvSpPr>
+          <p:cNvPr id="52" name="CuadroTexto 51">
+            <a:extLst>
+              <a:ext uri="{FF2B5EF4-FFF2-40B4-BE49-F238E27FC236}">
+                <a16:creationId xmlns:a16="http://schemas.microsoft.com/office/drawing/2014/main" id="{DEC0C09B-F964-5D5B-A858-E21FDF448B8E}"/>
+              </a:ext>
+            </a:extLst>
+          </p:cNvPr>
+          <p:cNvSpPr txBox="1"/>
+          <p:nvPr/>
+        </p:nvSpPr>
+        <p:spPr>
+          <a:xfrm rot="19193406">
+            <a:off x="4280013" y="3370154"/>
+            <a:ext cx="1161942" cy="261610"/>
+          </a:xfrm>
+          <a:prstGeom prst="rect">
+            <a:avLst/>
+          </a:prstGeom>
+          <a:noFill/>
+        </p:spPr>
+        <p:txBody>
+          <a:bodyPr wrap="square" rtlCol="0">
+            <a:spAutoFit/>
+          </a:bodyPr>
+          <a:lstStyle/>
+          <a:p>
+            <a:r>
+              <a:rPr lang="es-ES" sz="1100" dirty="0" err="1"/>
+              <a:t>Preu_final_IVA</a:t>
+            </a:r>
+            <a:endParaRPr lang="es-ES" sz="1100" dirty="0"/>
+          </a:p>
+        </p:txBody>
+      </p:sp>
+      <p:cxnSp>
+        <p:nvCxnSpPr>
+          <p:cNvPr id="53" name="Conector recto de flecha 52">
+            <a:extLst>
+              <a:ext uri="{FF2B5EF4-FFF2-40B4-BE49-F238E27FC236}">
+                <a16:creationId xmlns:a16="http://schemas.microsoft.com/office/drawing/2014/main" id="{61BE4F4C-33C2-F1D6-686B-F7649E6D4B15}"/>
+              </a:ext>
+            </a:extLst>
+          </p:cNvPr>
+          <p:cNvCxnSpPr>
+            <a:cxnSpLocks/>
+            <a:stCxn id="5" idx="1"/>
+          </p:cNvCxnSpPr>
+          <p:nvPr/>
+        </p:nvCxnSpPr>
+        <p:spPr>
+          <a:xfrm flipH="1">
+            <a:off x="4740871" y="2862847"/>
+            <a:ext cx="182499" cy="0"/>
+          </a:xfrm>
+          <a:prstGeom prst="straightConnector1">
+            <a:avLst/>
+          </a:prstGeom>
+          <a:ln>
+            <a:tailEnd type="diamond"/>
+          </a:ln>
+        </p:spPr>
+        <p:style>
+          <a:lnRef idx="2">
+            <a:schemeClr val="accent1"/>
+          </a:lnRef>
+          <a:fillRef idx="0">
+            <a:schemeClr val="accent1"/>
+          </a:fillRef>
+          <a:effectRef idx="1">
+            <a:schemeClr val="accent1"/>
+          </a:effectRef>
+          <a:fontRef idx="minor">
+            <a:schemeClr val="tx1"/>
+          </a:fontRef>
+        </p:style>
+      </p:cxnSp>
+      <p:cxnSp>
+        <p:nvCxnSpPr>
+          <p:cNvPr id="59" name="Conector recto de flecha 58">
+            <a:extLst>
+              <a:ext uri="{FF2B5EF4-FFF2-40B4-BE49-F238E27FC236}">
+                <a16:creationId xmlns:a16="http://schemas.microsoft.com/office/drawing/2014/main" id="{4030B03C-8C97-ADC9-17AE-D02B3D43CE38}"/>
+              </a:ext>
+            </a:extLst>
+          </p:cNvPr>
+          <p:cNvCxnSpPr>
+            <a:cxnSpLocks/>
+          </p:cNvCxnSpPr>
+          <p:nvPr/>
+        </p:nvCxnSpPr>
+        <p:spPr>
+          <a:xfrm flipV="1">
+            <a:off x="8201177" y="2610024"/>
+            <a:ext cx="115708" cy="179255"/>
+          </a:xfrm>
+          <a:prstGeom prst="straightConnector1">
+            <a:avLst/>
+          </a:prstGeom>
+          <a:ln>
+            <a:tailEnd type="diamond"/>
+          </a:ln>
+        </p:spPr>
+        <p:style>
+          <a:lnRef idx="2">
+            <a:schemeClr val="accent1"/>
+          </a:lnRef>
+          <a:fillRef idx="0">
+            <a:schemeClr val="accent1"/>
+          </a:fillRef>
+          <a:effectRef idx="1">
+            <a:schemeClr val="accent1"/>
+          </a:effectRef>
+          <a:fontRef idx="minor">
+            <a:schemeClr val="tx1"/>
+          </a:fontRef>
+        </p:style>
+      </p:cxnSp>
+      <p:sp>
+        <p:nvSpPr>
+          <p:cNvPr id="62" name="CuadroTexto 61">
+            <a:extLst>
+              <a:ext uri="{FF2B5EF4-FFF2-40B4-BE49-F238E27FC236}">
+                <a16:creationId xmlns:a16="http://schemas.microsoft.com/office/drawing/2014/main" id="{74E09357-FAB6-646C-8C79-64E3051353E7}"/>
+              </a:ext>
+            </a:extLst>
+          </p:cNvPr>
+          <p:cNvSpPr txBox="1"/>
+          <p:nvPr/>
+        </p:nvSpPr>
+        <p:spPr>
+          <a:xfrm>
+            <a:off x="8211709" y="2332927"/>
+            <a:ext cx="868076" cy="261610"/>
+          </a:xfrm>
+          <a:prstGeom prst="rect">
+            <a:avLst/>
+          </a:prstGeom>
+          <a:noFill/>
+        </p:spPr>
+        <p:txBody>
+          <a:bodyPr wrap="square" rtlCol="0">
+            <a:spAutoFit/>
+          </a:bodyPr>
+          <a:lstStyle/>
+          <a:p>
+            <a:r>
+              <a:rPr lang="es-ES" sz="1100" dirty="0" err="1"/>
+              <a:t>quantitat</a:t>
+            </a:r>
+            <a:endParaRPr lang="es-ES" sz="1100" dirty="0"/>
+          </a:p>
+        </p:txBody>
+      </p:sp>
+      <p:cxnSp>
+        <p:nvCxnSpPr>
+          <p:cNvPr id="73" name="Conector: angular 72">
+            <a:extLst>
+              <a:ext uri="{FF2B5EF4-FFF2-40B4-BE49-F238E27FC236}">
+                <a16:creationId xmlns:a16="http://schemas.microsoft.com/office/drawing/2014/main" id="{BF714A0B-7B4C-ECF9-0E46-213D4D2BE808}"/>
+              </a:ext>
+            </a:extLst>
+          </p:cNvPr>
+          <p:cNvCxnSpPr>
+            <a:cxnSpLocks/>
+            <a:stCxn id="88" idx="3"/>
+            <a:endCxn id="15" idx="2"/>
+          </p:cNvCxnSpPr>
+          <p:nvPr/>
+        </p:nvCxnSpPr>
+        <p:spPr>
+          <a:xfrm flipV="1">
+            <a:off x="8926912" y="3265209"/>
+            <a:ext cx="970506" cy="1549142"/>
+          </a:xfrm>
+          <a:prstGeom prst="bentConnector2">
+            <a:avLst/>
+          </a:prstGeom>
+        </p:spPr>
+        <p:style>
+          <a:lnRef idx="2">
+            <a:schemeClr val="accent1"/>
+          </a:lnRef>
+          <a:fillRef idx="0">
+            <a:schemeClr val="accent1"/>
+          </a:fillRef>
+          <a:effectRef idx="1">
+            <a:schemeClr val="accent1"/>
+          </a:effectRef>
+          <a:fontRef idx="minor">
+            <a:schemeClr val="tx1"/>
+          </a:fontRef>
+        </p:style>
+      </p:cxnSp>
+      <p:cxnSp>
+        <p:nvCxnSpPr>
+          <p:cNvPr id="95" name="Conector recto 94">
+            <a:extLst>
+              <a:ext uri="{FF2B5EF4-FFF2-40B4-BE49-F238E27FC236}">
+                <a16:creationId xmlns:a16="http://schemas.microsoft.com/office/drawing/2014/main" id="{39D38588-1AFE-A6D0-96F0-8ABD40111F31}"/>
+              </a:ext>
+            </a:extLst>
+          </p:cNvPr>
+          <p:cNvCxnSpPr>
+            <a:cxnSpLocks/>
+            <a:stCxn id="5" idx="3"/>
+            <a:endCxn id="54" idx="1"/>
+          </p:cNvCxnSpPr>
+          <p:nvPr/>
+        </p:nvCxnSpPr>
+        <p:spPr>
+          <a:xfrm>
+            <a:off x="6333945" y="2862847"/>
+            <a:ext cx="897869" cy="91701"/>
+          </a:xfrm>
+          <a:prstGeom prst="line">
+            <a:avLst/>
+          </a:prstGeom>
+        </p:spPr>
+        <p:style>
+          <a:lnRef idx="2">
+            <a:schemeClr val="accent1"/>
+          </a:lnRef>
+          <a:fillRef idx="0">
+            <a:schemeClr val="accent1"/>
+          </a:fillRef>
+          <a:effectRef idx="1">
+            <a:schemeClr val="accent1"/>
+          </a:effectRef>
+          <a:fontRef idx="minor">
+            <a:schemeClr val="tx1"/>
+          </a:fontRef>
+        </p:style>
+      </p:cxnSp>
+      <p:sp>
+        <p:nvSpPr>
+          <p:cNvPr id="108" name="CuadroTexto 107">
+            <a:extLst>
+              <a:ext uri="{FF2B5EF4-FFF2-40B4-BE49-F238E27FC236}">
+                <a16:creationId xmlns:a16="http://schemas.microsoft.com/office/drawing/2014/main" id="{39C4871C-456B-0598-047E-3412E933AA23}"/>
+              </a:ext>
+            </a:extLst>
+          </p:cNvPr>
+          <p:cNvSpPr txBox="1"/>
+          <p:nvPr/>
+        </p:nvSpPr>
+        <p:spPr>
+          <a:xfrm>
+            <a:off x="2091926" y="1572771"/>
+            <a:ext cx="783568" cy="261610"/>
+          </a:xfrm>
+          <a:prstGeom prst="rect">
+            <a:avLst/>
+          </a:prstGeom>
+          <a:noFill/>
+        </p:spPr>
+        <p:txBody>
+          <a:bodyPr wrap="square" rtlCol="0">
+            <a:spAutoFit/>
+          </a:bodyPr>
+          <a:lstStyle/>
+          <a:p>
+            <a:r>
+              <a:rPr lang="es-ES" sz="1100" u="sng" dirty="0" err="1"/>
+              <a:t>Telèfon</a:t>
+            </a:r>
+            <a:endParaRPr lang="es-ES" sz="1100" u="sng" dirty="0"/>
+          </a:p>
+        </p:txBody>
+      </p:sp>
+      <p:cxnSp>
+        <p:nvCxnSpPr>
+          <p:cNvPr id="109" name="Conector recto de flecha 108">
+            <a:extLst>
+              <a:ext uri="{FF2B5EF4-FFF2-40B4-BE49-F238E27FC236}">
+                <a16:creationId xmlns:a16="http://schemas.microsoft.com/office/drawing/2014/main" id="{88E65217-DBC4-8455-628D-D3A4BF79C733}"/>
+              </a:ext>
+            </a:extLst>
+          </p:cNvPr>
+          <p:cNvCxnSpPr>
+            <a:cxnSpLocks/>
+          </p:cNvCxnSpPr>
+          <p:nvPr/>
+        </p:nvCxnSpPr>
+        <p:spPr>
+          <a:xfrm>
+            <a:off x="2404652" y="1316105"/>
+            <a:ext cx="0" cy="201114"/>
+          </a:xfrm>
+          <a:prstGeom prst="straightConnector1">
+            <a:avLst/>
+          </a:prstGeom>
+          <a:ln>
+            <a:tailEnd type="oval"/>
+          </a:ln>
+        </p:spPr>
+        <p:style>
+          <a:lnRef idx="2">
+            <a:schemeClr val="accent1"/>
+          </a:lnRef>
+          <a:fillRef idx="0">
+            <a:schemeClr val="accent1"/>
+          </a:fillRef>
+          <a:effectRef idx="1">
+            <a:schemeClr val="accent1"/>
+          </a:effectRef>
+          <a:fontRef idx="minor">
+            <a:schemeClr val="tx1"/>
+          </a:fontRef>
+        </p:style>
+      </p:cxnSp>
+      <p:cxnSp>
+        <p:nvCxnSpPr>
+          <p:cNvPr id="20" name="Conector recto de flecha 19">
+            <a:extLst>
+              <a:ext uri="{FF2B5EF4-FFF2-40B4-BE49-F238E27FC236}">
+                <a16:creationId xmlns:a16="http://schemas.microsoft.com/office/drawing/2014/main" id="{907FBA10-7F56-DB74-F420-B92F05B266CB}"/>
+              </a:ext>
+            </a:extLst>
+          </p:cNvPr>
+          <p:cNvCxnSpPr>
+            <a:cxnSpLocks/>
+          </p:cNvCxnSpPr>
+          <p:nvPr/>
+        </p:nvCxnSpPr>
+        <p:spPr>
+          <a:xfrm rot="10800000" flipV="1">
+            <a:off x="9475839" y="3194844"/>
+            <a:ext cx="0" cy="249256"/>
+          </a:xfrm>
+          <a:prstGeom prst="straightConnector1">
+            <a:avLst/>
+          </a:prstGeom>
+          <a:ln>
+            <a:tailEnd type="diamond"/>
+          </a:ln>
+        </p:spPr>
+        <p:style>
+          <a:lnRef idx="2">
+            <a:schemeClr val="accent1"/>
+          </a:lnRef>
+          <a:fillRef idx="0">
+            <a:schemeClr val="accent1"/>
+          </a:fillRef>
+          <a:effectRef idx="1">
+            <a:schemeClr val="accent1"/>
+          </a:effectRef>
+          <a:fontRef idx="minor">
+            <a:schemeClr val="tx1"/>
+          </a:fontRef>
+        </p:style>
+      </p:cxnSp>
+      <p:cxnSp>
+        <p:nvCxnSpPr>
+          <p:cNvPr id="26" name="Conector recto de flecha 25">
+            <a:extLst>
+              <a:ext uri="{FF2B5EF4-FFF2-40B4-BE49-F238E27FC236}">
+                <a16:creationId xmlns:a16="http://schemas.microsoft.com/office/drawing/2014/main" id="{8A31368B-4897-2EB3-99C7-3F5B309731A3}"/>
+              </a:ext>
+            </a:extLst>
+          </p:cNvPr>
+          <p:cNvCxnSpPr>
+            <a:cxnSpLocks/>
+          </p:cNvCxnSpPr>
+          <p:nvPr/>
+        </p:nvCxnSpPr>
+        <p:spPr>
+          <a:xfrm rot="10800000" flipV="1">
+            <a:off x="10499504" y="3191974"/>
+            <a:ext cx="0" cy="249256"/>
+          </a:xfrm>
+          <a:prstGeom prst="straightConnector1">
+            <a:avLst/>
+          </a:prstGeom>
+          <a:ln>
+            <a:tailEnd type="diamond"/>
+          </a:ln>
+        </p:spPr>
+        <p:style>
+          <a:lnRef idx="2">
+            <a:schemeClr val="accent1"/>
+          </a:lnRef>
+          <a:fillRef idx="0">
+            <a:schemeClr val="accent1"/>
+          </a:fillRef>
+          <a:effectRef idx="1">
+            <a:schemeClr val="accent1"/>
+          </a:effectRef>
+          <a:fontRef idx="minor">
+            <a:schemeClr val="tx1"/>
+          </a:fontRef>
+        </p:style>
+      </p:cxnSp>
+      <p:sp>
+        <p:nvSpPr>
+          <p:cNvPr id="27" name="CuadroTexto 26">
+            <a:extLst>
+              <a:ext uri="{FF2B5EF4-FFF2-40B4-BE49-F238E27FC236}">
+                <a16:creationId xmlns:a16="http://schemas.microsoft.com/office/drawing/2014/main" id="{8BB09D92-A99C-87CF-6A58-40C20722ED65}"/>
+              </a:ext>
+            </a:extLst>
+          </p:cNvPr>
+          <p:cNvSpPr txBox="1"/>
+          <p:nvPr/>
+        </p:nvSpPr>
+        <p:spPr>
+          <a:xfrm rot="19193406">
+            <a:off x="10030647" y="3487693"/>
+            <a:ext cx="934162" cy="261610"/>
+          </a:xfrm>
+          <a:prstGeom prst="rect">
+            <a:avLst/>
+          </a:prstGeom>
+          <a:noFill/>
+        </p:spPr>
+        <p:txBody>
+          <a:bodyPr wrap="square" rtlCol="0">
+            <a:spAutoFit/>
+          </a:bodyPr>
+          <a:lstStyle/>
+          <a:p>
+            <a:r>
+              <a:rPr lang="es-ES" sz="1100" dirty="0" err="1"/>
+              <a:t>Preu_actual</a:t>
+            </a:r>
+            <a:endParaRPr lang="es-ES" sz="1100" dirty="0"/>
+          </a:p>
+        </p:txBody>
+      </p:sp>
+      <p:cxnSp>
+        <p:nvCxnSpPr>
+          <p:cNvPr id="37" name="Conector recto de flecha 36">
+            <a:extLst>
+              <a:ext uri="{FF2B5EF4-FFF2-40B4-BE49-F238E27FC236}">
+                <a16:creationId xmlns:a16="http://schemas.microsoft.com/office/drawing/2014/main" id="{2DF2E6DB-BBF4-9D49-A0CD-CC17839C2ABF}"/>
+              </a:ext>
+            </a:extLst>
+          </p:cNvPr>
+          <p:cNvCxnSpPr>
+            <a:cxnSpLocks/>
+          </p:cNvCxnSpPr>
+          <p:nvPr/>
+        </p:nvCxnSpPr>
+        <p:spPr>
+          <a:xfrm flipV="1">
+            <a:off x="5997514" y="724453"/>
+            <a:ext cx="0" cy="249256"/>
+          </a:xfrm>
+          <a:prstGeom prst="straightConnector1">
+            <a:avLst/>
+          </a:prstGeom>
+          <a:ln>
+            <a:tailEnd type="diamond"/>
+          </a:ln>
+        </p:spPr>
+        <p:style>
+          <a:lnRef idx="2">
+            <a:schemeClr val="accent1"/>
+          </a:lnRef>
+          <a:fillRef idx="0">
+            <a:schemeClr val="accent1"/>
+          </a:fillRef>
+          <a:effectRef idx="1">
+            <a:schemeClr val="accent1"/>
+          </a:effectRef>
+          <a:fontRef idx="minor">
+            <a:schemeClr val="tx1"/>
+          </a:fontRef>
+        </p:style>
+      </p:cxnSp>
+      <p:sp>
+        <p:nvSpPr>
+          <p:cNvPr id="38" name="CuadroTexto 37">
+            <a:extLst>
+              <a:ext uri="{FF2B5EF4-FFF2-40B4-BE49-F238E27FC236}">
+                <a16:creationId xmlns:a16="http://schemas.microsoft.com/office/drawing/2014/main" id="{B7C30BD3-AEEF-FFDF-D6F9-DC047466DFF7}"/>
+              </a:ext>
+            </a:extLst>
+          </p:cNvPr>
+          <p:cNvSpPr txBox="1"/>
+          <p:nvPr/>
+        </p:nvSpPr>
+        <p:spPr>
+          <a:xfrm rot="19193406">
+            <a:off x="5744356" y="156684"/>
+            <a:ext cx="1105567" cy="261610"/>
+          </a:xfrm>
+          <a:prstGeom prst="rect">
+            <a:avLst/>
+          </a:prstGeom>
+          <a:noFill/>
+        </p:spPr>
+        <p:txBody>
+          <a:bodyPr wrap="square" rtlCol="0">
+            <a:spAutoFit/>
+          </a:bodyPr>
+          <a:lstStyle/>
+          <a:p>
+            <a:r>
+              <a:rPr lang="es-ES" sz="1100" dirty="0"/>
+              <a:t>numero</a:t>
+            </a:r>
+          </a:p>
+        </p:txBody>
+      </p:sp>
+      <p:cxnSp>
+        <p:nvCxnSpPr>
+          <p:cNvPr id="39" name="Conector recto de flecha 38">
+            <a:extLst>
+              <a:ext uri="{FF2B5EF4-FFF2-40B4-BE49-F238E27FC236}">
+                <a16:creationId xmlns:a16="http://schemas.microsoft.com/office/drawing/2014/main" id="{19249ED0-C2C3-FF23-C3F1-2DF1BE43C244}"/>
+              </a:ext>
+            </a:extLst>
+          </p:cNvPr>
+          <p:cNvCxnSpPr>
+            <a:cxnSpLocks/>
+          </p:cNvCxnSpPr>
+          <p:nvPr/>
+        </p:nvCxnSpPr>
+        <p:spPr>
+          <a:xfrm flipV="1">
+            <a:off x="6043160" y="763161"/>
+            <a:ext cx="196465" cy="276270"/>
+          </a:xfrm>
+          <a:prstGeom prst="straightConnector1">
+            <a:avLst/>
+          </a:prstGeom>
+          <a:ln>
+            <a:tailEnd type="diamond"/>
+          </a:ln>
+        </p:spPr>
+        <p:style>
+          <a:lnRef idx="2">
+            <a:schemeClr val="accent1"/>
+          </a:lnRef>
+          <a:fillRef idx="0">
+            <a:schemeClr val="accent1"/>
+          </a:fillRef>
+          <a:effectRef idx="1">
+            <a:schemeClr val="accent1"/>
+          </a:effectRef>
+          <a:fontRef idx="minor">
+            <a:schemeClr val="tx1"/>
+          </a:fontRef>
+        </p:style>
+      </p:cxnSp>
+      <p:sp>
+        <p:nvSpPr>
+          <p:cNvPr id="46" name="CuadroTexto 45">
+            <a:extLst>
+              <a:ext uri="{FF2B5EF4-FFF2-40B4-BE49-F238E27FC236}">
+                <a16:creationId xmlns:a16="http://schemas.microsoft.com/office/drawing/2014/main" id="{0C1097B3-AED7-FEED-AD6F-29C850CE1CEA}"/>
+              </a:ext>
+            </a:extLst>
+          </p:cNvPr>
+          <p:cNvSpPr txBox="1"/>
+          <p:nvPr/>
+        </p:nvSpPr>
+        <p:spPr>
+          <a:xfrm rot="19193406">
+            <a:off x="6094053" y="284414"/>
+            <a:ext cx="1105567" cy="261610"/>
+          </a:xfrm>
+          <a:prstGeom prst="rect">
+            <a:avLst/>
+          </a:prstGeom>
+          <a:noFill/>
+        </p:spPr>
+        <p:txBody>
+          <a:bodyPr wrap="square" rtlCol="0">
+            <a:spAutoFit/>
+          </a:bodyPr>
+          <a:lstStyle/>
+          <a:p>
+            <a:r>
+              <a:rPr lang="es-ES" sz="1100" dirty="0" err="1"/>
+              <a:t>ciutat</a:t>
+            </a:r>
+            <a:endParaRPr lang="es-ES" sz="1100" dirty="0"/>
+          </a:p>
+        </p:txBody>
+      </p:sp>
+      <p:cxnSp>
+        <p:nvCxnSpPr>
+          <p:cNvPr id="47" name="Conector recto de flecha 46">
+            <a:extLst>
+              <a:ext uri="{FF2B5EF4-FFF2-40B4-BE49-F238E27FC236}">
+                <a16:creationId xmlns:a16="http://schemas.microsoft.com/office/drawing/2014/main" id="{F97AC5DC-096C-1315-413E-BE025A299045}"/>
+              </a:ext>
+            </a:extLst>
+          </p:cNvPr>
+          <p:cNvCxnSpPr>
+            <a:cxnSpLocks/>
+          </p:cNvCxnSpPr>
+          <p:nvPr/>
+        </p:nvCxnSpPr>
+        <p:spPr>
+          <a:xfrm flipV="1">
+            <a:off x="6026993" y="915561"/>
+            <a:ext cx="365032" cy="116062"/>
+          </a:xfrm>
+          <a:prstGeom prst="straightConnector1">
+            <a:avLst/>
+          </a:prstGeom>
+          <a:ln>
+            <a:tailEnd type="diamond"/>
+          </a:ln>
+        </p:spPr>
+        <p:style>
+          <a:lnRef idx="2">
+            <a:schemeClr val="accent1"/>
+          </a:lnRef>
+          <a:fillRef idx="0">
+            <a:schemeClr val="accent1"/>
+          </a:fillRef>
+          <a:effectRef idx="1">
+            <a:schemeClr val="accent1"/>
+          </a:effectRef>
+          <a:fontRef idx="minor">
+            <a:schemeClr val="tx1"/>
+          </a:fontRef>
+        </p:style>
+      </p:cxnSp>
+      <p:sp>
+        <p:nvSpPr>
+          <p:cNvPr id="56" name="CuadroTexto 55">
+            <a:extLst>
+              <a:ext uri="{FF2B5EF4-FFF2-40B4-BE49-F238E27FC236}">
+                <a16:creationId xmlns:a16="http://schemas.microsoft.com/office/drawing/2014/main" id="{7BFE344C-CB0B-DDBD-B5F7-622D270E12BE}"/>
+              </a:ext>
+            </a:extLst>
+          </p:cNvPr>
+          <p:cNvSpPr txBox="1"/>
+          <p:nvPr/>
+        </p:nvSpPr>
+        <p:spPr>
+          <a:xfrm rot="19193406">
+            <a:off x="6246453" y="436814"/>
+            <a:ext cx="1105567" cy="261610"/>
+          </a:xfrm>
+          <a:prstGeom prst="rect">
+            <a:avLst/>
+          </a:prstGeom>
+          <a:noFill/>
+        </p:spPr>
+        <p:txBody>
+          <a:bodyPr wrap="square" rtlCol="0">
+            <a:spAutoFit/>
+          </a:bodyPr>
+          <a:lstStyle/>
+          <a:p>
+            <a:r>
+              <a:rPr lang="es-ES" sz="1100" dirty="0" err="1"/>
+              <a:t>codi_postal</a:t>
+            </a:r>
+            <a:endParaRPr lang="es-ES" sz="1100" dirty="0"/>
+          </a:p>
+        </p:txBody>
+      </p:sp>
+      <p:cxnSp>
+        <p:nvCxnSpPr>
+          <p:cNvPr id="57" name="Conector recto de flecha 56">
+            <a:extLst>
+              <a:ext uri="{FF2B5EF4-FFF2-40B4-BE49-F238E27FC236}">
+                <a16:creationId xmlns:a16="http://schemas.microsoft.com/office/drawing/2014/main" id="{7B0C637C-4548-38B2-01F5-02AE03BBFC97}"/>
+              </a:ext>
+            </a:extLst>
+          </p:cNvPr>
+          <p:cNvCxnSpPr>
+            <a:cxnSpLocks/>
+          </p:cNvCxnSpPr>
+          <p:nvPr/>
+        </p:nvCxnSpPr>
+        <p:spPr>
+          <a:xfrm rot="10800000" flipV="1">
+            <a:off x="10099816" y="3206358"/>
+            <a:ext cx="0" cy="249256"/>
+          </a:xfrm>
+          <a:prstGeom prst="straightConnector1">
+            <a:avLst/>
+          </a:prstGeom>
+          <a:ln>
+            <a:tailEnd type="diamond"/>
+          </a:ln>
+        </p:spPr>
+        <p:style>
+          <a:lnRef idx="2">
+            <a:schemeClr val="accent1"/>
+          </a:lnRef>
+          <a:fillRef idx="0">
+            <a:schemeClr val="accent1"/>
+          </a:fillRef>
+          <a:effectRef idx="1">
+            <a:schemeClr val="accent1"/>
+          </a:effectRef>
+          <a:fontRef idx="minor">
+            <a:schemeClr val="tx1"/>
+          </a:fontRef>
+        </p:style>
+      </p:cxnSp>
+      <p:sp>
+        <p:nvSpPr>
+          <p:cNvPr id="58" name="CuadroTexto 57">
+            <a:extLst>
+              <a:ext uri="{FF2B5EF4-FFF2-40B4-BE49-F238E27FC236}">
+                <a16:creationId xmlns:a16="http://schemas.microsoft.com/office/drawing/2014/main" id="{1D607AA6-8ECF-45B9-445A-246478FA3CF5}"/>
+              </a:ext>
+            </a:extLst>
+          </p:cNvPr>
+          <p:cNvSpPr txBox="1"/>
+          <p:nvPr/>
+        </p:nvSpPr>
+        <p:spPr>
+          <a:xfrm rot="19193406">
+            <a:off x="9760350" y="3355435"/>
+            <a:ext cx="934162" cy="261610"/>
+          </a:xfrm>
+          <a:prstGeom prst="rect">
+            <a:avLst/>
+          </a:prstGeom>
+          <a:noFill/>
+        </p:spPr>
+        <p:txBody>
+          <a:bodyPr wrap="square" rtlCol="0">
+            <a:spAutoFit/>
+          </a:bodyPr>
+          <a:lstStyle/>
+          <a:p>
+            <a:r>
+              <a:rPr lang="es-ES" sz="1100" dirty="0"/>
+              <a:t>stock</a:t>
+            </a:r>
+          </a:p>
+        </p:txBody>
+      </p:sp>
+      <p:cxnSp>
+        <p:nvCxnSpPr>
+          <p:cNvPr id="78" name="Conector recto de flecha 77">
+            <a:extLst>
+              <a:ext uri="{FF2B5EF4-FFF2-40B4-BE49-F238E27FC236}">
+                <a16:creationId xmlns:a16="http://schemas.microsoft.com/office/drawing/2014/main" id="{1ED109D2-2578-2021-BE1B-4DE8FE94CD16}"/>
+              </a:ext>
+            </a:extLst>
+          </p:cNvPr>
+          <p:cNvCxnSpPr>
+            <a:cxnSpLocks/>
+          </p:cNvCxnSpPr>
+          <p:nvPr/>
+        </p:nvCxnSpPr>
+        <p:spPr>
+          <a:xfrm flipV="1">
+            <a:off x="6016536" y="4229819"/>
+            <a:ext cx="0" cy="249256"/>
+          </a:xfrm>
+          <a:prstGeom prst="straightConnector1">
+            <a:avLst/>
+          </a:prstGeom>
+          <a:ln>
+            <a:tailEnd type="diamond"/>
+          </a:ln>
+        </p:spPr>
+        <p:style>
+          <a:lnRef idx="2">
+            <a:schemeClr val="accent1"/>
+          </a:lnRef>
+          <a:fillRef idx="0">
+            <a:schemeClr val="accent1"/>
+          </a:fillRef>
+          <a:effectRef idx="1">
+            <a:schemeClr val="accent1"/>
+          </a:effectRef>
+          <a:fontRef idx="minor">
+            <a:schemeClr val="tx1"/>
+          </a:fontRef>
+        </p:style>
+      </p:cxnSp>
+      <p:sp>
+        <p:nvSpPr>
+          <p:cNvPr id="79" name="CuadroTexto 78">
+            <a:extLst>
+              <a:ext uri="{FF2B5EF4-FFF2-40B4-BE49-F238E27FC236}">
+                <a16:creationId xmlns:a16="http://schemas.microsoft.com/office/drawing/2014/main" id="{08AAA8E1-66DD-535B-99FD-EF4314D277DC}"/>
+              </a:ext>
+            </a:extLst>
+          </p:cNvPr>
+          <p:cNvSpPr txBox="1"/>
+          <p:nvPr/>
+        </p:nvSpPr>
+        <p:spPr>
+          <a:xfrm rot="19193406">
+            <a:off x="5789257" y="3653428"/>
+            <a:ext cx="1105567" cy="261610"/>
+          </a:xfrm>
+          <a:prstGeom prst="rect">
+            <a:avLst/>
+          </a:prstGeom>
+          <a:noFill/>
+        </p:spPr>
+        <p:txBody>
+          <a:bodyPr wrap="square" rtlCol="0">
+            <a:spAutoFit/>
+          </a:bodyPr>
+          <a:lstStyle/>
+          <a:p>
+            <a:r>
+              <a:rPr lang="es-ES" sz="1100" dirty="0" err="1"/>
+              <a:t>carrer</a:t>
+            </a:r>
+            <a:endParaRPr lang="es-ES" sz="1100" dirty="0"/>
+          </a:p>
+        </p:txBody>
+      </p:sp>
+      <p:cxnSp>
+        <p:nvCxnSpPr>
+          <p:cNvPr id="80" name="Conector recto de flecha 79">
+            <a:extLst>
+              <a:ext uri="{FF2B5EF4-FFF2-40B4-BE49-F238E27FC236}">
+                <a16:creationId xmlns:a16="http://schemas.microsoft.com/office/drawing/2014/main" id="{0C864C6D-902C-241F-DD59-0FEDA7D376B5}"/>
+              </a:ext>
+            </a:extLst>
+          </p:cNvPr>
+          <p:cNvCxnSpPr>
+            <a:cxnSpLocks/>
+          </p:cNvCxnSpPr>
+          <p:nvPr/>
+        </p:nvCxnSpPr>
+        <p:spPr>
+          <a:xfrm flipV="1">
+            <a:off x="6281078" y="4235576"/>
+            <a:ext cx="0" cy="249256"/>
+          </a:xfrm>
+          <a:prstGeom prst="straightConnector1">
+            <a:avLst/>
+          </a:prstGeom>
+          <a:ln>
+            <a:tailEnd type="diamond"/>
+          </a:ln>
+        </p:spPr>
+        <p:style>
+          <a:lnRef idx="2">
+            <a:schemeClr val="accent1"/>
+          </a:lnRef>
+          <a:fillRef idx="0">
+            <a:schemeClr val="accent1"/>
+          </a:fillRef>
+          <a:effectRef idx="1">
+            <a:schemeClr val="accent1"/>
+          </a:effectRef>
+          <a:fontRef idx="minor">
+            <a:schemeClr val="tx1"/>
+          </a:fontRef>
+        </p:style>
+      </p:cxnSp>
+      <p:sp>
+        <p:nvSpPr>
+          <p:cNvPr id="81" name="CuadroTexto 80">
+            <a:extLst>
+              <a:ext uri="{FF2B5EF4-FFF2-40B4-BE49-F238E27FC236}">
+                <a16:creationId xmlns:a16="http://schemas.microsoft.com/office/drawing/2014/main" id="{82D8462F-7D45-B40A-3259-39566E1682A3}"/>
+              </a:ext>
+            </a:extLst>
+          </p:cNvPr>
+          <p:cNvSpPr txBox="1"/>
+          <p:nvPr/>
+        </p:nvSpPr>
+        <p:spPr>
+          <a:xfrm rot="19193406">
+            <a:off x="6027920" y="3667807"/>
+            <a:ext cx="1105567" cy="261610"/>
+          </a:xfrm>
+          <a:prstGeom prst="rect">
+            <a:avLst/>
+          </a:prstGeom>
+          <a:noFill/>
+        </p:spPr>
+        <p:txBody>
+          <a:bodyPr wrap="square" rtlCol="0">
+            <a:spAutoFit/>
+          </a:bodyPr>
+          <a:lstStyle/>
+          <a:p>
+            <a:r>
+              <a:rPr lang="es-ES" sz="1100" dirty="0"/>
+              <a:t>numero</a:t>
+            </a:r>
+          </a:p>
+        </p:txBody>
+      </p:sp>
+      <p:cxnSp>
+        <p:nvCxnSpPr>
+          <p:cNvPr id="83" name="Conector recto de flecha 82">
+            <a:extLst>
+              <a:ext uri="{FF2B5EF4-FFF2-40B4-BE49-F238E27FC236}">
+                <a16:creationId xmlns:a16="http://schemas.microsoft.com/office/drawing/2014/main" id="{C23FD98C-CA64-84FD-10A2-9BED6EC76D2E}"/>
+              </a:ext>
+            </a:extLst>
+          </p:cNvPr>
+          <p:cNvCxnSpPr>
+            <a:cxnSpLocks/>
+          </p:cNvCxnSpPr>
+          <p:nvPr/>
+        </p:nvCxnSpPr>
+        <p:spPr>
+          <a:xfrm flipV="1">
+            <a:off x="6326724" y="4274284"/>
+            <a:ext cx="196465" cy="276270"/>
+          </a:xfrm>
+          <a:prstGeom prst="straightConnector1">
+            <a:avLst/>
+          </a:prstGeom>
+          <a:ln>
+            <a:tailEnd type="diamond"/>
+          </a:ln>
+        </p:spPr>
+        <p:style>
+          <a:lnRef idx="2">
+            <a:schemeClr val="accent1"/>
+          </a:lnRef>
+          <a:fillRef idx="0">
+            <a:schemeClr val="accent1"/>
+          </a:fillRef>
+          <a:effectRef idx="1">
+            <a:schemeClr val="accent1"/>
+          </a:effectRef>
+          <a:fontRef idx="minor">
+            <a:schemeClr val="tx1"/>
+          </a:fontRef>
+        </p:style>
+      </p:cxnSp>
+      <p:sp>
+        <p:nvSpPr>
+          <p:cNvPr id="87" name="CuadroTexto 86">
+            <a:extLst>
+              <a:ext uri="{FF2B5EF4-FFF2-40B4-BE49-F238E27FC236}">
+                <a16:creationId xmlns:a16="http://schemas.microsoft.com/office/drawing/2014/main" id="{506701D7-556B-465A-D927-53C308EBEA91}"/>
+              </a:ext>
+            </a:extLst>
+          </p:cNvPr>
+          <p:cNvSpPr txBox="1"/>
+          <p:nvPr/>
+        </p:nvSpPr>
+        <p:spPr>
+          <a:xfrm rot="19193406">
+            <a:off x="6377617" y="3795537"/>
+            <a:ext cx="1105567" cy="261610"/>
+          </a:xfrm>
+          <a:prstGeom prst="rect">
+            <a:avLst/>
+          </a:prstGeom>
+          <a:noFill/>
+        </p:spPr>
+        <p:txBody>
+          <a:bodyPr wrap="square" rtlCol="0">
+            <a:spAutoFit/>
+          </a:bodyPr>
+          <a:lstStyle/>
+          <a:p>
+            <a:r>
+              <a:rPr lang="es-ES" sz="1100" dirty="0" err="1"/>
+              <a:t>ciutat</a:t>
+            </a:r>
+            <a:endParaRPr lang="es-ES" sz="1100" dirty="0"/>
+          </a:p>
+        </p:txBody>
+      </p:sp>
+      <p:cxnSp>
+        <p:nvCxnSpPr>
+          <p:cNvPr id="92" name="Conector recto de flecha 91">
+            <a:extLst>
+              <a:ext uri="{FF2B5EF4-FFF2-40B4-BE49-F238E27FC236}">
+                <a16:creationId xmlns:a16="http://schemas.microsoft.com/office/drawing/2014/main" id="{66CD2CD2-8715-8265-8054-F9147D2062DD}"/>
+              </a:ext>
+            </a:extLst>
+          </p:cNvPr>
+          <p:cNvCxnSpPr>
+            <a:cxnSpLocks/>
+          </p:cNvCxnSpPr>
+          <p:nvPr/>
+        </p:nvCxnSpPr>
+        <p:spPr>
+          <a:xfrm flipV="1">
+            <a:off x="6310557" y="4426684"/>
+            <a:ext cx="365032" cy="116062"/>
+          </a:xfrm>
+          <a:prstGeom prst="straightConnector1">
+            <a:avLst/>
+          </a:prstGeom>
+          <a:ln>
+            <a:tailEnd type="diamond"/>
+          </a:ln>
+        </p:spPr>
+        <p:style>
+          <a:lnRef idx="2">
+            <a:schemeClr val="accent1"/>
+          </a:lnRef>
+          <a:fillRef idx="0">
+            <a:schemeClr val="accent1"/>
+          </a:fillRef>
+          <a:effectRef idx="1">
+            <a:schemeClr val="accent1"/>
+          </a:effectRef>
+          <a:fontRef idx="minor">
+            <a:schemeClr val="tx1"/>
+          </a:fontRef>
+        </p:style>
+      </p:cxnSp>
+      <p:sp>
+        <p:nvSpPr>
+          <p:cNvPr id="93" name="CuadroTexto 92">
+            <a:extLst>
+              <a:ext uri="{FF2B5EF4-FFF2-40B4-BE49-F238E27FC236}">
+                <a16:creationId xmlns:a16="http://schemas.microsoft.com/office/drawing/2014/main" id="{9142025A-EDD6-696A-CD55-C8883E6E92D6}"/>
+              </a:ext>
+            </a:extLst>
+          </p:cNvPr>
+          <p:cNvSpPr txBox="1"/>
+          <p:nvPr/>
+        </p:nvSpPr>
+        <p:spPr>
+          <a:xfrm rot="19193406">
+            <a:off x="6530017" y="3947937"/>
+            <a:ext cx="1105567" cy="261610"/>
+          </a:xfrm>
+          <a:prstGeom prst="rect">
+            <a:avLst/>
+          </a:prstGeom>
+          <a:noFill/>
+        </p:spPr>
+        <p:txBody>
+          <a:bodyPr wrap="square" rtlCol="0">
+            <a:spAutoFit/>
+          </a:bodyPr>
+          <a:lstStyle/>
+          <a:p>
+            <a:r>
+              <a:rPr lang="es-ES" sz="1100" dirty="0" err="1"/>
+              <a:t>codi_postal</a:t>
+            </a:r>
+            <a:endParaRPr lang="es-ES" sz="1100" dirty="0"/>
+          </a:p>
+        </p:txBody>
+      </p:sp>
+      <p:sp>
+        <p:nvSpPr>
+          <p:cNvPr id="94" name="CuadroTexto 93">
+            <a:extLst>
+              <a:ext uri="{FF2B5EF4-FFF2-40B4-BE49-F238E27FC236}">
+                <a16:creationId xmlns:a16="http://schemas.microsoft.com/office/drawing/2014/main" id="{A29183BE-DAB6-7EF0-EBD9-8F51E488B0E1}"/>
+              </a:ext>
+            </a:extLst>
+          </p:cNvPr>
+          <p:cNvSpPr txBox="1"/>
+          <p:nvPr/>
+        </p:nvSpPr>
+        <p:spPr>
+          <a:xfrm>
+            <a:off x="224285" y="155275"/>
+            <a:ext cx="1923691" cy="369332"/>
+          </a:xfrm>
+          <a:prstGeom prst="rect">
+            <a:avLst/>
+          </a:prstGeom>
+          <a:noFill/>
+        </p:spPr>
+        <p:txBody>
+          <a:bodyPr wrap="square" rtlCol="0">
+            <a:spAutoFit/>
+          </a:bodyPr>
+          <a:lstStyle/>
+          <a:p>
+            <a:r>
+              <a:rPr lang="es-ES" dirty="0"/>
+              <a:t>CORREGIT</a:t>
+            </a:r>
+          </a:p>
+        </p:txBody>
+      </p:sp>
+    </p:spTree>
+    <p:extLst>
+      <p:ext uri="{BB962C8B-B14F-4D97-AF65-F5344CB8AC3E}">
+        <p14:creationId xmlns:p14="http://schemas.microsoft.com/office/powerpoint/2010/main" val="2076591438"/>
+      </p:ext>
+    </p:extLst>
+  </p:cSld>
+  <p:clrMapOvr>
+    <a:masterClrMapping/>
+  </p:clrMapOvr>
+</p:sld>
+</file>
+
+<file path=ppt/slides/slide7.xml><?xml version="1.0" encoding="utf-8"?>
+<p:sld xmlns:a="http://schemas.openxmlformats.org/drawingml/2006/main" xmlns:r="http://schemas.openxmlformats.org/officeDocument/2006/relationships" xmlns:p="http://schemas.openxmlformats.org/presentationml/2006/main">
+  <p:cSld>
+    <p:spTree>
+      <p:nvGrpSpPr>
+        <p:cNvPr id="1" name=""/>
+        <p:cNvGrpSpPr/>
+        <p:nvPr/>
+      </p:nvGrpSpPr>
+      <p:grpSpPr>
+        <a:xfrm>
+          <a:off x="0" y="0"/>
+          <a:ext cx="0" cy="0"/>
+          <a:chOff x="0" y="0"/>
+          <a:chExt cx="0" cy="0"/>
+        </a:xfrm>
+      </p:grpSpPr>
+      <p:sp>
+        <p:nvSpPr>
+          <p:cNvPr id="2" name="CuadroTexto 1">
+            <a:extLst>
+              <a:ext uri="{FF2B5EF4-FFF2-40B4-BE49-F238E27FC236}">
+                <a16:creationId xmlns:a16="http://schemas.microsoft.com/office/drawing/2014/main" id="{1617A7AC-BADD-A42D-FB81-FD6FAC35B1D2}"/>
+              </a:ext>
+            </a:extLst>
+          </p:cNvPr>
+          <p:cNvSpPr txBox="1"/>
+          <p:nvPr/>
+        </p:nvSpPr>
+        <p:spPr>
+          <a:xfrm>
+            <a:off x="612474" y="923026"/>
+            <a:ext cx="5315359" cy="6186309"/>
+          </a:xfrm>
+          <a:prstGeom prst="rect">
+            <a:avLst/>
+          </a:prstGeom>
+          <a:noFill/>
+        </p:spPr>
+        <p:txBody>
+          <a:bodyPr wrap="square" rtlCol="0">
+            <a:spAutoFit/>
+          </a:bodyPr>
+          <a:lstStyle/>
+          <a:p>
+            <a:r>
+              <a:rPr lang="es-ES" dirty="0">
+                <a:solidFill>
+                  <a:srgbClr val="FF0000"/>
+                </a:solidFill>
+              </a:rPr>
+              <a:t>CLIENT</a:t>
+            </a:r>
+            <a:r>
+              <a:rPr lang="es-ES" dirty="0"/>
+              <a:t> (</a:t>
+            </a:r>
+            <a:r>
+              <a:rPr lang="es-ES" u="sng" dirty="0" err="1"/>
+              <a:t>ID_client</a:t>
+            </a:r>
+            <a:r>
+              <a:rPr lang="es-ES" dirty="0"/>
+              <a:t>, CIF_NIF, </a:t>
+            </a:r>
+            <a:r>
+              <a:rPr lang="es-ES" dirty="0" err="1"/>
+              <a:t>nom</a:t>
+            </a:r>
+            <a:r>
+              <a:rPr lang="es-ES" dirty="0"/>
+              <a:t>, </a:t>
+            </a:r>
+            <a:r>
+              <a:rPr lang="es-ES" dirty="0" err="1"/>
+              <a:t>carrer</a:t>
+            </a:r>
+            <a:r>
+              <a:rPr lang="es-ES" dirty="0"/>
+              <a:t>, </a:t>
+            </a:r>
+            <a:r>
+              <a:rPr lang="es-ES" dirty="0" err="1"/>
+              <a:t>num</a:t>
+            </a:r>
+            <a:r>
+              <a:rPr lang="es-ES" dirty="0"/>
+              <a:t>, </a:t>
+            </a:r>
+            <a:r>
+              <a:rPr lang="es-ES" dirty="0" err="1"/>
+              <a:t>ciutat</a:t>
+            </a:r>
+            <a:r>
+              <a:rPr lang="es-ES" dirty="0"/>
+              <a:t>, </a:t>
+            </a:r>
+            <a:r>
+              <a:rPr lang="es-ES" dirty="0" err="1"/>
+              <a:t>codi_postal</a:t>
+            </a:r>
+            <a:r>
+              <a:rPr lang="es-ES" dirty="0"/>
+              <a:t>)</a:t>
+            </a:r>
+            <a:br>
+              <a:rPr lang="es-ES" dirty="0"/>
+            </a:br>
+            <a:r>
+              <a:rPr lang="es-ES" dirty="0">
+                <a:solidFill>
+                  <a:srgbClr val="FF0000"/>
+                </a:solidFill>
+              </a:rPr>
+              <a:t>TELÈFONS_CLIENTS</a:t>
+            </a:r>
+            <a:r>
+              <a:rPr lang="es-ES" dirty="0"/>
+              <a:t> (</a:t>
+            </a:r>
+            <a:r>
+              <a:rPr lang="es-ES" u="sng" dirty="0" err="1"/>
+              <a:t>Telèfon</a:t>
+            </a:r>
+            <a:r>
+              <a:rPr lang="es-ES" u="sng" dirty="0"/>
+              <a:t>,</a:t>
+            </a:r>
+            <a:r>
+              <a:rPr lang="es-ES" dirty="0"/>
+              <a:t> </a:t>
+            </a:r>
+            <a:r>
+              <a:rPr lang="es-ES" dirty="0" err="1"/>
+              <a:t>ID_client</a:t>
+            </a:r>
+            <a:r>
+              <a:rPr lang="es-ES" dirty="0"/>
+              <a:t>)</a:t>
+            </a:r>
+            <a:br>
+              <a:rPr lang="es-ES" dirty="0"/>
+            </a:br>
+            <a:r>
+              <a:rPr lang="es-ES" dirty="0" err="1"/>
+              <a:t>On</a:t>
+            </a:r>
+            <a:endParaRPr lang="es-ES" dirty="0"/>
+          </a:p>
+          <a:p>
+            <a:r>
+              <a:rPr lang="es-ES" dirty="0"/>
+              <a:t>{</a:t>
+            </a:r>
+            <a:r>
+              <a:rPr lang="es-ES" dirty="0" err="1"/>
+              <a:t>ID_client</a:t>
+            </a:r>
+            <a:r>
+              <a:rPr lang="es-ES" dirty="0"/>
+              <a:t>} referencia CLIENT</a:t>
+            </a:r>
+            <a:br>
+              <a:rPr lang="es-ES" dirty="0"/>
+            </a:br>
+            <a:r>
+              <a:rPr lang="es-ES" dirty="0">
+                <a:solidFill>
+                  <a:srgbClr val="FF0000"/>
+                </a:solidFill>
+              </a:rPr>
+              <a:t>FACTURA </a:t>
+            </a:r>
+            <a:r>
+              <a:rPr lang="es-ES" dirty="0"/>
+              <a:t>(</a:t>
+            </a:r>
+            <a:r>
+              <a:rPr lang="es-ES" u="sng" dirty="0" err="1"/>
+              <a:t>ID_factura</a:t>
+            </a:r>
+            <a:r>
+              <a:rPr lang="es-ES" dirty="0"/>
+              <a:t>, data, </a:t>
+            </a:r>
+            <a:r>
+              <a:rPr lang="es-ES" dirty="0" err="1"/>
+              <a:t>ID_client</a:t>
+            </a:r>
+            <a:r>
+              <a:rPr lang="es-ES" dirty="0"/>
+              <a:t>,  </a:t>
+            </a:r>
+            <a:r>
+              <a:rPr lang="es-ES" dirty="0" err="1"/>
+              <a:t>descompte</a:t>
+            </a:r>
+            <a:r>
+              <a:rPr lang="es-ES" dirty="0"/>
+              <a:t>, </a:t>
+            </a:r>
+            <a:r>
+              <a:rPr lang="es-ES" dirty="0" err="1"/>
+              <a:t>preu_final_IVA</a:t>
+            </a:r>
+            <a:r>
+              <a:rPr lang="es-ES" dirty="0"/>
+              <a:t>)</a:t>
+            </a:r>
+          </a:p>
+          <a:p>
+            <a:r>
+              <a:rPr lang="es-ES" dirty="0" err="1"/>
+              <a:t>On</a:t>
+            </a:r>
+            <a:endParaRPr lang="es-ES" dirty="0"/>
+          </a:p>
+          <a:p>
+            <a:r>
+              <a:rPr lang="es-ES" u="sng" dirty="0"/>
+              <a:t>{ID_CLIENT} referencia CLIENT</a:t>
+            </a:r>
+          </a:p>
+          <a:p>
+            <a:r>
+              <a:rPr lang="es-ES" dirty="0">
+                <a:solidFill>
+                  <a:srgbClr val="FF0000"/>
+                </a:solidFill>
+              </a:rPr>
+              <a:t>PRODUCTE </a:t>
+            </a:r>
+            <a:r>
+              <a:rPr lang="es-ES" dirty="0"/>
+              <a:t>(</a:t>
+            </a:r>
+            <a:r>
+              <a:rPr lang="es-ES" u="sng" dirty="0" err="1"/>
+              <a:t>ID_prod</a:t>
+            </a:r>
+            <a:r>
+              <a:rPr lang="es-ES" dirty="0"/>
+              <a:t>, </a:t>
+            </a:r>
+            <a:r>
+              <a:rPr lang="es-ES" dirty="0" err="1"/>
+              <a:t>ID_cat</a:t>
+            </a:r>
+            <a:r>
+              <a:rPr lang="es-ES" dirty="0"/>
+              <a:t>, </a:t>
+            </a:r>
+            <a:r>
+              <a:rPr lang="es-ES" dirty="0" err="1"/>
+              <a:t>ID_prov</a:t>
+            </a:r>
+            <a:r>
+              <a:rPr lang="es-ES" dirty="0"/>
+              <a:t>, </a:t>
+            </a:r>
+            <a:r>
+              <a:rPr lang="es-ES" dirty="0" err="1"/>
+              <a:t>nom</a:t>
+            </a:r>
+            <a:r>
+              <a:rPr lang="es-ES" dirty="0"/>
+              <a:t>, </a:t>
+            </a:r>
+            <a:r>
+              <a:rPr lang="es-ES" dirty="0" err="1"/>
+              <a:t>preu_actual</a:t>
+            </a:r>
+            <a:r>
+              <a:rPr lang="es-ES" dirty="0"/>
+              <a:t>, stock)</a:t>
+            </a:r>
+            <a:br>
+              <a:rPr lang="es-ES" dirty="0"/>
+            </a:br>
+            <a:r>
+              <a:rPr lang="es-ES" dirty="0" err="1"/>
+              <a:t>On</a:t>
+            </a:r>
+            <a:br>
+              <a:rPr lang="es-ES" dirty="0"/>
+            </a:br>
+            <a:r>
+              <a:rPr lang="es-ES" dirty="0"/>
+              <a:t>{</a:t>
+            </a:r>
+            <a:r>
+              <a:rPr lang="es-ES" dirty="0" err="1"/>
+              <a:t>ID_cat</a:t>
+            </a:r>
+            <a:r>
+              <a:rPr lang="es-ES" dirty="0"/>
+              <a:t>} referencia CATEGORIA</a:t>
+            </a:r>
+            <a:br>
+              <a:rPr lang="es-ES" dirty="0"/>
+            </a:br>
+            <a:r>
+              <a:rPr lang="es-ES" dirty="0"/>
+              <a:t>{</a:t>
+            </a:r>
+            <a:r>
+              <a:rPr lang="es-ES" dirty="0" err="1"/>
+              <a:t>ID_prov</a:t>
+            </a:r>
+            <a:r>
+              <a:rPr lang="es-ES" dirty="0"/>
+              <a:t>} referencia PROVEÏDOR</a:t>
+            </a:r>
+          </a:p>
+          <a:p>
+            <a:r>
+              <a:rPr lang="es-ES" dirty="0">
+                <a:solidFill>
+                  <a:srgbClr val="FF0000"/>
+                </a:solidFill>
+              </a:rPr>
+              <a:t>FACTURA_PRODUCTE </a:t>
+            </a:r>
+            <a:r>
+              <a:rPr lang="es-ES" dirty="0"/>
+              <a:t>(</a:t>
+            </a:r>
+            <a:r>
+              <a:rPr lang="es-ES" u="sng" dirty="0" err="1"/>
+              <a:t>ID_factura+ID_prod</a:t>
+            </a:r>
+            <a:r>
+              <a:rPr lang="es-ES" dirty="0"/>
+              <a:t>, </a:t>
+            </a:r>
+            <a:r>
+              <a:rPr lang="es-ES" dirty="0" err="1"/>
+              <a:t>quantitat</a:t>
+            </a:r>
+            <a:r>
+              <a:rPr lang="es-ES" dirty="0"/>
+              <a:t>, IVA, </a:t>
+            </a:r>
+            <a:r>
+              <a:rPr lang="es-ES" dirty="0" err="1"/>
+              <a:t>preu_venta</a:t>
+            </a:r>
+            <a:endParaRPr lang="es-ES" dirty="0"/>
+          </a:p>
+          <a:p>
+            <a:r>
+              <a:rPr lang="es-ES" dirty="0" err="1"/>
+              <a:t>On</a:t>
+            </a:r>
+            <a:br>
+              <a:rPr lang="es-ES" dirty="0"/>
+            </a:br>
+            <a:r>
+              <a:rPr lang="es-ES" dirty="0"/>
+              <a:t>{</a:t>
+            </a:r>
+            <a:r>
+              <a:rPr lang="es-ES" dirty="0" err="1"/>
+              <a:t>ID_factura</a:t>
+            </a:r>
+            <a:r>
+              <a:rPr lang="es-ES" dirty="0"/>
+              <a:t>} referencia FACTURA</a:t>
+            </a:r>
+            <a:br>
+              <a:rPr lang="es-ES" dirty="0"/>
+            </a:br>
+            <a:r>
+              <a:rPr lang="es-ES" dirty="0"/>
+              <a:t>{ID_ </a:t>
+            </a:r>
+            <a:r>
+              <a:rPr lang="es-ES" dirty="0" err="1"/>
+              <a:t>prod</a:t>
+            </a:r>
+            <a:r>
+              <a:rPr lang="es-ES" dirty="0"/>
+              <a:t>} referencia PRODUCTE</a:t>
+            </a:r>
+          </a:p>
+          <a:p>
+            <a:r>
+              <a:rPr lang="es-ES" dirty="0">
+                <a:solidFill>
+                  <a:srgbClr val="FF0000"/>
+                </a:solidFill>
+              </a:rPr>
+              <a:t>CATEGORIA </a:t>
+            </a:r>
+            <a:r>
+              <a:rPr lang="es-ES" dirty="0"/>
+              <a:t>(</a:t>
+            </a:r>
+            <a:r>
+              <a:rPr lang="es-ES" u="sng" dirty="0" err="1"/>
+              <a:t>ID_cat</a:t>
+            </a:r>
+            <a:r>
+              <a:rPr lang="es-ES" dirty="0"/>
+              <a:t>, descripción, </a:t>
+            </a:r>
+            <a:r>
+              <a:rPr lang="es-ES" dirty="0" err="1"/>
+              <a:t>nom</a:t>
+            </a:r>
+            <a:r>
+              <a:rPr lang="es-ES" dirty="0"/>
+              <a:t>)</a:t>
+            </a:r>
+          </a:p>
+          <a:p>
+            <a:endParaRPr lang="es-ES" dirty="0"/>
+          </a:p>
+          <a:p>
+            <a:endParaRPr lang="es-ES" dirty="0">
+              <a:solidFill>
+                <a:srgbClr val="FF0000"/>
+              </a:solidFill>
+            </a:endParaRPr>
+          </a:p>
+        </p:txBody>
+      </p:sp>
+      <p:sp>
+        <p:nvSpPr>
+          <p:cNvPr id="4" name="CuadroTexto 3">
+            <a:extLst>
+              <a:ext uri="{FF2B5EF4-FFF2-40B4-BE49-F238E27FC236}">
+                <a16:creationId xmlns:a16="http://schemas.microsoft.com/office/drawing/2014/main" id="{B0CF9178-2770-A833-FDFB-0A2D022FB051}"/>
+              </a:ext>
+            </a:extLst>
+          </p:cNvPr>
+          <p:cNvSpPr txBox="1"/>
+          <p:nvPr/>
+        </p:nvSpPr>
+        <p:spPr>
+          <a:xfrm>
+            <a:off x="6672190" y="930286"/>
+            <a:ext cx="5315360" cy="923330"/>
+          </a:xfrm>
+          <a:prstGeom prst="rect">
+            <a:avLst/>
+          </a:prstGeom>
+          <a:noFill/>
+        </p:spPr>
+        <p:txBody>
+          <a:bodyPr wrap="square" rtlCol="0">
+            <a:spAutoFit/>
+          </a:bodyPr>
+          <a:lstStyle/>
+          <a:p>
+            <a:r>
+              <a:rPr lang="es-ES" dirty="0">
+                <a:solidFill>
+                  <a:srgbClr val="FF0000"/>
+                </a:solidFill>
+              </a:rPr>
+              <a:t>PROVEÏDOR </a:t>
+            </a:r>
+            <a:r>
+              <a:rPr lang="es-ES" dirty="0"/>
+              <a:t>(</a:t>
+            </a:r>
+            <a:r>
+              <a:rPr lang="es-ES" u="sng" dirty="0" err="1"/>
+              <a:t>ID_prov</a:t>
+            </a:r>
+            <a:r>
+              <a:rPr lang="es-ES" dirty="0"/>
+              <a:t>, CIF_NIF, </a:t>
+            </a:r>
+            <a:r>
+              <a:rPr lang="es-ES" dirty="0" err="1"/>
+              <a:t>nom</a:t>
+            </a:r>
+            <a:r>
+              <a:rPr lang="es-ES" dirty="0"/>
+              <a:t>, </a:t>
+            </a:r>
+            <a:r>
+              <a:rPr lang="es-ES" dirty="0" err="1"/>
+              <a:t>carrer</a:t>
+            </a:r>
+            <a:r>
+              <a:rPr lang="es-ES" dirty="0"/>
+              <a:t>, numero, </a:t>
+            </a:r>
+            <a:r>
+              <a:rPr lang="es-ES" dirty="0" err="1"/>
+              <a:t>ciutat</a:t>
+            </a:r>
+            <a:r>
+              <a:rPr lang="es-ES" dirty="0"/>
+              <a:t>, </a:t>
+            </a:r>
+            <a:r>
+              <a:rPr lang="es-ES" dirty="0" err="1"/>
+              <a:t>codi_postal</a:t>
+            </a:r>
+            <a:r>
+              <a:rPr lang="es-ES" dirty="0"/>
+              <a:t>, </a:t>
+            </a:r>
+            <a:r>
+              <a:rPr lang="es-ES" dirty="0" err="1"/>
+              <a:t>telefon</a:t>
+            </a:r>
+            <a:r>
+              <a:rPr lang="es-ES" dirty="0"/>
+              <a:t>, web</a:t>
+            </a:r>
+            <a:r>
+              <a:rPr lang="es-ES" u="sng" dirty="0"/>
+              <a:t>)</a:t>
+            </a:r>
+            <a:br>
+              <a:rPr lang="es-ES" dirty="0"/>
+            </a:br>
+            <a:endParaRPr lang="es-ES" dirty="0">
+              <a:solidFill>
+                <a:srgbClr val="FF0000"/>
+              </a:solidFill>
+            </a:endParaRPr>
+          </a:p>
+        </p:txBody>
+      </p:sp>
+      <p:sp>
+        <p:nvSpPr>
+          <p:cNvPr id="3" name="CuadroTexto 2">
+            <a:extLst>
+              <a:ext uri="{FF2B5EF4-FFF2-40B4-BE49-F238E27FC236}">
+                <a16:creationId xmlns:a16="http://schemas.microsoft.com/office/drawing/2014/main" id="{364C72FC-E046-B03F-7407-BB1F6D7618F8}"/>
+              </a:ext>
+            </a:extLst>
+          </p:cNvPr>
+          <p:cNvSpPr txBox="1"/>
+          <p:nvPr/>
+        </p:nvSpPr>
+        <p:spPr>
+          <a:xfrm>
+            <a:off x="224285" y="155275"/>
+            <a:ext cx="1923691" cy="369332"/>
+          </a:xfrm>
+          <a:prstGeom prst="rect">
+            <a:avLst/>
+          </a:prstGeom>
+          <a:noFill/>
+        </p:spPr>
+        <p:txBody>
+          <a:bodyPr wrap="square" rtlCol="0">
+            <a:spAutoFit/>
+          </a:bodyPr>
+          <a:lstStyle/>
+          <a:p>
+            <a:r>
+              <a:rPr lang="es-ES" dirty="0"/>
+              <a:t>CORREGIT</a:t>
+            </a:r>
+          </a:p>
+        </p:txBody>
+      </p:sp>
+    </p:spTree>
+    <p:extLst>
+      <p:ext uri="{BB962C8B-B14F-4D97-AF65-F5344CB8AC3E}">
+        <p14:creationId xmlns:p14="http://schemas.microsoft.com/office/powerpoint/2010/main" val="1722228438"/>
       </p:ext>
     </p:extLst>
   </p:cSld>
